--- a/pptx/Module04_Dépendances_fonctionnelles.pptx
+++ b/pptx/Module04_Dépendances_fonctionnelles.pptx
@@ -12,9 +12,12 @@
     <p:sldId id="260" r:id="rId6"/>
     <p:sldId id="261" r:id="rId7"/>
     <p:sldId id="262" r:id="rId8"/>
+    <p:sldId id="263" r:id="rId9"/>
+    <p:sldId id="264" r:id="rId10"/>
+    <p:sldId id="265" r:id="rId11"/>
   </p:sldIdLst>
   <p:notesMasterIdLst>
-    <p:notesMasterId r:id="rId9"/>
+    <p:notesMasterId r:id="rId12"/>
   </p:notesMasterIdLst>
   <p:sldSz cx="9144000" cy="5143500"/>
   <p:notesSz cx="5143500" cy="9144000"/>
@@ -550,6 +553,94 @@
 </p:notes>
 </file>
 
+<file path=ppt/notesSlides/notesSlide10.xml><?xml version="1.0" encoding="utf-8"?>
+<p:notes xmlns:a="http://schemas.openxmlformats.org/drawingml/2006/main" xmlns:r="http://schemas.openxmlformats.org/officeDocument/2006/relationships" xmlns:p="http://schemas.openxmlformats.org/presentationml/2006/main">
+  <p:cSld>
+    <p:spTree>
+      <p:nvGrpSpPr>
+        <p:cNvPr id="1" name=""/>
+        <p:cNvGrpSpPr/>
+        <p:nvPr/>
+      </p:nvGrpSpPr>
+      <p:grpSpPr>
+        <a:xfrm>
+          <a:off x="0" y="0"/>
+          <a:ext cx="0" cy="0"/>
+          <a:chOff x="0" y="0"/>
+          <a:chExt cx="0" cy="0"/>
+        </a:xfrm>
+      </p:grpSpPr>
+      <p:sp>
+        <p:nvSpPr>
+          <p:cNvPr id="2" name="Slide Image Placeholder 1"/>
+          <p:cNvSpPr>
+            <a:spLocks noGrp="1" noRot="1" noChangeAspect="1"/>
+          </p:cNvSpPr>
+          <p:nvPr>
+            <p:ph type="sldImg"/>
+          </p:nvPr>
+        </p:nvSpPr>
+        <p:spPr/>
+      </p:sp>
+      <p:sp>
+        <p:nvSpPr>
+          <p:cNvPr id="3" name="Notes Placeholder 2"/>
+          <p:cNvSpPr>
+            <a:spLocks noGrp="1"/>
+          </p:cNvSpPr>
+          <p:nvPr>
+            <p:ph type="body" idx="1"/>
+          </p:nvPr>
+        </p:nvSpPr>
+        <p:spPr/>
+        <p:txBody>
+          <a:bodyPr/>
+          <a:lstStyle/>
+          <a:p>
+            <a:r>
+              <a:rPr lang="en-US" dirty="0"/>
+              <a:t/>
+            </a:r>
+            <a:endParaRPr lang="en-US" dirty="0"/>
+          </a:p>
+        </p:txBody>
+      </p:sp>
+      <p:sp>
+        <p:nvSpPr>
+          <p:cNvPr id="4" name="Slide Number Placeholder 3"/>
+          <p:cNvSpPr>
+            <a:spLocks noGrp="1"/>
+          </p:cNvSpPr>
+          <p:nvPr>
+            <p:ph type="sldNum" sz="quarter" idx="10"/>
+          </p:nvPr>
+        </p:nvSpPr>
+        <p:spPr/>
+        <p:txBody>
+          <a:bodyPr/>
+          <a:lstStyle/>
+          <a:p>
+            <a:fld id="{F7021451-1387-4CA6-816F-3879F97B5CBC}" type="slidenum">
+              <a:rPr lang="en-US"/>
+              <a:t>10</a:t>
+            </a:fld>
+            <a:endParaRPr lang="en-US"/>
+          </a:p>
+        </p:txBody>
+      </p:sp>
+    </p:spTree>
+    <p:extLst>
+      <p:ext uri="{BB962C8B-B14F-4D97-AF65-F5344CB8AC3E}">
+        <p14:creationId xmlns:p14="http://schemas.microsoft.com/office/powerpoint/2010/main" val="1024086991"/>
+      </p:ext>
+    </p:extLst>
+  </p:cSld>
+  <p:clrMapOvr>
+    <a:masterClrMapping/>
+  </p:clrMapOvr>
+</p:notes>
+</file>
+
 <file path=ppt/notesSlides/notesSlide2.xml><?xml version="1.0" encoding="utf-8"?>
 <p:notes xmlns:a="http://schemas.openxmlformats.org/drawingml/2006/main" xmlns:r="http://schemas.openxmlformats.org/officeDocument/2006/relationships" xmlns:p="http://schemas.openxmlformats.org/presentationml/2006/main">
   <p:cSld>
@@ -596,7 +687,7 @@
           <a:p>
             <a:r>
               <a:rPr lang="en-US" dirty="0"/>
-              <a:t/>
+              <a:t>Exercice immédiat : poser des DF et demander vrai/faux. 'num_tel → nom_personne ?' → Oui (un numéro = une personne). 'nom_personne → num_tel ?' → Non (homonymes).</a:t>
             </a:r>
             <a:endParaRPr lang="en-US" dirty="0"/>
           </a:p>
@@ -684,7 +775,7 @@
           <a:p>
             <a:r>
               <a:rPr lang="en-US" dirty="0"/>
-              <a:t/>
+              <a:t>La DF transitive est le concept clé pour la normalisation. Si on garde nom_salle dans la table Session, on aura des anomalies de mise à jour.</a:t>
             </a:r>
             <a:endParaRPr lang="en-US" dirty="0"/>
           </a:p>
@@ -772,7 +863,7 @@
           <a:p>
             <a:r>
               <a:rPr lang="en-US" dirty="0"/>
-              <a:t/>
+              <a:t>Faire au tableau avec 5-6 données de SwissSound. Les étudiants copient et complètent.</a:t>
             </a:r>
             <a:endParaRPr lang="en-US" dirty="0"/>
           </a:p>
@@ -860,7 +951,7 @@
           <a:p>
             <a:r>
               <a:rPr lang="en-US" dirty="0"/>
-              <a:t/>
+              <a:t>Montrer comment lire la matrice. id_artiste détermine nom, prenom, email (ligne id_artiste = 1,1,1). id_artiste est une SOURCE (colonne id_artiste = que des 0).</a:t>
             </a:r>
             <a:endParaRPr lang="en-US" dirty="0"/>
           </a:p>
@@ -948,7 +1039,7 @@
           <a:p>
             <a:r>
               <a:rPr lang="en-US" dirty="0"/>
-              <a:t/>
+              <a:t>Le graphe aide à 'voir' la structure avant de dessiner le MCD. Les sources deviennent les entités, les dépendants deviennent les attributs.</a:t>
             </a:r>
             <a:endParaRPr lang="en-US" dirty="0"/>
           </a:p>
@@ -1036,7 +1127,7 @@
           <a:p>
             <a:r>
               <a:rPr lang="en-US" dirty="0"/>
-              <a:t/>
+              <a:t>Faire le lien explicite : chaque source du graphe = une entité. Chaque dépendance = un attribut. Chaque DF entre sources = une relation.</a:t>
             </a:r>
             <a:endParaRPr lang="en-US" dirty="0"/>
           </a:p>
@@ -1060,6 +1151,182 @@
             <a:fld id="{F7021451-1387-4CA6-816F-3879F97B5CBC}" type="slidenum">
               <a:rPr lang="en-US"/>
               <a:t>7</a:t>
+            </a:fld>
+            <a:endParaRPr lang="en-US"/>
+          </a:p>
+        </p:txBody>
+      </p:sp>
+    </p:spTree>
+    <p:extLst>
+      <p:ext uri="{BB962C8B-B14F-4D97-AF65-F5344CB8AC3E}">
+        <p14:creationId xmlns:p14="http://schemas.microsoft.com/office/powerpoint/2010/main" val="1024086991"/>
+      </p:ext>
+    </p:extLst>
+  </p:cSld>
+  <p:clrMapOvr>
+    <a:masterClrMapping/>
+  </p:clrMapOvr>
+</p:notes>
+</file>
+
+<file path=ppt/notesSlides/notesSlide8.xml><?xml version="1.0" encoding="utf-8"?>
+<p:notes xmlns:a="http://schemas.openxmlformats.org/drawingml/2006/main" xmlns:r="http://schemas.openxmlformats.org/officeDocument/2006/relationships" xmlns:p="http://schemas.openxmlformats.org/presentationml/2006/main">
+  <p:cSld>
+    <p:spTree>
+      <p:nvGrpSpPr>
+        <p:cNvPr id="1" name=""/>
+        <p:cNvGrpSpPr/>
+        <p:nvPr/>
+      </p:nvGrpSpPr>
+      <p:grpSpPr>
+        <a:xfrm>
+          <a:off x="0" y="0"/>
+          <a:ext cx="0" cy="0"/>
+          <a:chOff x="0" y="0"/>
+          <a:chExt cx="0" cy="0"/>
+        </a:xfrm>
+      </p:grpSpPr>
+      <p:sp>
+        <p:nvSpPr>
+          <p:cNvPr id="2" name="Slide Image Placeholder 1"/>
+          <p:cNvSpPr>
+            <a:spLocks noGrp="1" noRot="1" noChangeAspect="1"/>
+          </p:cNvSpPr>
+          <p:nvPr>
+            <p:ph type="sldImg"/>
+          </p:nvPr>
+        </p:nvSpPr>
+        <p:spPr/>
+      </p:sp>
+      <p:sp>
+        <p:nvSpPr>
+          <p:cNvPr id="3" name="Notes Placeholder 2"/>
+          <p:cNvSpPr>
+            <a:spLocks noGrp="1"/>
+          </p:cNvSpPr>
+          <p:nvPr>
+            <p:ph type="body" idx="1"/>
+          </p:nvPr>
+        </p:nvSpPr>
+        <p:spPr/>
+        <p:txBody>
+          <a:bodyPr/>
+          <a:lstStyle/>
+          <a:p>
+            <a:r>
+              <a:rPr lang="en-US" dirty="0"/>
+              <a:t>Exercice clé du module. La matrice et le graphe préparent le MCD (module suivant).</a:t>
+            </a:r>
+            <a:endParaRPr lang="en-US" dirty="0"/>
+          </a:p>
+        </p:txBody>
+      </p:sp>
+      <p:sp>
+        <p:nvSpPr>
+          <p:cNvPr id="4" name="Slide Number Placeholder 3"/>
+          <p:cNvSpPr>
+            <a:spLocks noGrp="1"/>
+          </p:cNvSpPr>
+          <p:nvPr>
+            <p:ph type="sldNum" sz="quarter" idx="10"/>
+          </p:nvPr>
+        </p:nvSpPr>
+        <p:spPr/>
+        <p:txBody>
+          <a:bodyPr/>
+          <a:lstStyle/>
+          <a:p>
+            <a:fld id="{F7021451-1387-4CA6-816F-3879F97B5CBC}" type="slidenum">
+              <a:rPr lang="en-US"/>
+              <a:t>8</a:t>
+            </a:fld>
+            <a:endParaRPr lang="en-US"/>
+          </a:p>
+        </p:txBody>
+      </p:sp>
+    </p:spTree>
+    <p:extLst>
+      <p:ext uri="{BB962C8B-B14F-4D97-AF65-F5344CB8AC3E}">
+        <p14:creationId xmlns:p14="http://schemas.microsoft.com/office/powerpoint/2010/main" val="1024086991"/>
+      </p:ext>
+    </p:extLst>
+  </p:cSld>
+  <p:clrMapOvr>
+    <a:masterClrMapping/>
+  </p:clrMapOvr>
+</p:notes>
+</file>
+
+<file path=ppt/notesSlides/notesSlide9.xml><?xml version="1.0" encoding="utf-8"?>
+<p:notes xmlns:a="http://schemas.openxmlformats.org/drawingml/2006/main" xmlns:r="http://schemas.openxmlformats.org/officeDocument/2006/relationships" xmlns:p="http://schemas.openxmlformats.org/presentationml/2006/main">
+  <p:cSld>
+    <p:spTree>
+      <p:nvGrpSpPr>
+        <p:cNvPr id="1" name=""/>
+        <p:cNvGrpSpPr/>
+        <p:nvPr/>
+      </p:nvGrpSpPr>
+      <p:grpSpPr>
+        <a:xfrm>
+          <a:off x="0" y="0"/>
+          <a:ext cx="0" cy="0"/>
+          <a:chOff x="0" y="0"/>
+          <a:chExt cx="0" cy="0"/>
+        </a:xfrm>
+      </p:grpSpPr>
+      <p:sp>
+        <p:nvSpPr>
+          <p:cNvPr id="2" name="Slide Image Placeholder 1"/>
+          <p:cNvSpPr>
+            <a:spLocks noGrp="1" noRot="1" noChangeAspect="1"/>
+          </p:cNvSpPr>
+          <p:nvPr>
+            <p:ph type="sldImg"/>
+          </p:nvPr>
+        </p:nvSpPr>
+        <p:spPr/>
+      </p:sp>
+      <p:sp>
+        <p:nvSpPr>
+          <p:cNvPr id="3" name="Notes Placeholder 2"/>
+          <p:cNvSpPr>
+            <a:spLocks noGrp="1"/>
+          </p:cNvSpPr>
+          <p:nvPr>
+            <p:ph type="body" idx="1"/>
+          </p:nvPr>
+        </p:nvSpPr>
+        <p:spPr/>
+        <p:txBody>
+          <a:bodyPr/>
+          <a:lstStyle/>
+          <a:p>
+            <a:r>
+              <a:rPr lang="en-US" dirty="0"/>
+              <a:t/>
+            </a:r>
+            <a:endParaRPr lang="en-US" dirty="0"/>
+          </a:p>
+        </p:txBody>
+      </p:sp>
+      <p:sp>
+        <p:nvSpPr>
+          <p:cNvPr id="4" name="Slide Number Placeholder 3"/>
+          <p:cNvSpPr>
+            <a:spLocks noGrp="1"/>
+          </p:cNvSpPr>
+          <p:nvPr>
+            <p:ph type="sldNum" sz="quarter" idx="10"/>
+          </p:nvPr>
+        </p:nvSpPr>
+        <p:spPr/>
+        <p:txBody>
+          <a:bodyPr/>
+          <a:lstStyle/>
+          <a:p>
+            <a:fld id="{F7021451-1387-4CA6-816F-3879F97B5CBC}" type="slidenum">
+              <a:rPr lang="en-US"/>
+              <a:t>9</a:t>
             </a:fld>
             <a:endParaRPr lang="en-US"/>
           </a:p>
@@ -1445,7 +1712,7 @@
         </p:blipFill>
         <p:spPr>
           <a:xfrm>
-            <a:off x="3931920" y="457200"/>
+            <a:off x="3931920" y="365760"/>
             <a:ext cx="1280160" cy="1280160"/>
           </a:xfrm>
           <a:prstGeom prst="rect">
@@ -1461,7 +1728,7 @@
         </p:nvSpPr>
         <p:spPr>
           <a:xfrm>
-            <a:off x="457200" y="1828800"/>
+            <a:off x="457200" y="1737360"/>
             <a:ext cx="8229600" cy="457200"/>
           </a:xfrm>
           <a:prstGeom prst="rect">
@@ -1500,8 +1767,8 @@
         </p:nvSpPr>
         <p:spPr>
           <a:xfrm>
-            <a:off x="457200" y="2286000"/>
-            <a:ext cx="8229600" cy="822960"/>
+            <a:off x="274320" y="2194560"/>
+            <a:ext cx="8595360" cy="822960"/>
           </a:xfrm>
           <a:prstGeom prst="rect">
             <a:avLst/>
@@ -1517,7 +1784,7 @@
               <a:buNone/>
             </a:pPr>
             <a:r>
-              <a:rPr lang="en-US" sz="3400" b="1" dirty="0">
+              <a:rPr lang="en-US" sz="3200" b="1" dirty="0">
                 <a:solidFill>
                   <a:srgbClr val="FFFFFF"/>
                 </a:solidFill>
@@ -1527,7 +1794,7 @@
               </a:rPr>
               <a:t>Dépendances fonctionnelles</a:t>
             </a:r>
-            <a:endParaRPr lang="en-US" sz="3400" dirty="0"/>
+            <a:endParaRPr lang="en-US" sz="3200" dirty="0"/>
           </a:p>
         </p:txBody>
       </p:sp>
@@ -1539,7 +1806,7 @@
         </p:nvSpPr>
         <p:spPr>
           <a:xfrm>
-            <a:off x="457200" y="3108960"/>
+            <a:off x="457200" y="3017520"/>
             <a:ext cx="8229600" cy="457200"/>
           </a:xfrm>
           <a:prstGeom prst="rect">
@@ -1556,7 +1823,7 @@
               <a:buNone/>
             </a:pPr>
             <a:r>
-              <a:rPr lang="en-US" sz="1600" dirty="0">
+              <a:rPr lang="en-US" sz="1500" dirty="0">
                 <a:solidFill>
                   <a:srgbClr val="CCCCCC"/>
                 </a:solidFill>
@@ -1564,9 +1831,9 @@
                 <a:ea typeface="Calibri" pitchFamily="34" charset="-122"/>
                 <a:cs typeface="Calibri" pitchFamily="34" charset="-120"/>
               </a:rPr>
-              <a:t>Matrice des DF, graphe SAT/SRE</a:t>
+              <a:t>Matrice des DF · Graphe SAT/SRE · Sources</a:t>
             </a:r>
-            <a:endParaRPr lang="en-US" sz="1600" dirty="0"/>
+            <a:endParaRPr lang="en-US" sz="1500" dirty="0"/>
           </a:p>
         </p:txBody>
       </p:sp>
@@ -1597,13 +1864,13 @@
             <a:r>
               <a:rPr lang="en-US" sz="1100" dirty="0">
                 <a:solidFill>
-                  <a:srgbClr val="AAAACC"/>
+                  <a:srgbClr val="AA99CC"/>
                 </a:solidFill>
                 <a:latin typeface="Calibri" pitchFamily="34" charset="0"/>
                 <a:ea typeface="Calibri" pitchFamily="34" charset="-122"/>
                 <a:cs typeface="Calibri" pitchFamily="34" charset="-120"/>
               </a:rPr>
-              <a:t>Unit 4 — Database Design &amp; Development | SwissSound Studios</a:t>
+              <a:t>SwissSound Studios | BTEC: P1 M1 | LO1</a:t>
             </a:r>
             <a:endParaRPr lang="en-US" sz="1100" dirty="0"/>
           </a:p>
@@ -1636,15 +1903,971 @@
             <a:r>
               <a:rPr lang="en-US" sz="1000" dirty="0">
                 <a:solidFill>
-                  <a:srgbClr val="8888AA"/>
+                  <a:srgbClr val="887799"/>
                 </a:solidFill>
                 <a:latin typeface="Calibri" pitchFamily="34" charset="0"/>
                 <a:ea typeface="Calibri" pitchFamily="34" charset="-122"/>
                 <a:cs typeface="Calibri" pitchFamily="34" charset="-120"/>
               </a:rPr>
-              <a:t>BTEC : P1 M1 | LO1</a:t>
+              <a:t>🎵 Unit 4 — Database Design &amp; Development</a:t>
             </a:r>
             <a:endParaRPr lang="en-US" sz="1000" dirty="0"/>
+          </a:p>
+        </p:txBody>
+      </p:sp>
+    </p:spTree>
+  </p:cSld>
+  <p:clrMapOvr>
+    <a:masterClrMapping/>
+  </p:clrMapOvr>
+</p:sld>
+</file>
+
+<file path=ppt/slides/slide10.xml><?xml version="1.0" encoding="utf-8"?>
+<p:sld xmlns:a="http://schemas.openxmlformats.org/drawingml/2006/main" xmlns:r="http://schemas.openxmlformats.org/officeDocument/2006/relationships" xmlns:p="http://schemas.openxmlformats.org/presentationml/2006/main">
+  <p:cSld name="Slide 10">
+    <p:bg>
+      <p:bgPr>
+        <a:solidFill>
+          <a:srgbClr val="F5F7FA"/>
+        </a:solidFill>
+      </p:bgPr>
+    </p:bg>
+    <p:spTree>
+      <p:nvGrpSpPr>
+        <p:cNvPr id="1" name=""/>
+        <p:cNvGrpSpPr/>
+        <p:nvPr/>
+      </p:nvGrpSpPr>
+      <p:grpSpPr>
+        <a:xfrm>
+          <a:off x="0" y="0"/>
+          <a:ext cx="0" cy="0"/>
+          <a:chOff x="0" y="0"/>
+          <a:chExt cx="0" cy="0"/>
+        </a:xfrm>
+      </p:grpSpPr>
+      <p:sp>
+        <p:nvSpPr>
+          <p:cNvPr id="2" name="Text 0"/>
+          <p:cNvSpPr/>
+          <p:nvPr/>
+        </p:nvSpPr>
+        <p:spPr>
+          <a:xfrm>
+            <a:off x="457200" y="137160"/>
+            <a:ext cx="5486400" cy="411480"/>
+          </a:xfrm>
+          <a:prstGeom prst="rect">
+            <a:avLst/>
+          </a:prstGeom>
+          <a:noFill/>
+          <a:ln/>
+        </p:spPr>
+        <p:txBody>
+          <a:bodyPr wrap="square" lIns="0" tIns="0" rIns="0" bIns="0" rtlCol="0" anchor="ctr"/>
+          <a:lstStyle/>
+          <a:p>
+            <a:pPr indent="0" marL="0">
+              <a:buNone/>
+            </a:pPr>
+            <a:r>
+              <a:rPr lang="en-US" sz="1800" b="1" dirty="0">
+                <a:solidFill>
+                  <a:srgbClr val="1B5E20"/>
+                </a:solidFill>
+                <a:latin typeface="Trebuchet MS" pitchFamily="34" charset="0"/>
+                <a:ea typeface="Trebuchet MS" pitchFamily="34" charset="-122"/>
+                <a:cs typeface="Trebuchet MS" pitchFamily="34" charset="-120"/>
+              </a:rPr>
+              <a:t>📋 Mémo Module 4</a:t>
+            </a:r>
+            <a:endParaRPr lang="en-US" sz="1800" dirty="0"/>
+          </a:p>
+        </p:txBody>
+      </p:sp>
+      <p:sp>
+        <p:nvSpPr>
+          <p:cNvPr id="3" name="Shape 1"/>
+          <p:cNvSpPr/>
+          <p:nvPr/>
+        </p:nvSpPr>
+        <p:spPr>
+          <a:xfrm>
+            <a:off x="457200" y="548640"/>
+            <a:ext cx="8229600" cy="274320"/>
+          </a:xfrm>
+          <a:prstGeom prst="rect">
+            <a:avLst/>
+          </a:prstGeom>
+          <a:solidFill>
+            <a:srgbClr val="FFF3E0"/>
+          </a:solidFill>
+          <a:ln/>
+        </p:spPr>
+      </p:sp>
+      <p:sp>
+        <p:nvSpPr>
+          <p:cNvPr id="4" name="Text 2"/>
+          <p:cNvSpPr/>
+          <p:nvPr/>
+        </p:nvSpPr>
+        <p:spPr>
+          <a:xfrm>
+            <a:off x="640080" y="548640"/>
+            <a:ext cx="7772400" cy="274320"/>
+          </a:xfrm>
+          <a:prstGeom prst="rect">
+            <a:avLst/>
+          </a:prstGeom>
+          <a:noFill/>
+          <a:ln/>
+        </p:spPr>
+        <p:txBody>
+          <a:bodyPr wrap="square" lIns="0" tIns="0" rIns="0" bIns="0" rtlCol="0" anchor="ctr"/>
+          <a:lstStyle/>
+          <a:p>
+            <a:pPr indent="0" marL="0">
+              <a:buNone/>
+            </a:pPr>
+            <a:r>
+              <a:rPr lang="en-US" sz="900" b="1" dirty="0">
+                <a:solidFill>
+                  <a:srgbClr val="E65100"/>
+                </a:solidFill>
+                <a:latin typeface="Calibri" pitchFamily="34" charset="0"/>
+                <a:ea typeface="Calibri" pitchFamily="34" charset="-122"/>
+                <a:cs typeface="Calibri" pitchFamily="34" charset="-120"/>
+              </a:rPr>
+              <a:t>🔒 Déblocable après complétion de toutes les phases</a:t>
+            </a:r>
+            <a:endParaRPr lang="en-US" sz="900" dirty="0"/>
+          </a:p>
+        </p:txBody>
+      </p:sp>
+      <p:sp>
+        <p:nvSpPr>
+          <p:cNvPr id="5" name="Shape 3"/>
+          <p:cNvSpPr/>
+          <p:nvPr/>
+        </p:nvSpPr>
+        <p:spPr>
+          <a:xfrm>
+            <a:off x="457200" y="960120"/>
+            <a:ext cx="2286000" cy="475488"/>
+          </a:xfrm>
+          <a:prstGeom prst="rect">
+            <a:avLst/>
+          </a:prstGeom>
+          <a:solidFill>
+            <a:srgbClr val="E8F5E9"/>
+          </a:solidFill>
+          <a:ln/>
+        </p:spPr>
+      </p:sp>
+      <p:sp>
+        <p:nvSpPr>
+          <p:cNvPr id="6" name="Text 4"/>
+          <p:cNvSpPr/>
+          <p:nvPr/>
+        </p:nvSpPr>
+        <p:spPr>
+          <a:xfrm>
+            <a:off x="548640" y="960120"/>
+            <a:ext cx="2103120" cy="475488"/>
+          </a:xfrm>
+          <a:prstGeom prst="rect">
+            <a:avLst/>
+          </a:prstGeom>
+          <a:noFill/>
+          <a:ln/>
+        </p:spPr>
+        <p:txBody>
+          <a:bodyPr wrap="square" lIns="0" tIns="0" rIns="0" bIns="0" rtlCol="0" anchor="ctr"/>
+          <a:lstStyle/>
+          <a:p>
+            <a:pPr indent="0" marL="0">
+              <a:buNone/>
+            </a:pPr>
+            <a:r>
+              <a:rPr lang="en-US" sz="900" b="1" dirty="0">
+                <a:solidFill>
+                  <a:srgbClr val="1B5E20"/>
+                </a:solidFill>
+                <a:latin typeface="Trebuchet MS" pitchFamily="34" charset="0"/>
+                <a:ea typeface="Trebuchet MS" pitchFamily="34" charset="-122"/>
+                <a:cs typeface="Trebuchet MS" pitchFamily="34" charset="-120"/>
+              </a:rPr>
+              <a:t>A → B</a:t>
+            </a:r>
+            <a:endParaRPr lang="en-US" sz="900" dirty="0"/>
+          </a:p>
+        </p:txBody>
+      </p:sp>
+      <p:sp>
+        <p:nvSpPr>
+          <p:cNvPr id="7" name="Shape 5"/>
+          <p:cNvSpPr/>
+          <p:nvPr/>
+        </p:nvSpPr>
+        <p:spPr>
+          <a:xfrm>
+            <a:off x="2743200" y="960120"/>
+            <a:ext cx="5943600" cy="475488"/>
+          </a:xfrm>
+          <a:prstGeom prst="rect">
+            <a:avLst/>
+          </a:prstGeom>
+          <a:solidFill>
+            <a:srgbClr val="E8F5E9"/>
+          </a:solidFill>
+          <a:ln/>
+        </p:spPr>
+      </p:sp>
+      <p:sp>
+        <p:nvSpPr>
+          <p:cNvPr id="8" name="Text 6"/>
+          <p:cNvSpPr/>
+          <p:nvPr/>
+        </p:nvSpPr>
+        <p:spPr>
+          <a:xfrm>
+            <a:off x="2834640" y="960120"/>
+            <a:ext cx="5760720" cy="475488"/>
+          </a:xfrm>
+          <a:prstGeom prst="rect">
+            <a:avLst/>
+          </a:prstGeom>
+          <a:noFill/>
+          <a:ln/>
+        </p:spPr>
+        <p:txBody>
+          <a:bodyPr wrap="square" lIns="0" tIns="0" rIns="0" bIns="0" rtlCol="0" anchor="ctr"/>
+          <a:lstStyle/>
+          <a:p>
+            <a:pPr indent="0" marL="0">
+              <a:buNone/>
+            </a:pPr>
+            <a:r>
+              <a:rPr lang="en-US" sz="900" dirty="0">
+                <a:solidFill>
+                  <a:srgbClr val="333333"/>
+                </a:solidFill>
+                <a:latin typeface="Calibri" pitchFamily="34" charset="0"/>
+                <a:ea typeface="Calibri" pitchFamily="34" charset="-122"/>
+                <a:cs typeface="Calibri" pitchFamily="34" charset="-120"/>
+              </a:rPr>
+              <a:t>Connaître A suffit pour déterminer B de façon unique</a:t>
+            </a:r>
+            <a:endParaRPr lang="en-US" sz="900" dirty="0"/>
+          </a:p>
+        </p:txBody>
+      </p:sp>
+      <p:sp>
+        <p:nvSpPr>
+          <p:cNvPr id="9" name="Shape 7"/>
+          <p:cNvSpPr/>
+          <p:nvPr/>
+        </p:nvSpPr>
+        <p:spPr>
+          <a:xfrm>
+            <a:off x="457200" y="1463040"/>
+            <a:ext cx="2286000" cy="475488"/>
+          </a:xfrm>
+          <a:prstGeom prst="rect">
+            <a:avLst/>
+          </a:prstGeom>
+          <a:solidFill>
+            <a:srgbClr val="F0F0F0"/>
+          </a:solidFill>
+          <a:ln/>
+        </p:spPr>
+      </p:sp>
+      <p:sp>
+        <p:nvSpPr>
+          <p:cNvPr id="10" name="Text 8"/>
+          <p:cNvSpPr/>
+          <p:nvPr/>
+        </p:nvSpPr>
+        <p:spPr>
+          <a:xfrm>
+            <a:off x="548640" y="1463040"/>
+            <a:ext cx="2103120" cy="475488"/>
+          </a:xfrm>
+          <a:prstGeom prst="rect">
+            <a:avLst/>
+          </a:prstGeom>
+          <a:noFill/>
+          <a:ln/>
+        </p:spPr>
+        <p:txBody>
+          <a:bodyPr wrap="square" lIns="0" tIns="0" rIns="0" bIns="0" rtlCol="0" anchor="ctr"/>
+          <a:lstStyle/>
+          <a:p>
+            <a:pPr indent="0" marL="0">
+              <a:buNone/>
+            </a:pPr>
+            <a:r>
+              <a:rPr lang="en-US" sz="900" b="1" dirty="0">
+                <a:solidFill>
+                  <a:srgbClr val="1B5E20"/>
+                </a:solidFill>
+                <a:latin typeface="Trebuchet MS" pitchFamily="34" charset="0"/>
+                <a:ea typeface="Trebuchet MS" pitchFamily="34" charset="-122"/>
+                <a:cs typeface="Trebuchet MS" pitchFamily="34" charset="-120"/>
+              </a:rPr>
+              <a:t>DF élémentaire</a:t>
+            </a:r>
+            <a:endParaRPr lang="en-US" sz="900" dirty="0"/>
+          </a:p>
+        </p:txBody>
+      </p:sp>
+      <p:sp>
+        <p:nvSpPr>
+          <p:cNvPr id="11" name="Shape 9"/>
+          <p:cNvSpPr/>
+          <p:nvPr/>
+        </p:nvSpPr>
+        <p:spPr>
+          <a:xfrm>
+            <a:off x="2743200" y="1463040"/>
+            <a:ext cx="5943600" cy="475488"/>
+          </a:xfrm>
+          <a:prstGeom prst="rect">
+            <a:avLst/>
+          </a:prstGeom>
+          <a:solidFill>
+            <a:srgbClr val="F0F0F0"/>
+          </a:solidFill>
+          <a:ln/>
+        </p:spPr>
+      </p:sp>
+      <p:sp>
+        <p:nvSpPr>
+          <p:cNvPr id="12" name="Text 10"/>
+          <p:cNvSpPr/>
+          <p:nvPr/>
+        </p:nvSpPr>
+        <p:spPr>
+          <a:xfrm>
+            <a:off x="2834640" y="1463040"/>
+            <a:ext cx="5760720" cy="475488"/>
+          </a:xfrm>
+          <a:prstGeom prst="rect">
+            <a:avLst/>
+          </a:prstGeom>
+          <a:noFill/>
+          <a:ln/>
+        </p:spPr>
+        <p:txBody>
+          <a:bodyPr wrap="square" lIns="0" tIns="0" rIns="0" bIns="0" rtlCol="0" anchor="ctr"/>
+          <a:lstStyle/>
+          <a:p>
+            <a:pPr indent="0" marL="0">
+              <a:buNone/>
+            </a:pPr>
+            <a:r>
+              <a:rPr lang="en-US" sz="900" dirty="0">
+                <a:solidFill>
+                  <a:srgbClr val="333333"/>
+                </a:solidFill>
+                <a:latin typeface="Calibri" pitchFamily="34" charset="0"/>
+                <a:ea typeface="Calibri" pitchFamily="34" charset="-122"/>
+                <a:cs typeface="Calibri" pitchFamily="34" charset="-120"/>
+              </a:rPr>
+              <a:t>Le côté gauche ne peut pas être réduit</a:t>
+            </a:r>
+            <a:endParaRPr lang="en-US" sz="900" dirty="0"/>
+          </a:p>
+        </p:txBody>
+      </p:sp>
+      <p:sp>
+        <p:nvSpPr>
+          <p:cNvPr id="13" name="Shape 11"/>
+          <p:cNvSpPr/>
+          <p:nvPr/>
+        </p:nvSpPr>
+        <p:spPr>
+          <a:xfrm>
+            <a:off x="457200" y="1965960"/>
+            <a:ext cx="2286000" cy="475488"/>
+          </a:xfrm>
+          <a:prstGeom prst="rect">
+            <a:avLst/>
+          </a:prstGeom>
+          <a:solidFill>
+            <a:srgbClr val="E8F5E9"/>
+          </a:solidFill>
+          <a:ln/>
+        </p:spPr>
+      </p:sp>
+      <p:sp>
+        <p:nvSpPr>
+          <p:cNvPr id="14" name="Text 12"/>
+          <p:cNvSpPr/>
+          <p:nvPr/>
+        </p:nvSpPr>
+        <p:spPr>
+          <a:xfrm>
+            <a:off x="548640" y="1965960"/>
+            <a:ext cx="2103120" cy="475488"/>
+          </a:xfrm>
+          <a:prstGeom prst="rect">
+            <a:avLst/>
+          </a:prstGeom>
+          <a:noFill/>
+          <a:ln/>
+        </p:spPr>
+        <p:txBody>
+          <a:bodyPr wrap="square" lIns="0" tIns="0" rIns="0" bIns="0" rtlCol="0" anchor="ctr"/>
+          <a:lstStyle/>
+          <a:p>
+            <a:pPr indent="0" marL="0">
+              <a:buNone/>
+            </a:pPr>
+            <a:r>
+              <a:rPr lang="en-US" sz="900" b="1" dirty="0">
+                <a:solidFill>
+                  <a:srgbClr val="1B5E20"/>
+                </a:solidFill>
+                <a:latin typeface="Trebuchet MS" pitchFamily="34" charset="0"/>
+                <a:ea typeface="Trebuchet MS" pitchFamily="34" charset="-122"/>
+                <a:cs typeface="Trebuchet MS" pitchFamily="34" charset="-120"/>
+              </a:rPr>
+              <a:t>DF transitive</a:t>
+            </a:r>
+            <a:endParaRPr lang="en-US" sz="900" dirty="0"/>
+          </a:p>
+        </p:txBody>
+      </p:sp>
+      <p:sp>
+        <p:nvSpPr>
+          <p:cNvPr id="15" name="Shape 13"/>
+          <p:cNvSpPr/>
+          <p:nvPr/>
+        </p:nvSpPr>
+        <p:spPr>
+          <a:xfrm>
+            <a:off x="2743200" y="1965960"/>
+            <a:ext cx="5943600" cy="475488"/>
+          </a:xfrm>
+          <a:prstGeom prst="rect">
+            <a:avLst/>
+          </a:prstGeom>
+          <a:solidFill>
+            <a:srgbClr val="E8F5E9"/>
+          </a:solidFill>
+          <a:ln/>
+        </p:spPr>
+      </p:sp>
+      <p:sp>
+        <p:nvSpPr>
+          <p:cNvPr id="16" name="Text 14"/>
+          <p:cNvSpPr/>
+          <p:nvPr/>
+        </p:nvSpPr>
+        <p:spPr>
+          <a:xfrm>
+            <a:off x="2834640" y="1965960"/>
+            <a:ext cx="5760720" cy="475488"/>
+          </a:xfrm>
+          <a:prstGeom prst="rect">
+            <a:avLst/>
+          </a:prstGeom>
+          <a:noFill/>
+          <a:ln/>
+        </p:spPr>
+        <p:txBody>
+          <a:bodyPr wrap="square" lIns="0" tIns="0" rIns="0" bIns="0" rtlCol="0" anchor="ctr"/>
+          <a:lstStyle/>
+          <a:p>
+            <a:pPr indent="0" marL="0">
+              <a:buNone/>
+            </a:pPr>
+            <a:r>
+              <a:rPr lang="en-US" sz="900" dirty="0">
+                <a:solidFill>
+                  <a:srgbClr val="333333"/>
+                </a:solidFill>
+                <a:latin typeface="Calibri" pitchFamily="34" charset="0"/>
+                <a:ea typeface="Calibri" pitchFamily="34" charset="-122"/>
+                <a:cs typeface="Calibri" pitchFamily="34" charset="-120"/>
+              </a:rPr>
+              <a:t>A → B → C : dépendance indirecte, à éliminer en 3NF</a:t>
+            </a:r>
+            <a:endParaRPr lang="en-US" sz="900" dirty="0"/>
+          </a:p>
+        </p:txBody>
+      </p:sp>
+      <p:sp>
+        <p:nvSpPr>
+          <p:cNvPr id="17" name="Shape 15"/>
+          <p:cNvSpPr/>
+          <p:nvPr/>
+        </p:nvSpPr>
+        <p:spPr>
+          <a:xfrm>
+            <a:off x="457200" y="2468880"/>
+            <a:ext cx="2286000" cy="475488"/>
+          </a:xfrm>
+          <a:prstGeom prst="rect">
+            <a:avLst/>
+          </a:prstGeom>
+          <a:solidFill>
+            <a:srgbClr val="F0F0F0"/>
+          </a:solidFill>
+          <a:ln/>
+        </p:spPr>
+      </p:sp>
+      <p:sp>
+        <p:nvSpPr>
+          <p:cNvPr id="18" name="Text 16"/>
+          <p:cNvSpPr/>
+          <p:nvPr/>
+        </p:nvSpPr>
+        <p:spPr>
+          <a:xfrm>
+            <a:off x="548640" y="2468880"/>
+            <a:ext cx="2103120" cy="475488"/>
+          </a:xfrm>
+          <a:prstGeom prst="rect">
+            <a:avLst/>
+          </a:prstGeom>
+          <a:noFill/>
+          <a:ln/>
+        </p:spPr>
+        <p:txBody>
+          <a:bodyPr wrap="square" lIns="0" tIns="0" rIns="0" bIns="0" rtlCol="0" anchor="ctr"/>
+          <a:lstStyle/>
+          <a:p>
+            <a:pPr indent="0" marL="0">
+              <a:buNone/>
+            </a:pPr>
+            <a:r>
+              <a:rPr lang="en-US" sz="900" b="1" dirty="0">
+                <a:solidFill>
+                  <a:srgbClr val="1B5E20"/>
+                </a:solidFill>
+                <a:latin typeface="Trebuchet MS" pitchFamily="34" charset="0"/>
+                <a:ea typeface="Trebuchet MS" pitchFamily="34" charset="-122"/>
+                <a:cs typeface="Trebuchet MS" pitchFamily="34" charset="-120"/>
+              </a:rPr>
+              <a:t>Source</a:t>
+            </a:r>
+            <a:endParaRPr lang="en-US" sz="900" dirty="0"/>
+          </a:p>
+        </p:txBody>
+      </p:sp>
+      <p:sp>
+        <p:nvSpPr>
+          <p:cNvPr id="19" name="Shape 17"/>
+          <p:cNvSpPr/>
+          <p:nvPr/>
+        </p:nvSpPr>
+        <p:spPr>
+          <a:xfrm>
+            <a:off x="2743200" y="2468880"/>
+            <a:ext cx="5943600" cy="475488"/>
+          </a:xfrm>
+          <a:prstGeom prst="rect">
+            <a:avLst/>
+          </a:prstGeom>
+          <a:solidFill>
+            <a:srgbClr val="F0F0F0"/>
+          </a:solidFill>
+          <a:ln/>
+        </p:spPr>
+      </p:sp>
+      <p:sp>
+        <p:nvSpPr>
+          <p:cNvPr id="20" name="Text 18"/>
+          <p:cNvSpPr/>
+          <p:nvPr/>
+        </p:nvSpPr>
+        <p:spPr>
+          <a:xfrm>
+            <a:off x="2834640" y="2468880"/>
+            <a:ext cx="5760720" cy="475488"/>
+          </a:xfrm>
+          <a:prstGeom prst="rect">
+            <a:avLst/>
+          </a:prstGeom>
+          <a:noFill/>
+          <a:ln/>
+        </p:spPr>
+        <p:txBody>
+          <a:bodyPr wrap="square" lIns="0" tIns="0" rIns="0" bIns="0" rtlCol="0" anchor="ctr"/>
+          <a:lstStyle/>
+          <a:p>
+            <a:pPr indent="0" marL="0">
+              <a:buNone/>
+            </a:pPr>
+            <a:r>
+              <a:rPr lang="en-US" sz="900" dirty="0">
+                <a:solidFill>
+                  <a:srgbClr val="333333"/>
+                </a:solidFill>
+                <a:latin typeface="Calibri" pitchFamily="34" charset="0"/>
+                <a:ea typeface="Calibri" pitchFamily="34" charset="-122"/>
+                <a:cs typeface="Calibri" pitchFamily="34" charset="-120"/>
+              </a:rPr>
+              <a:t>Donnée non déterminée par d'autres → future PK/entité</a:t>
+            </a:r>
+            <a:endParaRPr lang="en-US" sz="900" dirty="0"/>
+          </a:p>
+        </p:txBody>
+      </p:sp>
+      <p:sp>
+        <p:nvSpPr>
+          <p:cNvPr id="21" name="Shape 19"/>
+          <p:cNvSpPr/>
+          <p:nvPr/>
+        </p:nvSpPr>
+        <p:spPr>
+          <a:xfrm>
+            <a:off x="457200" y="2971800"/>
+            <a:ext cx="2286000" cy="475488"/>
+          </a:xfrm>
+          <a:prstGeom prst="rect">
+            <a:avLst/>
+          </a:prstGeom>
+          <a:solidFill>
+            <a:srgbClr val="E8F5E9"/>
+          </a:solidFill>
+          <a:ln/>
+        </p:spPr>
+      </p:sp>
+      <p:sp>
+        <p:nvSpPr>
+          <p:cNvPr id="22" name="Text 20"/>
+          <p:cNvSpPr/>
+          <p:nvPr/>
+        </p:nvSpPr>
+        <p:spPr>
+          <a:xfrm>
+            <a:off x="548640" y="2971800"/>
+            <a:ext cx="2103120" cy="475488"/>
+          </a:xfrm>
+          <a:prstGeom prst="rect">
+            <a:avLst/>
+          </a:prstGeom>
+          <a:noFill/>
+          <a:ln/>
+        </p:spPr>
+        <p:txBody>
+          <a:bodyPr wrap="square" lIns="0" tIns="0" rIns="0" bIns="0" rtlCol="0" anchor="ctr"/>
+          <a:lstStyle/>
+          <a:p>
+            <a:pPr indent="0" marL="0">
+              <a:buNone/>
+            </a:pPr>
+            <a:r>
+              <a:rPr lang="en-US" sz="900" b="1" dirty="0">
+                <a:solidFill>
+                  <a:srgbClr val="1B5E20"/>
+                </a:solidFill>
+                <a:latin typeface="Trebuchet MS" pitchFamily="34" charset="0"/>
+                <a:ea typeface="Trebuchet MS" pitchFamily="34" charset="-122"/>
+                <a:cs typeface="Trebuchet MS" pitchFamily="34" charset="-120"/>
+              </a:rPr>
+              <a:t>Matrice des DF</a:t>
+            </a:r>
+            <a:endParaRPr lang="en-US" sz="900" dirty="0"/>
+          </a:p>
+        </p:txBody>
+      </p:sp>
+      <p:sp>
+        <p:nvSpPr>
+          <p:cNvPr id="23" name="Shape 21"/>
+          <p:cNvSpPr/>
+          <p:nvPr/>
+        </p:nvSpPr>
+        <p:spPr>
+          <a:xfrm>
+            <a:off x="2743200" y="2971800"/>
+            <a:ext cx="5943600" cy="475488"/>
+          </a:xfrm>
+          <a:prstGeom prst="rect">
+            <a:avLst/>
+          </a:prstGeom>
+          <a:solidFill>
+            <a:srgbClr val="E8F5E9"/>
+          </a:solidFill>
+          <a:ln/>
+        </p:spPr>
+      </p:sp>
+      <p:sp>
+        <p:nvSpPr>
+          <p:cNvPr id="24" name="Text 22"/>
+          <p:cNvSpPr/>
+          <p:nvPr/>
+        </p:nvSpPr>
+        <p:spPr>
+          <a:xfrm>
+            <a:off x="2834640" y="2971800"/>
+            <a:ext cx="5760720" cy="475488"/>
+          </a:xfrm>
+          <a:prstGeom prst="rect">
+            <a:avLst/>
+          </a:prstGeom>
+          <a:noFill/>
+          <a:ln/>
+        </p:spPr>
+        <p:txBody>
+          <a:bodyPr wrap="square" lIns="0" tIns="0" rIns="0" bIns="0" rtlCol="0" anchor="ctr"/>
+          <a:lstStyle/>
+          <a:p>
+            <a:pPr indent="0" marL="0">
+              <a:buNone/>
+            </a:pPr>
+            <a:r>
+              <a:rPr lang="en-US" sz="900" dirty="0">
+                <a:solidFill>
+                  <a:srgbClr val="333333"/>
+                </a:solidFill>
+                <a:latin typeface="Calibri" pitchFamily="34" charset="0"/>
+                <a:ea typeface="Calibri" pitchFamily="34" charset="-122"/>
+                <a:cs typeface="Calibri" pitchFamily="34" charset="-120"/>
+              </a:rPr>
+              <a:t>Tableau croisé avec 1 si DF existe, 0 sinon</a:t>
+            </a:r>
+            <a:endParaRPr lang="en-US" sz="900" dirty="0"/>
+          </a:p>
+        </p:txBody>
+      </p:sp>
+      <p:sp>
+        <p:nvSpPr>
+          <p:cNvPr id="25" name="Shape 23"/>
+          <p:cNvSpPr/>
+          <p:nvPr/>
+        </p:nvSpPr>
+        <p:spPr>
+          <a:xfrm>
+            <a:off x="457200" y="3474720"/>
+            <a:ext cx="2286000" cy="475488"/>
+          </a:xfrm>
+          <a:prstGeom prst="rect">
+            <a:avLst/>
+          </a:prstGeom>
+          <a:solidFill>
+            <a:srgbClr val="F0F0F0"/>
+          </a:solidFill>
+          <a:ln/>
+        </p:spPr>
+      </p:sp>
+      <p:sp>
+        <p:nvSpPr>
+          <p:cNvPr id="26" name="Text 24"/>
+          <p:cNvSpPr/>
+          <p:nvPr/>
+        </p:nvSpPr>
+        <p:spPr>
+          <a:xfrm>
+            <a:off x="548640" y="3474720"/>
+            <a:ext cx="2103120" cy="475488"/>
+          </a:xfrm>
+          <a:prstGeom prst="rect">
+            <a:avLst/>
+          </a:prstGeom>
+          <a:noFill/>
+          <a:ln/>
+        </p:spPr>
+        <p:txBody>
+          <a:bodyPr wrap="square" lIns="0" tIns="0" rIns="0" bIns="0" rtlCol="0" anchor="ctr"/>
+          <a:lstStyle/>
+          <a:p>
+            <a:pPr indent="0" marL="0">
+              <a:buNone/>
+            </a:pPr>
+            <a:r>
+              <a:rPr lang="en-US" sz="900" b="1" dirty="0">
+                <a:solidFill>
+                  <a:srgbClr val="1B5E20"/>
+                </a:solidFill>
+                <a:latin typeface="Trebuchet MS" pitchFamily="34" charset="0"/>
+                <a:ea typeface="Trebuchet MS" pitchFamily="34" charset="-122"/>
+                <a:cs typeface="Trebuchet MS" pitchFamily="34" charset="-120"/>
+              </a:rPr>
+              <a:t>Graphe des DF</a:t>
+            </a:r>
+            <a:endParaRPr lang="en-US" sz="900" dirty="0"/>
+          </a:p>
+        </p:txBody>
+      </p:sp>
+      <p:sp>
+        <p:nvSpPr>
+          <p:cNvPr id="27" name="Shape 25"/>
+          <p:cNvSpPr/>
+          <p:nvPr/>
+        </p:nvSpPr>
+        <p:spPr>
+          <a:xfrm>
+            <a:off x="2743200" y="3474720"/>
+            <a:ext cx="5943600" cy="475488"/>
+          </a:xfrm>
+          <a:prstGeom prst="rect">
+            <a:avLst/>
+          </a:prstGeom>
+          <a:solidFill>
+            <a:srgbClr val="F0F0F0"/>
+          </a:solidFill>
+          <a:ln/>
+        </p:spPr>
+      </p:sp>
+      <p:sp>
+        <p:nvSpPr>
+          <p:cNvPr id="28" name="Text 26"/>
+          <p:cNvSpPr/>
+          <p:nvPr/>
+        </p:nvSpPr>
+        <p:spPr>
+          <a:xfrm>
+            <a:off x="2834640" y="3474720"/>
+            <a:ext cx="5760720" cy="475488"/>
+          </a:xfrm>
+          <a:prstGeom prst="rect">
+            <a:avLst/>
+          </a:prstGeom>
+          <a:noFill/>
+          <a:ln/>
+        </p:spPr>
+        <p:txBody>
+          <a:bodyPr wrap="square" lIns="0" tIns="0" rIns="0" bIns="0" rtlCol="0" anchor="ctr"/>
+          <a:lstStyle/>
+          <a:p>
+            <a:pPr indent="0" marL="0">
+              <a:buNone/>
+            </a:pPr>
+            <a:r>
+              <a:rPr lang="en-US" sz="900" dirty="0">
+                <a:solidFill>
+                  <a:srgbClr val="333333"/>
+                </a:solidFill>
+                <a:latin typeface="Calibri" pitchFamily="34" charset="0"/>
+                <a:ea typeface="Calibri" pitchFamily="34" charset="-122"/>
+                <a:cs typeface="Calibri" pitchFamily="34" charset="-120"/>
+              </a:rPr>
+              <a:t>Visualisation : nœuds + flèches, sources sans flèche entrante</a:t>
+            </a:r>
+            <a:endParaRPr lang="en-US" sz="900" dirty="0"/>
+          </a:p>
+        </p:txBody>
+      </p:sp>
+      <p:sp>
+        <p:nvSpPr>
+          <p:cNvPr id="29" name="Shape 27"/>
+          <p:cNvSpPr/>
+          <p:nvPr/>
+        </p:nvSpPr>
+        <p:spPr>
+          <a:xfrm>
+            <a:off x="457200" y="3977640"/>
+            <a:ext cx="2286000" cy="475488"/>
+          </a:xfrm>
+          <a:prstGeom prst="rect">
+            <a:avLst/>
+          </a:prstGeom>
+          <a:solidFill>
+            <a:srgbClr val="E8F5E9"/>
+          </a:solidFill>
+          <a:ln/>
+        </p:spPr>
+      </p:sp>
+      <p:sp>
+        <p:nvSpPr>
+          <p:cNvPr id="30" name="Text 28"/>
+          <p:cNvSpPr/>
+          <p:nvPr/>
+        </p:nvSpPr>
+        <p:spPr>
+          <a:xfrm>
+            <a:off x="548640" y="3977640"/>
+            <a:ext cx="2103120" cy="475488"/>
+          </a:xfrm>
+          <a:prstGeom prst="rect">
+            <a:avLst/>
+          </a:prstGeom>
+          <a:noFill/>
+          <a:ln/>
+        </p:spPr>
+        <p:txBody>
+          <a:bodyPr wrap="square" lIns="0" tIns="0" rIns="0" bIns="0" rtlCol="0" anchor="ctr"/>
+          <a:lstStyle/>
+          <a:p>
+            <a:pPr indent="0" marL="0">
+              <a:buNone/>
+            </a:pPr>
+            <a:r>
+              <a:rPr lang="en-US" sz="900" b="1" dirty="0">
+                <a:solidFill>
+                  <a:srgbClr val="1B5E20"/>
+                </a:solidFill>
+                <a:latin typeface="Trebuchet MS" pitchFamily="34" charset="0"/>
+                <a:ea typeface="Trebuchet MS" pitchFamily="34" charset="-122"/>
+                <a:cs typeface="Trebuchet MS" pitchFamily="34" charset="-120"/>
+              </a:rPr>
+              <a:t>Lien avec MCD</a:t>
+            </a:r>
+            <a:endParaRPr lang="en-US" sz="900" dirty="0"/>
+          </a:p>
+        </p:txBody>
+      </p:sp>
+      <p:sp>
+        <p:nvSpPr>
+          <p:cNvPr id="31" name="Shape 29"/>
+          <p:cNvSpPr/>
+          <p:nvPr/>
+        </p:nvSpPr>
+        <p:spPr>
+          <a:xfrm>
+            <a:off x="2743200" y="3977640"/>
+            <a:ext cx="5943600" cy="475488"/>
+          </a:xfrm>
+          <a:prstGeom prst="rect">
+            <a:avLst/>
+          </a:prstGeom>
+          <a:solidFill>
+            <a:srgbClr val="E8F5E9"/>
+          </a:solidFill>
+          <a:ln/>
+        </p:spPr>
+      </p:sp>
+      <p:sp>
+        <p:nvSpPr>
+          <p:cNvPr id="32" name="Text 30"/>
+          <p:cNvSpPr/>
+          <p:nvPr/>
+        </p:nvSpPr>
+        <p:spPr>
+          <a:xfrm>
+            <a:off x="2834640" y="3977640"/>
+            <a:ext cx="5760720" cy="475488"/>
+          </a:xfrm>
+          <a:prstGeom prst="rect">
+            <a:avLst/>
+          </a:prstGeom>
+          <a:noFill/>
+          <a:ln/>
+        </p:spPr>
+        <p:txBody>
+          <a:bodyPr wrap="square" lIns="0" tIns="0" rIns="0" bIns="0" rtlCol="0" anchor="ctr"/>
+          <a:lstStyle/>
+          <a:p>
+            <a:pPr indent="0" marL="0">
+              <a:buNone/>
+            </a:pPr>
+            <a:r>
+              <a:rPr lang="en-US" sz="900" dirty="0">
+                <a:solidFill>
+                  <a:srgbClr val="333333"/>
+                </a:solidFill>
+                <a:latin typeface="Calibri" pitchFamily="34" charset="0"/>
+                <a:ea typeface="Calibri" pitchFamily="34" charset="-122"/>
+                <a:cs typeface="Calibri" pitchFamily="34" charset="-120"/>
+              </a:rPr>
+              <a:t>Sources = entités, dépendants = attributs, DF entre sources = relations</a:t>
+            </a:r>
+            <a:endParaRPr lang="en-US" sz="900" dirty="0"/>
           </a:p>
         </p:txBody>
       </p:sp>
@@ -1689,7 +2912,7 @@
         <p:spPr>
           <a:xfrm>
             <a:off x="0" y="0"/>
-            <a:ext cx="9144000" cy="73152"/>
+            <a:ext cx="9144000" cy="54864"/>
           </a:xfrm>
           <a:prstGeom prst="rect">
             <a:avLst/>
@@ -1708,8 +2931,8 @@
         </p:nvSpPr>
         <p:spPr>
           <a:xfrm>
-            <a:off x="457200" y="228600"/>
-            <a:ext cx="8229600" cy="640080"/>
+            <a:off x="457200" y="182880"/>
+            <a:ext cx="8229600" cy="594360"/>
           </a:xfrm>
           <a:prstGeom prst="rect">
             <a:avLst/>
@@ -1725,7 +2948,7 @@
               <a:buNone/>
             </a:pPr>
             <a:r>
-              <a:rPr lang="en-US" sz="2600" b="1" dirty="0">
+              <a:rPr lang="en-US" sz="2400" b="1" dirty="0">
                 <a:solidFill>
                   <a:srgbClr val="1B5E20"/>
                 </a:solidFill>
@@ -1735,7 +2958,7 @@
               </a:rPr>
               <a:t>Dépendance fonctionnelle (DF)</a:t>
             </a:r>
-            <a:endParaRPr lang="en-US" sz="2600" dirty="0"/>
+            <a:endParaRPr lang="en-US" sz="2400" dirty="0"/>
           </a:p>
         </p:txBody>
       </p:sp>
@@ -1747,8 +2970,8 @@
         </p:nvSpPr>
         <p:spPr>
           <a:xfrm>
-            <a:off x="457200" y="1051560"/>
-            <a:ext cx="8229600" cy="640080"/>
+            <a:off x="457200" y="914400"/>
+            <a:ext cx="8229600" cy="566928"/>
           </a:xfrm>
           <a:prstGeom prst="rect">
             <a:avLst/>
@@ -1774,8 +2997,8 @@
         </p:nvSpPr>
         <p:spPr>
           <a:xfrm>
-            <a:off x="457200" y="1051560"/>
-            <a:ext cx="54864" cy="640080"/>
+            <a:off x="457200" y="914400"/>
+            <a:ext cx="45720" cy="566928"/>
           </a:xfrm>
           <a:prstGeom prst="rect">
             <a:avLst/>
@@ -1794,8 +3017,8 @@
         </p:nvSpPr>
         <p:spPr>
           <a:xfrm>
-            <a:off x="731520" y="1051560"/>
-            <a:ext cx="7772400" cy="640080"/>
+            <a:off x="685800" y="914400"/>
+            <a:ext cx="7818120" cy="566928"/>
           </a:xfrm>
           <a:prstGeom prst="rect">
             <a:avLst/>
@@ -1811,17 +3034,17 @@
               <a:buNone/>
             </a:pPr>
             <a:r>
-              <a:rPr lang="en-US" sz="1100" dirty="0">
+              <a:rPr lang="en-US" sz="1200" dirty="0">
                 <a:solidFill>
-                  <a:srgbClr val="1B5E20"/>
+                  <a:srgbClr val="1A1A2E"/>
                 </a:solidFill>
-                <a:latin typeface="JetBrains Mono" pitchFamily="34" charset="0"/>
-                <a:ea typeface="JetBrains Mono" pitchFamily="34" charset="-122"/>
-                <a:cs typeface="JetBrains Mono" pitchFamily="34" charset="-120"/>
+                <a:latin typeface="Calibri" pitchFamily="34" charset="0"/>
+                <a:ea typeface="Calibri" pitchFamily="34" charset="-122"/>
+                <a:cs typeface="Calibri" pitchFamily="34" charset="-120"/>
               </a:rPr>
-              <a:t>A → B signifie : connaître A permet de déterminer B de façon unique</a:t>
+              <a:t>A → B signifie : connaître A suffit pour déterminer B de façon UNIQUE</a:t>
             </a:r>
-            <a:endParaRPr lang="en-US" sz="1100" dirty="0"/>
+            <a:endParaRPr lang="en-US" sz="1200" dirty="0"/>
           </a:p>
         </p:txBody>
       </p:sp>
@@ -1833,8 +3056,8 @@
         </p:nvSpPr>
         <p:spPr>
           <a:xfrm>
-            <a:off x="457200" y="1783080"/>
-            <a:ext cx="8229600" cy="640080"/>
+            <a:off x="457200" y="1508760"/>
+            <a:ext cx="8229600" cy="566928"/>
           </a:xfrm>
           <a:prstGeom prst="rect">
             <a:avLst/>
@@ -1860,8 +3083,8 @@
         </p:nvSpPr>
         <p:spPr>
           <a:xfrm>
-            <a:off x="457200" y="1783080"/>
-            <a:ext cx="54864" cy="640080"/>
+            <a:off x="457200" y="1508760"/>
+            <a:ext cx="45720" cy="566928"/>
           </a:xfrm>
           <a:prstGeom prst="rect">
             <a:avLst/>
@@ -1880,8 +3103,8 @@
         </p:nvSpPr>
         <p:spPr>
           <a:xfrm>
-            <a:off x="731520" y="1783080"/>
-            <a:ext cx="7772400" cy="640080"/>
+            <a:off x="685800" y="1508760"/>
+            <a:ext cx="7818120" cy="566928"/>
           </a:xfrm>
           <a:prstGeom prst="rect">
             <a:avLst/>
@@ -1897,17 +3120,17 @@
               <a:buNone/>
             </a:pPr>
             <a:r>
-              <a:rPr lang="en-US" sz="1100" dirty="0">
+              <a:rPr lang="en-US" sz="1200" dirty="0">
                 <a:solidFill>
-                  <a:srgbClr val="1B5E20"/>
+                  <a:srgbClr val="1A1A2E"/>
                 </a:solidFill>
-                <a:latin typeface="JetBrains Mono" pitchFamily="34" charset="0"/>
-                <a:ea typeface="JetBrains Mono" pitchFamily="34" charset="-122"/>
-                <a:cs typeface="JetBrains Mono" pitchFamily="34" charset="-120"/>
+                <a:latin typeface="Calibri" pitchFamily="34" charset="0"/>
+                <a:ea typeface="Calibri" pitchFamily="34" charset="-122"/>
+                <a:cs typeface="Calibri" pitchFamily="34" charset="-120"/>
               </a:rPr>
-              <a:t>id_artiste → nom_artiste ✅ (un id = un seul nom)</a:t>
+              <a:t>id_artiste → nom_artiste ✅ (un id = un seul nom, toujours)</a:t>
             </a:r>
-            <a:endParaRPr lang="en-US" sz="1100" dirty="0"/>
+            <a:endParaRPr lang="en-US" sz="1200" dirty="0"/>
           </a:p>
         </p:txBody>
       </p:sp>
@@ -1919,8 +3142,8 @@
         </p:nvSpPr>
         <p:spPr>
           <a:xfrm>
-            <a:off x="457200" y="2514600"/>
-            <a:ext cx="8229600" cy="640080"/>
+            <a:off x="457200" y="2103120"/>
+            <a:ext cx="8229600" cy="566928"/>
           </a:xfrm>
           <a:prstGeom prst="rect">
             <a:avLst/>
@@ -1946,8 +3169,8 @@
         </p:nvSpPr>
         <p:spPr>
           <a:xfrm>
-            <a:off x="457200" y="2514600"/>
-            <a:ext cx="54864" cy="640080"/>
+            <a:off x="457200" y="2103120"/>
+            <a:ext cx="45720" cy="566928"/>
           </a:xfrm>
           <a:prstGeom prst="rect">
             <a:avLst/>
@@ -1966,8 +3189,8 @@
         </p:nvSpPr>
         <p:spPr>
           <a:xfrm>
-            <a:off x="731520" y="2514600"/>
-            <a:ext cx="7772400" cy="640080"/>
+            <a:off x="685800" y="2103120"/>
+            <a:ext cx="7818120" cy="566928"/>
           </a:xfrm>
           <a:prstGeom prst="rect">
             <a:avLst/>
@@ -1983,17 +3206,17 @@
               <a:buNone/>
             </a:pPr>
             <a:r>
-              <a:rPr lang="en-US" sz="1100" dirty="0">
+              <a:rPr lang="en-US" sz="1200" dirty="0">
                 <a:solidFill>
-                  <a:srgbClr val="1B5E20"/>
+                  <a:srgbClr val="1A1A2E"/>
                 </a:solidFill>
-                <a:latin typeface="JetBrains Mono" pitchFamily="34" charset="0"/>
-                <a:ea typeface="JetBrains Mono" pitchFamily="34" charset="-122"/>
-                <a:cs typeface="JetBrains Mono" pitchFamily="34" charset="-120"/>
+                <a:latin typeface="Calibri" pitchFamily="34" charset="0"/>
+                <a:ea typeface="Calibri" pitchFamily="34" charset="-122"/>
+                <a:cs typeface="Calibri" pitchFamily="34" charset="-120"/>
               </a:rPr>
-              <a:t>nom_artiste → id_artiste ❌ (homonymes possibles)</a:t>
+              <a:t>nom_artiste → id_artiste ❌ (homonymes possibles !)</a:t>
             </a:r>
-            <a:endParaRPr lang="en-US" sz="1100" dirty="0"/>
+            <a:endParaRPr lang="en-US" sz="1200" dirty="0"/>
           </a:p>
         </p:txBody>
       </p:sp>
@@ -2005,8 +3228,8 @@
         </p:nvSpPr>
         <p:spPr>
           <a:xfrm>
-            <a:off x="457200" y="3246120"/>
-            <a:ext cx="8229600" cy="640080"/>
+            <a:off x="457200" y="2697480"/>
+            <a:ext cx="8229600" cy="566928"/>
           </a:xfrm>
           <a:prstGeom prst="rect">
             <a:avLst/>
@@ -2032,8 +3255,8 @@
         </p:nvSpPr>
         <p:spPr>
           <a:xfrm>
-            <a:off x="457200" y="3246120"/>
-            <a:ext cx="54864" cy="640080"/>
+            <a:off x="457200" y="2697480"/>
+            <a:ext cx="45720" cy="566928"/>
           </a:xfrm>
           <a:prstGeom prst="rect">
             <a:avLst/>
@@ -2052,8 +3275,8 @@
         </p:nvSpPr>
         <p:spPr>
           <a:xfrm>
-            <a:off x="731520" y="3246120"/>
-            <a:ext cx="7772400" cy="640080"/>
+            <a:off x="685800" y="2697480"/>
+            <a:ext cx="7818120" cy="566928"/>
           </a:xfrm>
           <a:prstGeom prst="rect">
             <a:avLst/>
@@ -2069,7 +3292,7 @@
               <a:buNone/>
             </a:pPr>
             <a:r>
-              <a:rPr lang="en-US" sz="1300" dirty="0">
+              <a:rPr lang="en-US" sz="1200" dirty="0">
                 <a:solidFill>
                   <a:srgbClr val="1A1A2E"/>
                 </a:solidFill>
@@ -2077,9 +3300,9 @@
                 <a:ea typeface="Calibri" pitchFamily="34" charset="-122"/>
                 <a:cs typeface="Calibri" pitchFamily="34" charset="-120"/>
               </a:rPr>
-              <a:t>DF élémentaire : on ne peut pas réduire le côté gauche</a:t>
+              <a:t>La DF est un concept LOGIQUE, pas technique</a:t>
             </a:r>
-            <a:endParaRPr lang="en-US" sz="1300" dirty="0"/>
+            <a:endParaRPr lang="en-US" sz="1200" dirty="0"/>
           </a:p>
         </p:txBody>
       </p:sp>
@@ -2091,8 +3314,8 @@
         </p:nvSpPr>
         <p:spPr>
           <a:xfrm>
-            <a:off x="457200" y="3977640"/>
-            <a:ext cx="8229600" cy="640080"/>
+            <a:off x="457200" y="3291840"/>
+            <a:ext cx="8229600" cy="566928"/>
           </a:xfrm>
           <a:prstGeom prst="rect">
             <a:avLst/>
@@ -2118,8 +3341,8 @@
         </p:nvSpPr>
         <p:spPr>
           <a:xfrm>
-            <a:off x="457200" y="3977640"/>
-            <a:ext cx="54864" cy="640080"/>
+            <a:off x="457200" y="3291840"/>
+            <a:ext cx="45720" cy="566928"/>
           </a:xfrm>
           <a:prstGeom prst="rect">
             <a:avLst/>
@@ -2138,8 +3361,8 @@
         </p:nvSpPr>
         <p:spPr>
           <a:xfrm>
-            <a:off x="731520" y="3977640"/>
-            <a:ext cx="7772400" cy="640080"/>
+            <a:off x="685800" y="3291840"/>
+            <a:ext cx="7818120" cy="566928"/>
           </a:xfrm>
           <a:prstGeom prst="rect">
             <a:avLst/>
@@ -2155,56 +3378,103 @@
               <a:buNone/>
             </a:pPr>
             <a:r>
-              <a:rPr lang="en-US" sz="1100" dirty="0">
+              <a:rPr lang="en-US" sz="1200" dirty="0">
                 <a:solidFill>
-                  <a:srgbClr val="1B5E20"/>
-                </a:solidFill>
-                <a:latin typeface="JetBrains Mono" pitchFamily="34" charset="0"/>
-                <a:ea typeface="JetBrains Mono" pitchFamily="34" charset="-122"/>
-                <a:cs typeface="JetBrains Mono" pitchFamily="34" charset="-120"/>
-              </a:rPr>
-              <a:t>DF directe : pas d'intermédiaire (A→B directement)</a:t>
-            </a:r>
-            <a:endParaRPr lang="en-US" sz="1100" dirty="0"/>
-          </a:p>
-        </p:txBody>
-      </p:sp>
-      <p:sp>
-        <p:nvSpPr>
-          <p:cNvPr id="19" name="Text 17"/>
-          <p:cNvSpPr/>
-          <p:nvPr/>
-        </p:nvSpPr>
-        <p:spPr>
-          <a:xfrm>
-            <a:off x="8229600" y="4754880"/>
-            <a:ext cx="731520" cy="274320"/>
-          </a:xfrm>
-          <a:prstGeom prst="rect">
-            <a:avLst/>
-          </a:prstGeom>
-          <a:noFill/>
-          <a:ln/>
-        </p:spPr>
-        <p:txBody>
-          <a:bodyPr wrap="square" lIns="0" tIns="0" rIns="0" bIns="0" rtlCol="0" anchor="ctr"/>
-          <a:lstStyle/>
-          <a:p>
-            <a:pPr algn="r" indent="0" marL="0">
-              <a:buNone/>
-            </a:pPr>
-            <a:r>
-              <a:rPr lang="en-US" sz="900" dirty="0">
-                <a:solidFill>
-                  <a:srgbClr val="AAAAAA"/>
+                  <a:srgbClr val="1A1A2E"/>
                 </a:solidFill>
                 <a:latin typeface="Calibri" pitchFamily="34" charset="0"/>
                 <a:ea typeface="Calibri" pitchFamily="34" charset="-122"/>
                 <a:cs typeface="Calibri" pitchFamily="34" charset="-120"/>
               </a:rPr>
-              <a:t>2/6</a:t>
+              <a:t>Elle décrit comment les données sont liées dans la RÉALITÉ</a:t>
             </a:r>
-            <a:endParaRPr lang="en-US" sz="900" dirty="0"/>
+            <a:endParaRPr lang="en-US" sz="1200" dirty="0"/>
+          </a:p>
+        </p:txBody>
+      </p:sp>
+      <p:sp>
+        <p:nvSpPr>
+          <p:cNvPr id="19" name="Shape 17"/>
+          <p:cNvSpPr/>
+          <p:nvPr/>
+        </p:nvSpPr>
+        <p:spPr>
+          <a:xfrm>
+            <a:off x="457200" y="3886200"/>
+            <a:ext cx="8229600" cy="566928"/>
+          </a:xfrm>
+          <a:prstGeom prst="rect">
+            <a:avLst/>
+          </a:prstGeom>
+          <a:solidFill>
+            <a:srgbClr val="E8F5E9"/>
+          </a:solidFill>
+          <a:ln/>
+          <a:effectLst>
+            <a:outerShdw sx="100000" sy="100000" kx="0" ky="0" algn="bl" rotWithShape="0" blurRad="50800" dist="25400" dir="8100000">
+              <a:srgbClr val="000000">
+                <a:alpha val="12000"/>
+              </a:srgbClr>
+            </a:outerShdw>
+          </a:effectLst>
+        </p:spPr>
+      </p:sp>
+      <p:sp>
+        <p:nvSpPr>
+          <p:cNvPr id="20" name="Shape 18"/>
+          <p:cNvSpPr/>
+          <p:nvPr/>
+        </p:nvSpPr>
+        <p:spPr>
+          <a:xfrm>
+            <a:off x="457200" y="3886200"/>
+            <a:ext cx="45720" cy="566928"/>
+          </a:xfrm>
+          <a:prstGeom prst="rect">
+            <a:avLst/>
+          </a:prstGeom>
+          <a:solidFill>
+            <a:srgbClr val="2E7D32"/>
+          </a:solidFill>
+          <a:ln/>
+        </p:spPr>
+      </p:sp>
+      <p:sp>
+        <p:nvSpPr>
+          <p:cNvPr id="21" name="Text 19"/>
+          <p:cNvSpPr/>
+          <p:nvPr/>
+        </p:nvSpPr>
+        <p:spPr>
+          <a:xfrm>
+            <a:off x="685800" y="3886200"/>
+            <a:ext cx="7818120" cy="566928"/>
+          </a:xfrm>
+          <a:prstGeom prst="rect">
+            <a:avLst/>
+          </a:prstGeom>
+          <a:noFill/>
+          <a:ln/>
+        </p:spPr>
+        <p:txBody>
+          <a:bodyPr wrap="square" lIns="0" tIns="0" rIns="0" bIns="0" rtlCol="0" anchor="ctr"/>
+          <a:lstStyle/>
+          <a:p>
+            <a:pPr indent="0" marL="0">
+              <a:buNone/>
+            </a:pPr>
+            <a:r>
+              <a:rPr lang="en-US" sz="1200" dirty="0">
+                <a:solidFill>
+                  <a:srgbClr val="1A1A2E"/>
+                </a:solidFill>
+                <a:latin typeface="Calibri" pitchFamily="34" charset="0"/>
+                <a:ea typeface="Calibri" pitchFamily="34" charset="-122"/>
+                <a:cs typeface="Calibri" pitchFamily="34" charset="-120"/>
+              </a:rPr>
+              <a:t>C'est la base mathématique de la normalisation</a:t>
+            </a:r>
+            <a:endParaRPr lang="en-US" sz="1200" dirty="0"/>
           </a:p>
         </p:txBody>
       </p:sp>
@@ -2249,7 +3519,7 @@
         <p:spPr>
           <a:xfrm>
             <a:off x="0" y="0"/>
-            <a:ext cx="9144000" cy="73152"/>
+            <a:ext cx="9144000" cy="54864"/>
           </a:xfrm>
           <a:prstGeom prst="rect">
             <a:avLst/>
@@ -2268,8 +3538,8 @@
         </p:nvSpPr>
         <p:spPr>
           <a:xfrm>
-            <a:off x="457200" y="228600"/>
-            <a:ext cx="8229600" cy="640080"/>
+            <a:off x="457200" y="182880"/>
+            <a:ext cx="8229600" cy="594360"/>
           </a:xfrm>
           <a:prstGeom prst="rect">
             <a:avLst/>
@@ -2285,7 +3555,7 @@
               <a:buNone/>
             </a:pPr>
             <a:r>
-              <a:rPr lang="en-US" sz="2600" b="1" dirty="0">
+              <a:rPr lang="en-US" sz="2400" b="1" dirty="0">
                 <a:solidFill>
                   <a:srgbClr val="1B5E20"/>
                 </a:solidFill>
@@ -2293,9 +3563,9 @@
                 <a:ea typeface="Trebuchet MS" pitchFamily="34" charset="-122"/>
                 <a:cs typeface="Trebuchet MS" pitchFamily="34" charset="-120"/>
               </a:rPr>
-              <a:t>DF transitive</a:t>
+              <a:t>Types de DF</a:t>
             </a:r>
-            <a:endParaRPr lang="en-US" sz="2600" dirty="0"/>
+            <a:endParaRPr lang="en-US" sz="2400" dirty="0"/>
           </a:p>
         </p:txBody>
       </p:sp>
@@ -2307,8 +3577,8 @@
         </p:nvSpPr>
         <p:spPr>
           <a:xfrm>
-            <a:off x="457200" y="1051560"/>
-            <a:ext cx="8229600" cy="640080"/>
+            <a:off x="457200" y="914400"/>
+            <a:ext cx="8229600" cy="560397"/>
           </a:xfrm>
           <a:prstGeom prst="rect">
             <a:avLst/>
@@ -2334,8 +3604,8 @@
         </p:nvSpPr>
         <p:spPr>
           <a:xfrm>
-            <a:off x="457200" y="1051560"/>
-            <a:ext cx="54864" cy="640080"/>
+            <a:off x="457200" y="914400"/>
+            <a:ext cx="45720" cy="560397"/>
           </a:xfrm>
           <a:prstGeom prst="rect">
             <a:avLst/>
@@ -2354,8 +3624,8 @@
         </p:nvSpPr>
         <p:spPr>
           <a:xfrm>
-            <a:off x="731520" y="1051560"/>
-            <a:ext cx="7772400" cy="640080"/>
+            <a:off x="685800" y="914400"/>
+            <a:ext cx="7818120" cy="560397"/>
           </a:xfrm>
           <a:prstGeom prst="rect">
             <a:avLst/>
@@ -2371,17 +3641,17 @@
               <a:buNone/>
             </a:pPr>
             <a:r>
-              <a:rPr lang="en-US" sz="1100" dirty="0">
+              <a:rPr lang="en-US" sz="1200" dirty="0">
                 <a:solidFill>
-                  <a:srgbClr val="1B5E20"/>
+                  <a:srgbClr val="1A1A2E"/>
                 </a:solidFill>
-                <a:latin typeface="JetBrains Mono" pitchFamily="34" charset="0"/>
-                <a:ea typeface="JetBrains Mono" pitchFamily="34" charset="-122"/>
-                <a:cs typeface="JetBrains Mono" pitchFamily="34" charset="-120"/>
+                <a:latin typeface="Calibri" pitchFamily="34" charset="0"/>
+                <a:ea typeface="Calibri" pitchFamily="34" charset="-122"/>
+                <a:cs typeface="Calibri" pitchFamily="34" charset="-120"/>
               </a:rPr>
-              <a:t>Si A → B et B → C, alors A → C (DF transitive)</a:t>
+              <a:t>DF ÉLÉMENTAIRE : le côté gauche ne peut pas être réduit</a:t>
             </a:r>
-            <a:endParaRPr lang="en-US" sz="1100" dirty="0"/>
+            <a:endParaRPr lang="en-US" sz="1200" dirty="0"/>
           </a:p>
         </p:txBody>
       </p:sp>
@@ -2393,8 +3663,8 @@
         </p:nvSpPr>
         <p:spPr>
           <a:xfrm>
-            <a:off x="457200" y="1783080"/>
-            <a:ext cx="8229600" cy="640080"/>
+            <a:off x="457200" y="1502229"/>
+            <a:ext cx="8229600" cy="560397"/>
           </a:xfrm>
           <a:prstGeom prst="rect">
             <a:avLst/>
@@ -2420,8 +3690,8 @@
         </p:nvSpPr>
         <p:spPr>
           <a:xfrm>
-            <a:off x="457200" y="1783080"/>
-            <a:ext cx="54864" cy="640080"/>
+            <a:off x="457200" y="1502229"/>
+            <a:ext cx="45720" cy="560397"/>
           </a:xfrm>
           <a:prstGeom prst="rect">
             <a:avLst/>
@@ -2440,8 +3710,8 @@
         </p:nvSpPr>
         <p:spPr>
           <a:xfrm>
-            <a:off x="731520" y="1783080"/>
-            <a:ext cx="7772400" cy="640080"/>
+            <a:off x="685800" y="1502229"/>
+            <a:ext cx="7818120" cy="560397"/>
           </a:xfrm>
           <a:prstGeom prst="rect">
             <a:avLst/>
@@ -2457,17 +3727,17 @@
               <a:buNone/>
             </a:pPr>
             <a:r>
-              <a:rPr lang="en-US" sz="1100" dirty="0">
+              <a:rPr lang="en-US" sz="1200" dirty="0">
                 <a:solidFill>
-                  <a:srgbClr val="1B5E20"/>
+                  <a:srgbClr val="1A1A2E"/>
                 </a:solidFill>
-                <a:latin typeface="JetBrains Mono" pitchFamily="34" charset="0"/>
-                <a:ea typeface="JetBrains Mono" pitchFamily="34" charset="-122"/>
-                <a:cs typeface="JetBrains Mono" pitchFamily="34" charset="-120"/>
+                <a:latin typeface="Calibri" pitchFamily="34" charset="0"/>
+                <a:ea typeface="Calibri" pitchFamily="34" charset="-122"/>
+                <a:cs typeface="Calibri" pitchFamily="34" charset="-120"/>
               </a:rPr>
-              <a:t>Exemple : id_session → id_salle → nom_salle</a:t>
+              <a:t>✅ id_artiste → nom_artiste (élémentaire)</a:t>
             </a:r>
-            <a:endParaRPr lang="en-US" sz="1100" dirty="0"/>
+            <a:endParaRPr lang="en-US" sz="1200" dirty="0"/>
           </a:p>
         </p:txBody>
       </p:sp>
@@ -2479,8 +3749,8 @@
         </p:nvSpPr>
         <p:spPr>
           <a:xfrm>
-            <a:off x="457200" y="2514600"/>
-            <a:ext cx="8229600" cy="640080"/>
+            <a:off x="457200" y="2090057"/>
+            <a:ext cx="8229600" cy="560397"/>
           </a:xfrm>
           <a:prstGeom prst="rect">
             <a:avLst/>
@@ -2506,8 +3776,8 @@
         </p:nvSpPr>
         <p:spPr>
           <a:xfrm>
-            <a:off x="457200" y="2514600"/>
-            <a:ext cx="54864" cy="640080"/>
+            <a:off x="457200" y="2090057"/>
+            <a:ext cx="45720" cy="560397"/>
           </a:xfrm>
           <a:prstGeom prst="rect">
             <a:avLst/>
@@ -2526,8 +3796,8 @@
         </p:nvSpPr>
         <p:spPr>
           <a:xfrm>
-            <a:off x="731520" y="2514600"/>
-            <a:ext cx="7772400" cy="640080"/>
+            <a:off x="685800" y="2090057"/>
+            <a:ext cx="7818120" cy="560397"/>
           </a:xfrm>
           <a:prstGeom prst="rect">
             <a:avLst/>
@@ -2543,7 +3813,7 @@
               <a:buNone/>
             </a:pPr>
             <a:r>
-              <a:rPr lang="en-US" sz="1300" dirty="0">
+              <a:rPr lang="en-US" sz="1200" dirty="0">
                 <a:solidFill>
                   <a:srgbClr val="1A1A2E"/>
                 </a:solidFill>
@@ -2551,9 +3821,9 @@
                 <a:ea typeface="Calibri" pitchFamily="34" charset="-122"/>
                 <a:cs typeface="Calibri" pitchFamily="34" charset="-120"/>
               </a:rPr>
-              <a:t>id_session détermine nom_salle, mais indirectement via id_salle</a:t>
+              <a:t>❌ (id_artiste, id_album) → nom_artiste (pas élémentaire, id_artiste suffit)</a:t>
             </a:r>
-            <a:endParaRPr lang="en-US" sz="1300" dirty="0"/>
+            <a:endParaRPr lang="en-US" sz="1200" dirty="0"/>
           </a:p>
         </p:txBody>
       </p:sp>
@@ -2565,8 +3835,8 @@
         </p:nvSpPr>
         <p:spPr>
           <a:xfrm>
-            <a:off x="457200" y="3246120"/>
-            <a:ext cx="8229600" cy="640080"/>
+            <a:off x="457200" y="2677886"/>
+            <a:ext cx="8229600" cy="560397"/>
           </a:xfrm>
           <a:prstGeom prst="rect">
             <a:avLst/>
@@ -2592,8 +3862,8 @@
         </p:nvSpPr>
         <p:spPr>
           <a:xfrm>
-            <a:off x="457200" y="3246120"/>
-            <a:ext cx="54864" cy="640080"/>
+            <a:off x="457200" y="2677886"/>
+            <a:ext cx="45720" cy="560397"/>
           </a:xfrm>
           <a:prstGeom prst="rect">
             <a:avLst/>
@@ -2612,8 +3882,8 @@
         </p:nvSpPr>
         <p:spPr>
           <a:xfrm>
-            <a:off x="731520" y="3246120"/>
-            <a:ext cx="7772400" cy="640080"/>
+            <a:off x="685800" y="2677886"/>
+            <a:ext cx="7818120" cy="560397"/>
           </a:xfrm>
           <a:prstGeom prst="rect">
             <a:avLst/>
@@ -2629,7 +3899,7 @@
               <a:buNone/>
             </a:pPr>
             <a:r>
-              <a:rPr lang="en-US" sz="1300" dirty="0">
+              <a:rPr lang="en-US" sz="1200" dirty="0">
                 <a:solidFill>
                   <a:srgbClr val="1A1A2E"/>
                 </a:solidFill>
@@ -2637,9 +3907,9 @@
                 <a:ea typeface="Calibri" pitchFamily="34" charset="-122"/>
                 <a:cs typeface="Calibri" pitchFamily="34" charset="-120"/>
               </a:rPr>
-              <a:t>En 3NF, on ÉLIMINE les DF transitives</a:t>
+              <a:t>DF DIRECTE : pas d'intermédiaire entre A et B</a:t>
             </a:r>
-            <a:endParaRPr lang="en-US" sz="1300" dirty="0"/>
+            <a:endParaRPr lang="en-US" sz="1200" dirty="0"/>
           </a:p>
         </p:txBody>
       </p:sp>
@@ -2651,8 +3921,8 @@
         </p:nvSpPr>
         <p:spPr>
           <a:xfrm>
-            <a:off x="457200" y="3977640"/>
-            <a:ext cx="8229600" cy="640080"/>
+            <a:off x="457200" y="3265714"/>
+            <a:ext cx="8229600" cy="560397"/>
           </a:xfrm>
           <a:prstGeom prst="rect">
             <a:avLst/>
@@ -2678,8 +3948,8 @@
         </p:nvSpPr>
         <p:spPr>
           <a:xfrm>
-            <a:off x="457200" y="3977640"/>
-            <a:ext cx="54864" cy="640080"/>
+            <a:off x="457200" y="3265714"/>
+            <a:ext cx="45720" cy="560397"/>
           </a:xfrm>
           <a:prstGeom prst="rect">
             <a:avLst/>
@@ -2698,8 +3968,8 @@
         </p:nvSpPr>
         <p:spPr>
           <a:xfrm>
-            <a:off x="731520" y="3977640"/>
-            <a:ext cx="7772400" cy="640080"/>
+            <a:off x="685800" y="3265714"/>
+            <a:ext cx="7818120" cy="560397"/>
           </a:xfrm>
           <a:prstGeom prst="rect">
             <a:avLst/>
@@ -2715,56 +3985,189 @@
               <a:buNone/>
             </a:pPr>
             <a:r>
-              <a:rPr lang="en-US" sz="1100" dirty="0">
+              <a:rPr lang="en-US" sz="1200" dirty="0">
                 <a:solidFill>
-                  <a:srgbClr val="1B5E20"/>
-                </a:solidFill>
-                <a:latin typeface="JetBrains Mono" pitchFamily="34" charset="0"/>
-                <a:ea typeface="JetBrains Mono" pitchFamily="34" charset="-122"/>
-                <a:cs typeface="JetBrains Mono" pitchFamily="34" charset="-120"/>
-              </a:rPr>
-              <a:t>→ nom_salle reste dans la table Salle, pas dans Session</a:t>
-            </a:r>
-            <a:endParaRPr lang="en-US" sz="1100" dirty="0"/>
-          </a:p>
-        </p:txBody>
-      </p:sp>
-      <p:sp>
-        <p:nvSpPr>
-          <p:cNvPr id="19" name="Text 17"/>
-          <p:cNvSpPr/>
-          <p:nvPr/>
-        </p:nvSpPr>
-        <p:spPr>
-          <a:xfrm>
-            <a:off x="8229600" y="4754880"/>
-            <a:ext cx="731520" cy="274320"/>
-          </a:xfrm>
-          <a:prstGeom prst="rect">
-            <a:avLst/>
-          </a:prstGeom>
-          <a:noFill/>
-          <a:ln/>
-        </p:spPr>
-        <p:txBody>
-          <a:bodyPr wrap="square" lIns="0" tIns="0" rIns="0" bIns="0" rtlCol="0" anchor="ctr"/>
-          <a:lstStyle/>
-          <a:p>
-            <a:pPr algn="r" indent="0" marL="0">
-              <a:buNone/>
-            </a:pPr>
-            <a:r>
-              <a:rPr lang="en-US" sz="900" dirty="0">
-                <a:solidFill>
-                  <a:srgbClr val="AAAAAA"/>
+                  <a:srgbClr val="1A1A2E"/>
                 </a:solidFill>
                 <a:latin typeface="Calibri" pitchFamily="34" charset="0"/>
                 <a:ea typeface="Calibri" pitchFamily="34" charset="-122"/>
                 <a:cs typeface="Calibri" pitchFamily="34" charset="-120"/>
               </a:rPr>
-              <a:t>3/6</a:t>
+              <a:t>✅ id_artiste → nom_artiste (direct)</a:t>
             </a:r>
-            <a:endParaRPr lang="en-US" sz="900" dirty="0"/>
+            <a:endParaRPr lang="en-US" sz="1200" dirty="0"/>
+          </a:p>
+        </p:txBody>
+      </p:sp>
+      <p:sp>
+        <p:nvSpPr>
+          <p:cNvPr id="19" name="Shape 17"/>
+          <p:cNvSpPr/>
+          <p:nvPr/>
+        </p:nvSpPr>
+        <p:spPr>
+          <a:xfrm>
+            <a:off x="457200" y="3853543"/>
+            <a:ext cx="8229600" cy="560397"/>
+          </a:xfrm>
+          <a:prstGeom prst="rect">
+            <a:avLst/>
+          </a:prstGeom>
+          <a:solidFill>
+            <a:srgbClr val="E8F5E9"/>
+          </a:solidFill>
+          <a:ln/>
+          <a:effectLst>
+            <a:outerShdw sx="100000" sy="100000" kx="0" ky="0" algn="bl" rotWithShape="0" blurRad="50800" dist="25400" dir="8100000">
+              <a:srgbClr val="000000">
+                <a:alpha val="12000"/>
+              </a:srgbClr>
+            </a:outerShdw>
+          </a:effectLst>
+        </p:spPr>
+      </p:sp>
+      <p:sp>
+        <p:nvSpPr>
+          <p:cNvPr id="20" name="Shape 18"/>
+          <p:cNvSpPr/>
+          <p:nvPr/>
+        </p:nvSpPr>
+        <p:spPr>
+          <a:xfrm>
+            <a:off x="457200" y="3853543"/>
+            <a:ext cx="45720" cy="560397"/>
+          </a:xfrm>
+          <a:prstGeom prst="rect">
+            <a:avLst/>
+          </a:prstGeom>
+          <a:solidFill>
+            <a:srgbClr val="2E7D32"/>
+          </a:solidFill>
+          <a:ln/>
+        </p:spPr>
+      </p:sp>
+      <p:sp>
+        <p:nvSpPr>
+          <p:cNvPr id="21" name="Text 19"/>
+          <p:cNvSpPr/>
+          <p:nvPr/>
+        </p:nvSpPr>
+        <p:spPr>
+          <a:xfrm>
+            <a:off x="685800" y="3853543"/>
+            <a:ext cx="7818120" cy="560397"/>
+          </a:xfrm>
+          <a:prstGeom prst="rect">
+            <a:avLst/>
+          </a:prstGeom>
+          <a:noFill/>
+          <a:ln/>
+        </p:spPr>
+        <p:txBody>
+          <a:bodyPr wrap="square" lIns="0" tIns="0" rIns="0" bIns="0" rtlCol="0" anchor="ctr"/>
+          <a:lstStyle/>
+          <a:p>
+            <a:pPr indent="0" marL="0">
+              <a:buNone/>
+            </a:pPr>
+            <a:r>
+              <a:rPr lang="en-US" sz="1200" dirty="0">
+                <a:solidFill>
+                  <a:srgbClr val="1A1A2E"/>
+                </a:solidFill>
+                <a:latin typeface="Calibri" pitchFamily="34" charset="0"/>
+                <a:ea typeface="Calibri" pitchFamily="34" charset="-122"/>
+                <a:cs typeface="Calibri" pitchFamily="34" charset="-120"/>
+              </a:rPr>
+              <a:t>DF TRANSITIVE : A → B → C, donc A → C indirectement</a:t>
+            </a:r>
+            <a:endParaRPr lang="en-US" sz="1200" dirty="0"/>
+          </a:p>
+        </p:txBody>
+      </p:sp>
+      <p:sp>
+        <p:nvSpPr>
+          <p:cNvPr id="22" name="Shape 20"/>
+          <p:cNvSpPr/>
+          <p:nvPr/>
+        </p:nvSpPr>
+        <p:spPr>
+          <a:xfrm>
+            <a:off x="457200" y="4441371"/>
+            <a:ext cx="8229600" cy="560397"/>
+          </a:xfrm>
+          <a:prstGeom prst="rect">
+            <a:avLst/>
+          </a:prstGeom>
+          <a:solidFill>
+            <a:srgbClr val="FFFFFF"/>
+          </a:solidFill>
+          <a:ln/>
+          <a:effectLst>
+            <a:outerShdw sx="100000" sy="100000" kx="0" ky="0" algn="bl" rotWithShape="0" blurRad="50800" dist="25400" dir="8100000">
+              <a:srgbClr val="000000">
+                <a:alpha val="12000"/>
+              </a:srgbClr>
+            </a:outerShdw>
+          </a:effectLst>
+        </p:spPr>
+      </p:sp>
+      <p:sp>
+        <p:nvSpPr>
+          <p:cNvPr id="23" name="Shape 21"/>
+          <p:cNvSpPr/>
+          <p:nvPr/>
+        </p:nvSpPr>
+        <p:spPr>
+          <a:xfrm>
+            <a:off x="457200" y="4441371"/>
+            <a:ext cx="45720" cy="560397"/>
+          </a:xfrm>
+          <a:prstGeom prst="rect">
+            <a:avLst/>
+          </a:prstGeom>
+          <a:solidFill>
+            <a:srgbClr val="2E7D32"/>
+          </a:solidFill>
+          <a:ln/>
+        </p:spPr>
+      </p:sp>
+      <p:sp>
+        <p:nvSpPr>
+          <p:cNvPr id="24" name="Text 22"/>
+          <p:cNvSpPr/>
+          <p:nvPr/>
+        </p:nvSpPr>
+        <p:spPr>
+          <a:xfrm>
+            <a:off x="685800" y="4441371"/>
+            <a:ext cx="7818120" cy="560397"/>
+          </a:xfrm>
+          <a:prstGeom prst="rect">
+            <a:avLst/>
+          </a:prstGeom>
+          <a:noFill/>
+          <a:ln/>
+        </p:spPr>
+        <p:txBody>
+          <a:bodyPr wrap="square" lIns="0" tIns="0" rIns="0" bIns="0" rtlCol="0" anchor="ctr"/>
+          <a:lstStyle/>
+          <a:p>
+            <a:pPr indent="0" marL="0">
+              <a:buNone/>
+            </a:pPr>
+            <a:r>
+              <a:rPr lang="en-US" sz="1200" dirty="0">
+                <a:solidFill>
+                  <a:srgbClr val="1A1A2E"/>
+                </a:solidFill>
+                <a:latin typeface="Calibri" pitchFamily="34" charset="0"/>
+                <a:ea typeface="Calibri" pitchFamily="34" charset="-122"/>
+                <a:cs typeface="Calibri" pitchFamily="34" charset="-120"/>
+              </a:rPr>
+              <a:t>⚠️ id_session → id_salle → nom_salle (transitive, à éliminer en 3NF)</a:t>
+            </a:r>
+            <a:endParaRPr lang="en-US" sz="1200" dirty="0"/>
           </a:p>
         </p:txBody>
       </p:sp>
@@ -2809,7 +4212,7 @@
         <p:spPr>
           <a:xfrm>
             <a:off x="0" y="0"/>
-            <a:ext cx="9144000" cy="73152"/>
+            <a:ext cx="9144000" cy="54864"/>
           </a:xfrm>
           <a:prstGeom prst="rect">
             <a:avLst/>
@@ -2828,8 +4231,8 @@
         </p:nvSpPr>
         <p:spPr>
           <a:xfrm>
-            <a:off x="457200" y="228600"/>
-            <a:ext cx="8229600" cy="640080"/>
+            <a:off x="457200" y="182880"/>
+            <a:ext cx="8229600" cy="594360"/>
           </a:xfrm>
           <a:prstGeom prst="rect">
             <a:avLst/>
@@ -2845,7 +4248,7 @@
               <a:buNone/>
             </a:pPr>
             <a:r>
-              <a:rPr lang="en-US" sz="2600" b="1" dirty="0">
+              <a:rPr lang="en-US" sz="2400" b="1" dirty="0">
                 <a:solidFill>
                   <a:srgbClr val="1B5E20"/>
                 </a:solidFill>
@@ -2853,9 +4256,9 @@
                 <a:ea typeface="Trebuchet MS" pitchFamily="34" charset="-122"/>
                 <a:cs typeface="Trebuchet MS" pitchFamily="34" charset="-120"/>
               </a:rPr>
-              <a:t>Matrice des dépendances fonctionnelles</a:t>
+              <a:t>Construire la matrice des DF</a:t>
             </a:r>
-            <a:endParaRPr lang="en-US" sz="2600" dirty="0"/>
+            <a:endParaRPr lang="en-US" sz="2400" dirty="0"/>
           </a:p>
         </p:txBody>
       </p:sp>
@@ -2867,8 +4270,8 @@
         </p:nvSpPr>
         <p:spPr>
           <a:xfrm>
-            <a:off x="457200" y="1051560"/>
-            <a:ext cx="8229600" cy="640080"/>
+            <a:off x="457200" y="914400"/>
+            <a:ext cx="8229600" cy="566928"/>
           </a:xfrm>
           <a:prstGeom prst="rect">
             <a:avLst/>
@@ -2894,8 +4297,8 @@
         </p:nvSpPr>
         <p:spPr>
           <a:xfrm>
-            <a:off x="457200" y="1051560"/>
-            <a:ext cx="54864" cy="640080"/>
+            <a:off x="457200" y="914400"/>
+            <a:ext cx="45720" cy="566928"/>
           </a:xfrm>
           <a:prstGeom prst="rect">
             <a:avLst/>
@@ -2914,8 +4317,8 @@
         </p:nvSpPr>
         <p:spPr>
           <a:xfrm>
-            <a:off x="731520" y="1051560"/>
-            <a:ext cx="7772400" cy="640080"/>
+            <a:off x="685800" y="914400"/>
+            <a:ext cx="7818120" cy="566928"/>
           </a:xfrm>
           <a:prstGeom prst="rect">
             <a:avLst/>
@@ -2931,7 +4334,7 @@
               <a:buNone/>
             </a:pPr>
             <a:r>
-              <a:rPr lang="en-US" sz="1300" dirty="0">
+              <a:rPr lang="en-US" sz="1200" dirty="0">
                 <a:solidFill>
                   <a:srgbClr val="1A1A2E"/>
                 </a:solidFill>
@@ -2939,9 +4342,9 @@
                 <a:ea typeface="Calibri" pitchFamily="34" charset="-122"/>
                 <a:cs typeface="Calibri" pitchFamily="34" charset="-120"/>
               </a:rPr>
-              <a:t>Tableau croisé : données en lignes ET en colonnes</a:t>
+              <a:t>Tableau croisé : données en LIGNES et en COLONNES</a:t>
             </a:r>
-            <a:endParaRPr lang="en-US" sz="1300" dirty="0"/>
+            <a:endParaRPr lang="en-US" sz="1200" dirty="0"/>
           </a:p>
         </p:txBody>
       </p:sp>
@@ -2953,8 +4356,8 @@
         </p:nvSpPr>
         <p:spPr>
           <a:xfrm>
-            <a:off x="457200" y="1783080"/>
-            <a:ext cx="8229600" cy="640080"/>
+            <a:off x="457200" y="1508760"/>
+            <a:ext cx="8229600" cy="566928"/>
           </a:xfrm>
           <a:prstGeom prst="rect">
             <a:avLst/>
@@ -2980,8 +4383,8 @@
         </p:nvSpPr>
         <p:spPr>
           <a:xfrm>
-            <a:off x="457200" y="1783080"/>
-            <a:ext cx="54864" cy="640080"/>
+            <a:off x="457200" y="1508760"/>
+            <a:ext cx="45720" cy="566928"/>
           </a:xfrm>
           <a:prstGeom prst="rect">
             <a:avLst/>
@@ -3000,8 +4403,8 @@
         </p:nvSpPr>
         <p:spPr>
           <a:xfrm>
-            <a:off x="731520" y="1783080"/>
-            <a:ext cx="7772400" cy="640080"/>
+            <a:off x="685800" y="1508760"/>
+            <a:ext cx="7818120" cy="566928"/>
           </a:xfrm>
           <a:prstGeom prst="rect">
             <a:avLst/>
@@ -3017,17 +4420,17 @@
               <a:buNone/>
             </a:pPr>
             <a:r>
-              <a:rPr lang="en-US" sz="1100" dirty="0">
+              <a:rPr lang="en-US" sz="1200" dirty="0">
                 <a:solidFill>
-                  <a:srgbClr val="1B5E20"/>
+                  <a:srgbClr val="1A1A2E"/>
                 </a:solidFill>
-                <a:latin typeface="JetBrains Mono" pitchFamily="34" charset="0"/>
-                <a:ea typeface="JetBrains Mono" pitchFamily="34" charset="-122"/>
-                <a:cs typeface="JetBrains Mono" pitchFamily="34" charset="-120"/>
+                <a:latin typeface="Calibri" pitchFamily="34" charset="0"/>
+                <a:ea typeface="Calibri" pitchFamily="34" charset="-122"/>
+                <a:cs typeface="Calibri" pitchFamily="34" charset="-120"/>
               </a:rPr>
-              <a:t>Case (A,B) = 1 si A → B, sinon 0</a:t>
+              <a:t>Pour chaque case (A, B) : mettre 1 si A → B, sinon 0</a:t>
             </a:r>
-            <a:endParaRPr lang="en-US" sz="1100" dirty="0"/>
+            <a:endParaRPr lang="en-US" sz="1200" dirty="0"/>
           </a:p>
         </p:txBody>
       </p:sp>
@@ -3039,8 +4442,8 @@
         </p:nvSpPr>
         <p:spPr>
           <a:xfrm>
-            <a:off x="457200" y="2514600"/>
-            <a:ext cx="8229600" cy="640080"/>
+            <a:off x="457200" y="2103120"/>
+            <a:ext cx="8229600" cy="566928"/>
           </a:xfrm>
           <a:prstGeom prst="rect">
             <a:avLst/>
@@ -3066,8 +4469,8 @@
         </p:nvSpPr>
         <p:spPr>
           <a:xfrm>
-            <a:off x="457200" y="2514600"/>
-            <a:ext cx="54864" cy="640080"/>
+            <a:off x="457200" y="2103120"/>
+            <a:ext cx="45720" cy="566928"/>
           </a:xfrm>
           <a:prstGeom prst="rect">
             <a:avLst/>
@@ -3086,8 +4489,8 @@
         </p:nvSpPr>
         <p:spPr>
           <a:xfrm>
-            <a:off x="731520" y="2514600"/>
-            <a:ext cx="7772400" cy="640080"/>
+            <a:off x="685800" y="2103120"/>
+            <a:ext cx="7818120" cy="566928"/>
           </a:xfrm>
           <a:prstGeom prst="rect">
             <a:avLst/>
@@ -3103,7 +4506,7 @@
               <a:buNone/>
             </a:pPr>
             <a:r>
-              <a:rPr lang="en-US" sz="1300" dirty="0">
+              <a:rPr lang="en-US" sz="1200" dirty="0">
                 <a:solidFill>
                   <a:srgbClr val="1A1A2E"/>
                 </a:solidFill>
@@ -3111,9 +4514,9 @@
                 <a:ea typeface="Calibri" pitchFamily="34" charset="-122"/>
                 <a:cs typeface="Calibri" pitchFamily="34" charset="-120"/>
               </a:rPr>
-              <a:t>Les SOURCES = lignes qui ne sont déterminées par aucune colonne</a:t>
+              <a:t>Commencer par les identifiants (id_artiste, id_album, id_salle...)</a:t>
             </a:r>
-            <a:endParaRPr lang="en-US" sz="1300" dirty="0"/>
+            <a:endParaRPr lang="en-US" sz="1200" dirty="0"/>
           </a:p>
         </p:txBody>
       </p:sp>
@@ -3125,8 +4528,8 @@
         </p:nvSpPr>
         <p:spPr>
           <a:xfrm>
-            <a:off x="457200" y="3246120"/>
-            <a:ext cx="8229600" cy="640080"/>
+            <a:off x="457200" y="2697480"/>
+            <a:ext cx="8229600" cy="566928"/>
           </a:xfrm>
           <a:prstGeom prst="rect">
             <a:avLst/>
@@ -3152,8 +4555,8 @@
         </p:nvSpPr>
         <p:spPr>
           <a:xfrm>
-            <a:off x="457200" y="3246120"/>
-            <a:ext cx="54864" cy="640080"/>
+            <a:off x="457200" y="2697480"/>
+            <a:ext cx="45720" cy="566928"/>
           </a:xfrm>
           <a:prstGeom prst="rect">
             <a:avLst/>
@@ -3172,8 +4575,8 @@
         </p:nvSpPr>
         <p:spPr>
           <a:xfrm>
-            <a:off x="731520" y="3246120"/>
-            <a:ext cx="7772400" cy="640080"/>
+            <a:off x="685800" y="2697480"/>
+            <a:ext cx="7818120" cy="566928"/>
           </a:xfrm>
           <a:prstGeom prst="rect">
             <a:avLst/>
@@ -3189,7 +4592,7 @@
               <a:buNone/>
             </a:pPr>
             <a:r>
-              <a:rPr lang="en-US" sz="1300" dirty="0">
+              <a:rPr lang="en-US" sz="1200" dirty="0">
                 <a:solidFill>
                   <a:srgbClr val="1A1A2E"/>
                 </a:solidFill>
@@ -3197,9 +4600,9 @@
                 <a:ea typeface="Calibri" pitchFamily="34" charset="-122"/>
                 <a:cs typeface="Calibri" pitchFamily="34" charset="-120"/>
               </a:rPr>
-              <a:t>Sources = futures clés primaires</a:t>
+              <a:t>Les SOURCES = données qui déterminent d'autres mais ne sont déterminées par aucune</a:t>
             </a:r>
-            <a:endParaRPr lang="en-US" sz="1300" dirty="0"/>
+            <a:endParaRPr lang="en-US" sz="1200" dirty="0"/>
           </a:p>
         </p:txBody>
       </p:sp>
@@ -3211,8 +4614,8 @@
         </p:nvSpPr>
         <p:spPr>
           <a:xfrm>
-            <a:off x="457200" y="3977640"/>
-            <a:ext cx="8229600" cy="640080"/>
+            <a:off x="457200" y="3291840"/>
+            <a:ext cx="8229600" cy="566928"/>
           </a:xfrm>
           <a:prstGeom prst="rect">
             <a:avLst/>
@@ -3238,8 +4641,8 @@
         </p:nvSpPr>
         <p:spPr>
           <a:xfrm>
-            <a:off x="457200" y="3977640"/>
-            <a:ext cx="54864" cy="640080"/>
+            <a:off x="457200" y="3291840"/>
+            <a:ext cx="45720" cy="566928"/>
           </a:xfrm>
           <a:prstGeom prst="rect">
             <a:avLst/>
@@ -3258,8 +4661,8 @@
         </p:nvSpPr>
         <p:spPr>
           <a:xfrm>
-            <a:off x="731520" y="3977640"/>
-            <a:ext cx="7772400" cy="640080"/>
+            <a:off x="685800" y="3291840"/>
+            <a:ext cx="7818120" cy="566928"/>
           </a:xfrm>
           <a:prstGeom prst="rect">
             <a:avLst/>
@@ -3275,7 +4678,7 @@
               <a:buNone/>
             </a:pPr>
             <a:r>
-              <a:rPr lang="en-US" sz="1300" dirty="0">
+              <a:rPr lang="en-US" sz="1200" dirty="0">
                 <a:solidFill>
                   <a:srgbClr val="1A1A2E"/>
                 </a:solidFill>
@@ -3283,22 +4686,69 @@
                 <a:ea typeface="Calibri" pitchFamily="34" charset="-122"/>
                 <a:cs typeface="Calibri" pitchFamily="34" charset="-120"/>
               </a:rPr>
-              <a:t>Exercice : construire la matrice de SwissSound</a:t>
+              <a:t>Sources = futures CLÉS PRIMAIRES</a:t>
             </a:r>
-            <a:endParaRPr lang="en-US" sz="1300" dirty="0"/>
+            <a:endParaRPr lang="en-US" sz="1200" dirty="0"/>
           </a:p>
         </p:txBody>
       </p:sp>
       <p:sp>
         <p:nvSpPr>
-          <p:cNvPr id="19" name="Text 17"/>
-          <p:cNvSpPr/>
-          <p:nvPr/>
-        </p:nvSpPr>
-        <p:spPr>
-          <a:xfrm>
-            <a:off x="8229600" y="4754880"/>
-            <a:ext cx="731520" cy="274320"/>
+          <p:cNvPr id="19" name="Shape 17"/>
+          <p:cNvSpPr/>
+          <p:nvPr/>
+        </p:nvSpPr>
+        <p:spPr>
+          <a:xfrm>
+            <a:off x="457200" y="3886200"/>
+            <a:ext cx="8229600" cy="566928"/>
+          </a:xfrm>
+          <a:prstGeom prst="rect">
+            <a:avLst/>
+          </a:prstGeom>
+          <a:solidFill>
+            <a:srgbClr val="E8F5E9"/>
+          </a:solidFill>
+          <a:ln/>
+          <a:effectLst>
+            <a:outerShdw sx="100000" sy="100000" kx="0" ky="0" algn="bl" rotWithShape="0" blurRad="50800" dist="25400" dir="8100000">
+              <a:srgbClr val="000000">
+                <a:alpha val="12000"/>
+              </a:srgbClr>
+            </a:outerShdw>
+          </a:effectLst>
+        </p:spPr>
+      </p:sp>
+      <p:sp>
+        <p:nvSpPr>
+          <p:cNvPr id="20" name="Shape 18"/>
+          <p:cNvSpPr/>
+          <p:nvPr/>
+        </p:nvSpPr>
+        <p:spPr>
+          <a:xfrm>
+            <a:off x="457200" y="3886200"/>
+            <a:ext cx="45720" cy="566928"/>
+          </a:xfrm>
+          <a:prstGeom prst="rect">
+            <a:avLst/>
+          </a:prstGeom>
+          <a:solidFill>
+            <a:srgbClr val="2E7D32"/>
+          </a:solidFill>
+          <a:ln/>
+        </p:spPr>
+      </p:sp>
+      <p:sp>
+        <p:nvSpPr>
+          <p:cNvPr id="21" name="Text 19"/>
+          <p:cNvSpPr/>
+          <p:nvPr/>
+        </p:nvSpPr>
+        <p:spPr>
+          <a:xfrm>
+            <a:off x="685800" y="3886200"/>
+            <a:ext cx="7818120" cy="566928"/>
           </a:xfrm>
           <a:prstGeom prst="rect">
             <a:avLst/>
@@ -3310,21 +4760,21 @@
           <a:bodyPr wrap="square" lIns="0" tIns="0" rIns="0" bIns="0" rtlCol="0" anchor="ctr"/>
           <a:lstStyle/>
           <a:p>
-            <a:pPr algn="r" indent="0" marL="0">
+            <a:pPr indent="0" marL="0">
               <a:buNone/>
             </a:pPr>
             <a:r>
-              <a:rPr lang="en-US" sz="900" dirty="0">
+              <a:rPr lang="en-US" sz="1200" dirty="0">
                 <a:solidFill>
-                  <a:srgbClr val="AAAAAA"/>
+                  <a:srgbClr val="1A1A2E"/>
                 </a:solidFill>
                 <a:latin typeface="Calibri" pitchFamily="34" charset="0"/>
                 <a:ea typeface="Calibri" pitchFamily="34" charset="-122"/>
                 <a:cs typeface="Calibri" pitchFamily="34" charset="-120"/>
               </a:rPr>
-              <a:t>4/6</a:t>
+              <a:t>Méthode : parcourir le DD ligne par ligne, se demander 'qui détermine qui ?'</a:t>
             </a:r>
-            <a:endParaRPr lang="en-US" sz="900" dirty="0"/>
+            <a:endParaRPr lang="en-US" sz="1200" dirty="0"/>
           </a:p>
         </p:txBody>
       </p:sp>
@@ -3369,7 +4819,7 @@
         <p:spPr>
           <a:xfrm>
             <a:off x="0" y="0"/>
-            <a:ext cx="9144000" cy="73152"/>
+            <a:ext cx="9144000" cy="54864"/>
           </a:xfrm>
           <a:prstGeom prst="rect">
             <a:avLst/>
@@ -3388,8 +4838,8 @@
         </p:nvSpPr>
         <p:spPr>
           <a:xfrm>
-            <a:off x="457200" y="228600"/>
-            <a:ext cx="8229600" cy="640080"/>
+            <a:off x="457200" y="182880"/>
+            <a:ext cx="8229600" cy="548640"/>
           </a:xfrm>
           <a:prstGeom prst="rect">
             <a:avLst/>
@@ -3405,7 +4855,7 @@
               <a:buNone/>
             </a:pPr>
             <a:r>
-              <a:rPr lang="en-US" sz="2600" b="1" dirty="0">
+              <a:rPr lang="en-US" sz="2400" b="1" dirty="0">
                 <a:solidFill>
                   <a:srgbClr val="1B5E20"/>
                 </a:solidFill>
@@ -3413,481 +4863,3722 @@
                 <a:ea typeface="Trebuchet MS" pitchFamily="34" charset="-122"/>
                 <a:cs typeface="Trebuchet MS" pitchFamily="34" charset="-120"/>
               </a:rPr>
-              <a:t>Graphe des DF (SAT/SRE)</a:t>
+              <a:t>Matrice des DF — Extrait SwissSound</a:t>
             </a:r>
-            <a:endParaRPr lang="en-US" sz="2600" dirty="0"/>
+            <a:endParaRPr lang="en-US" sz="2400" dirty="0"/>
           </a:p>
         </p:txBody>
       </p:sp>
-      <p:sp>
-        <p:nvSpPr>
-          <p:cNvPr id="4" name="Shape 2"/>
-          <p:cNvSpPr/>
-          <p:nvPr/>
-        </p:nvSpPr>
-        <p:spPr>
-          <a:xfrm>
-            <a:off x="457200" y="1051560"/>
-            <a:ext cx="8229600" cy="640080"/>
-          </a:xfrm>
-          <a:prstGeom prst="rect">
-            <a:avLst/>
-          </a:prstGeom>
-          <a:solidFill>
-            <a:srgbClr val="FFFFFF"/>
-          </a:solidFill>
-          <a:ln/>
-          <a:effectLst>
-            <a:outerShdw sx="100000" sy="100000" kx="0" ky="0" algn="bl" rotWithShape="0" blurRad="50800" dist="25400" dir="8100000">
-              <a:srgbClr val="000000">
-                <a:alpha val="12000"/>
-              </a:srgbClr>
-            </a:outerShdw>
-          </a:effectLst>
-        </p:spPr>
-      </p:sp>
-      <p:sp>
-        <p:nvSpPr>
-          <p:cNvPr id="5" name="Shape 3"/>
-          <p:cNvSpPr/>
-          <p:nvPr/>
-        </p:nvSpPr>
-        <p:spPr>
-          <a:xfrm>
-            <a:off x="457200" y="1051560"/>
-            <a:ext cx="54864" cy="640080"/>
-          </a:xfrm>
-          <a:prstGeom prst="rect">
-            <a:avLst/>
-          </a:prstGeom>
-          <a:solidFill>
-            <a:srgbClr val="2E7D32"/>
-          </a:solidFill>
-          <a:ln/>
-        </p:spPr>
-      </p:sp>
-      <p:sp>
-        <p:nvSpPr>
-          <p:cNvPr id="6" name="Text 4"/>
-          <p:cNvSpPr/>
-          <p:nvPr/>
-        </p:nvSpPr>
-        <p:spPr>
-          <a:xfrm>
-            <a:off x="731520" y="1051560"/>
-            <a:ext cx="7772400" cy="640080"/>
-          </a:xfrm>
-          <a:prstGeom prst="rect">
-            <a:avLst/>
-          </a:prstGeom>
-          <a:noFill/>
-          <a:ln/>
-        </p:spPr>
-        <p:txBody>
-          <a:bodyPr wrap="square" lIns="0" tIns="0" rIns="0" bIns="0" rtlCol="0" anchor="ctr"/>
-          <a:lstStyle/>
-          <a:p>
-            <a:pPr indent="0" marL="0">
-              <a:buNone/>
-            </a:pPr>
-            <a:r>
-              <a:rPr lang="en-US" sz="1300" dirty="0">
-                <a:solidFill>
-                  <a:srgbClr val="1A1A2E"/>
-                </a:solidFill>
-                <a:latin typeface="Calibri" pitchFamily="34" charset="0"/>
-                <a:ea typeface="Calibri" pitchFamily="34" charset="-122"/>
-                <a:cs typeface="Calibri" pitchFamily="34" charset="-120"/>
-              </a:rPr>
-              <a:t>Représentation visuelle des dépendances</a:t>
-            </a:r>
-            <a:endParaRPr lang="en-US" sz="1300" dirty="0"/>
-          </a:p>
-        </p:txBody>
-      </p:sp>
-      <p:sp>
-        <p:nvSpPr>
-          <p:cNvPr id="7" name="Shape 5"/>
-          <p:cNvSpPr/>
-          <p:nvPr/>
-        </p:nvSpPr>
-        <p:spPr>
-          <a:xfrm>
-            <a:off x="457200" y="1783080"/>
-            <a:ext cx="8229600" cy="640080"/>
-          </a:xfrm>
-          <a:prstGeom prst="rect">
-            <a:avLst/>
-          </a:prstGeom>
-          <a:solidFill>
-            <a:srgbClr val="E8F5E9"/>
-          </a:solidFill>
-          <a:ln/>
-          <a:effectLst>
-            <a:outerShdw sx="100000" sy="100000" kx="0" ky="0" algn="bl" rotWithShape="0" blurRad="50800" dist="25400" dir="8100000">
-              <a:srgbClr val="000000">
-                <a:alpha val="12000"/>
-              </a:srgbClr>
-            </a:outerShdw>
-          </a:effectLst>
-        </p:spPr>
-      </p:sp>
-      <p:sp>
-        <p:nvSpPr>
-          <p:cNvPr id="8" name="Shape 6"/>
-          <p:cNvSpPr/>
-          <p:nvPr/>
-        </p:nvSpPr>
-        <p:spPr>
-          <a:xfrm>
-            <a:off x="457200" y="1783080"/>
-            <a:ext cx="54864" cy="640080"/>
-          </a:xfrm>
-          <a:prstGeom prst="rect">
-            <a:avLst/>
-          </a:prstGeom>
-          <a:solidFill>
-            <a:srgbClr val="2E7D32"/>
-          </a:solidFill>
-          <a:ln/>
-        </p:spPr>
-      </p:sp>
-      <p:sp>
-        <p:nvSpPr>
-          <p:cNvPr id="9" name="Text 7"/>
-          <p:cNvSpPr/>
-          <p:nvPr/>
-        </p:nvSpPr>
-        <p:spPr>
-          <a:xfrm>
-            <a:off x="731520" y="1783080"/>
-            <a:ext cx="7772400" cy="640080"/>
-          </a:xfrm>
-          <a:prstGeom prst="rect">
-            <a:avLst/>
-          </a:prstGeom>
-          <a:noFill/>
-          <a:ln/>
-        </p:spPr>
-        <p:txBody>
-          <a:bodyPr wrap="square" lIns="0" tIns="0" rIns="0" bIns="0" rtlCol="0" anchor="ctr"/>
-          <a:lstStyle/>
-          <a:p>
-            <a:pPr indent="0" marL="0">
-              <a:buNone/>
-            </a:pPr>
-            <a:r>
-              <a:rPr lang="en-US" sz="1300" dirty="0">
-                <a:solidFill>
-                  <a:srgbClr val="1A1A2E"/>
-                </a:solidFill>
-                <a:latin typeface="Calibri" pitchFamily="34" charset="0"/>
-                <a:ea typeface="Calibri" pitchFamily="34" charset="-122"/>
-                <a:cs typeface="Calibri" pitchFamily="34" charset="-120"/>
-              </a:rPr>
-              <a:t>Nœuds = données, flèches = DF</a:t>
-            </a:r>
-            <a:endParaRPr lang="en-US" sz="1300" dirty="0"/>
-          </a:p>
-        </p:txBody>
-      </p:sp>
-      <p:sp>
-        <p:nvSpPr>
-          <p:cNvPr id="10" name="Shape 8"/>
-          <p:cNvSpPr/>
-          <p:nvPr/>
-        </p:nvSpPr>
-        <p:spPr>
-          <a:xfrm>
-            <a:off x="457200" y="2514600"/>
-            <a:ext cx="8229600" cy="640080"/>
-          </a:xfrm>
-          <a:prstGeom prst="rect">
-            <a:avLst/>
-          </a:prstGeom>
-          <a:solidFill>
-            <a:srgbClr val="FFFFFF"/>
-          </a:solidFill>
-          <a:ln/>
-          <a:effectLst>
-            <a:outerShdw sx="100000" sy="100000" kx="0" ky="0" algn="bl" rotWithShape="0" blurRad="50800" dist="25400" dir="8100000">
-              <a:srgbClr val="000000">
-                <a:alpha val="12000"/>
-              </a:srgbClr>
-            </a:outerShdw>
-          </a:effectLst>
-        </p:spPr>
-      </p:sp>
-      <p:sp>
-        <p:nvSpPr>
-          <p:cNvPr id="11" name="Shape 9"/>
-          <p:cNvSpPr/>
-          <p:nvPr/>
-        </p:nvSpPr>
-        <p:spPr>
-          <a:xfrm>
-            <a:off x="457200" y="2514600"/>
-            <a:ext cx="54864" cy="640080"/>
-          </a:xfrm>
-          <a:prstGeom prst="rect">
-            <a:avLst/>
-          </a:prstGeom>
-          <a:solidFill>
-            <a:srgbClr val="2E7D32"/>
-          </a:solidFill>
-          <a:ln/>
-        </p:spPr>
-      </p:sp>
-      <p:sp>
-        <p:nvSpPr>
-          <p:cNvPr id="12" name="Text 10"/>
-          <p:cNvSpPr/>
-          <p:nvPr/>
-        </p:nvSpPr>
-        <p:spPr>
-          <a:xfrm>
-            <a:off x="731520" y="2514600"/>
-            <a:ext cx="7772400" cy="640080"/>
-          </a:xfrm>
-          <a:prstGeom prst="rect">
-            <a:avLst/>
-          </a:prstGeom>
-          <a:noFill/>
-          <a:ln/>
-        </p:spPr>
-        <p:txBody>
-          <a:bodyPr wrap="square" lIns="0" tIns="0" rIns="0" bIns="0" rtlCol="0" anchor="ctr"/>
-          <a:lstStyle/>
-          <a:p>
-            <a:pPr indent="0" marL="0">
-              <a:buNone/>
-            </a:pPr>
-            <a:r>
-              <a:rPr lang="en-US" sz="1300" dirty="0">
-                <a:solidFill>
-                  <a:srgbClr val="1A1A2E"/>
-                </a:solidFill>
-                <a:latin typeface="Calibri" pitchFamily="34" charset="0"/>
-                <a:ea typeface="Calibri" pitchFamily="34" charset="-122"/>
-                <a:cs typeface="Calibri" pitchFamily="34" charset="-120"/>
-              </a:rPr>
-              <a:t>Sources = nœuds sans flèche entrante (futures PK)</a:t>
-            </a:r>
-            <a:endParaRPr lang="en-US" sz="1300" dirty="0"/>
-          </a:p>
-        </p:txBody>
-      </p:sp>
-      <p:sp>
-        <p:nvSpPr>
-          <p:cNvPr id="13" name="Shape 11"/>
-          <p:cNvSpPr/>
-          <p:nvPr/>
-        </p:nvSpPr>
-        <p:spPr>
-          <a:xfrm>
-            <a:off x="457200" y="3246120"/>
-            <a:ext cx="8229600" cy="640080"/>
-          </a:xfrm>
-          <a:prstGeom prst="rect">
-            <a:avLst/>
-          </a:prstGeom>
-          <a:solidFill>
-            <a:srgbClr val="E8F5E9"/>
-          </a:solidFill>
-          <a:ln/>
-          <a:effectLst>
-            <a:outerShdw sx="100000" sy="100000" kx="0" ky="0" algn="bl" rotWithShape="0" blurRad="50800" dist="25400" dir="8100000">
-              <a:srgbClr val="000000">
-                <a:alpha val="12000"/>
-              </a:srgbClr>
-            </a:outerShdw>
-          </a:effectLst>
-        </p:spPr>
-      </p:sp>
-      <p:sp>
-        <p:nvSpPr>
-          <p:cNvPr id="14" name="Shape 12"/>
-          <p:cNvSpPr/>
-          <p:nvPr/>
-        </p:nvSpPr>
-        <p:spPr>
-          <a:xfrm>
-            <a:off x="457200" y="3246120"/>
-            <a:ext cx="54864" cy="640080"/>
-          </a:xfrm>
-          <a:prstGeom prst="rect">
-            <a:avLst/>
-          </a:prstGeom>
-          <a:solidFill>
-            <a:srgbClr val="2E7D32"/>
-          </a:solidFill>
-          <a:ln/>
-        </p:spPr>
-      </p:sp>
-      <p:sp>
-        <p:nvSpPr>
-          <p:cNvPr id="15" name="Text 13"/>
-          <p:cNvSpPr/>
-          <p:nvPr/>
-        </p:nvSpPr>
-        <p:spPr>
-          <a:xfrm>
-            <a:off x="731520" y="3246120"/>
-            <a:ext cx="7772400" cy="640080"/>
-          </a:xfrm>
-          <a:prstGeom prst="rect">
-            <a:avLst/>
-          </a:prstGeom>
-          <a:noFill/>
-          <a:ln/>
-        </p:spPr>
-        <p:txBody>
-          <a:bodyPr wrap="square" lIns="0" tIns="0" rIns="0" bIns="0" rtlCol="0" anchor="ctr"/>
-          <a:lstStyle/>
-          <a:p>
-            <a:pPr indent="0" marL="0">
-              <a:buNone/>
-            </a:pPr>
-            <a:r>
-              <a:rPr lang="en-US" sz="1300" dirty="0">
-                <a:solidFill>
-                  <a:srgbClr val="1A1A2E"/>
-                </a:solidFill>
-                <a:latin typeface="Calibri" pitchFamily="34" charset="0"/>
-                <a:ea typeface="Calibri" pitchFamily="34" charset="-122"/>
-                <a:cs typeface="Calibri" pitchFamily="34" charset="-120"/>
-              </a:rPr>
-              <a:t>Aide à identifier les futures entités et leurs attributs</a:t>
-            </a:r>
-            <a:endParaRPr lang="en-US" sz="1300" dirty="0"/>
-          </a:p>
-        </p:txBody>
-      </p:sp>
-      <p:sp>
-        <p:nvSpPr>
-          <p:cNvPr id="16" name="Shape 14"/>
-          <p:cNvSpPr/>
-          <p:nvPr/>
-        </p:nvSpPr>
-        <p:spPr>
-          <a:xfrm>
-            <a:off x="457200" y="3977640"/>
-            <a:ext cx="8229600" cy="640080"/>
-          </a:xfrm>
-          <a:prstGeom prst="rect">
-            <a:avLst/>
-          </a:prstGeom>
-          <a:solidFill>
-            <a:srgbClr val="FFFFFF"/>
-          </a:solidFill>
-          <a:ln/>
-          <a:effectLst>
-            <a:outerShdw sx="100000" sy="100000" kx="0" ky="0" algn="bl" rotWithShape="0" blurRad="50800" dist="25400" dir="8100000">
-              <a:srgbClr val="000000">
-                <a:alpha val="12000"/>
-              </a:srgbClr>
-            </a:outerShdw>
-          </a:effectLst>
-        </p:spPr>
-      </p:sp>
-      <p:sp>
-        <p:nvSpPr>
-          <p:cNvPr id="17" name="Shape 15"/>
-          <p:cNvSpPr/>
-          <p:nvPr/>
-        </p:nvSpPr>
-        <p:spPr>
-          <a:xfrm>
-            <a:off x="457200" y="3977640"/>
-            <a:ext cx="54864" cy="640080"/>
-          </a:xfrm>
-          <a:prstGeom prst="rect">
-            <a:avLst/>
-          </a:prstGeom>
-          <a:solidFill>
-            <a:srgbClr val="2E7D32"/>
-          </a:solidFill>
-          <a:ln/>
-        </p:spPr>
-      </p:sp>
-      <p:sp>
-        <p:nvSpPr>
-          <p:cNvPr id="18" name="Text 16"/>
-          <p:cNvSpPr/>
-          <p:nvPr/>
-        </p:nvSpPr>
-        <p:spPr>
-          <a:xfrm>
-            <a:off x="731520" y="3977640"/>
-            <a:ext cx="7772400" cy="640080"/>
-          </a:xfrm>
-          <a:prstGeom prst="rect">
-            <a:avLst/>
-          </a:prstGeom>
-          <a:noFill/>
-          <a:ln/>
-        </p:spPr>
-        <p:txBody>
-          <a:bodyPr wrap="square" lIns="0" tIns="0" rIns="0" bIns="0" rtlCol="0" anchor="ctr"/>
-          <a:lstStyle/>
-          <a:p>
-            <a:pPr indent="0" marL="0">
-              <a:buNone/>
-            </a:pPr>
-            <a:r>
-              <a:rPr lang="en-US" sz="1300" dirty="0">
-                <a:solidFill>
-                  <a:srgbClr val="1A1A2E"/>
-                </a:solidFill>
-                <a:latin typeface="Calibri" pitchFamily="34" charset="0"/>
-                <a:ea typeface="Calibri" pitchFamily="34" charset="-122"/>
-                <a:cs typeface="Calibri" pitchFamily="34" charset="-120"/>
-              </a:rPr>
-              <a:t>Valider le graphe avant de construire le MCD</a:t>
-            </a:r>
-            <a:endParaRPr lang="en-US" sz="1300" dirty="0"/>
-          </a:p>
-        </p:txBody>
-      </p:sp>
-      <p:sp>
-        <p:nvSpPr>
-          <p:cNvPr id="19" name="Text 17"/>
-          <p:cNvSpPr/>
-          <p:nvPr/>
-        </p:nvSpPr>
-        <p:spPr>
-          <a:xfrm>
-            <a:off x="8229600" y="4754880"/>
-            <a:ext cx="731520" cy="274320"/>
-          </a:xfrm>
-          <a:prstGeom prst="rect">
-            <a:avLst/>
-          </a:prstGeom>
-          <a:noFill/>
-          <a:ln/>
-        </p:spPr>
-        <p:txBody>
-          <a:bodyPr wrap="square" lIns="0" tIns="0" rIns="0" bIns="0" rtlCol="0" anchor="ctr"/>
-          <a:lstStyle/>
-          <a:p>
-            <a:pPr algn="r" indent="0" marL="0">
-              <a:buNone/>
-            </a:pPr>
-            <a:r>
-              <a:rPr lang="en-US" sz="900" dirty="0">
-                <a:solidFill>
-                  <a:srgbClr val="AAAAAA"/>
-                </a:solidFill>
-                <a:latin typeface="Calibri" pitchFamily="34" charset="0"/>
-                <a:ea typeface="Calibri" pitchFamily="34" charset="-122"/>
-                <a:cs typeface="Calibri" pitchFamily="34" charset="-120"/>
-              </a:rPr>
-              <a:t>5/6</a:t>
-            </a:r>
-            <a:endParaRPr lang="en-US" sz="900" dirty="0"/>
-          </a:p>
-        </p:txBody>
-      </p:sp>
+      <p:graphicFrame>
+        <p:nvGraphicFramePr>
+          <p:cNvPr id="6" name="Table 0"/>
+          <p:cNvGraphicFramePr>
+            <a:graphicFrameLocks noGrp="1"/>
+          </p:cNvGraphicFramePr>
+          <p:nvPr>
+            <p:extLst>
+              <p:ext uri="{D42A27DB-BD31-4B8C-83A1-F6EECF244321}">
+                <p14:modId xmlns:p14="http://schemas.microsoft.com/office/powerpoint/2010/main" val="1579011935"/>
+              </p:ext>
+            </p:extLst>
+          </p:nvPr>
+        </p:nvGraphicFramePr>
+        <p:xfrm>
+          <a:off x="457200" y="914400"/>
+          <a:ext cx="8229600" cy="914400"/>
+        </p:xfrm>
+        <a:graphic>
+          <a:graphicData uri="http://schemas.openxmlformats.org/drawingml/2006/table">
+            <a:tbl>
+              <a:tblPr/>
+              <a:tblGrid>
+                <a:gridCol w="914400"/>
+                <a:gridCol w="914400"/>
+                <a:gridCol w="914400"/>
+                <a:gridCol w="914400"/>
+                <a:gridCol w="914400"/>
+                <a:gridCol w="914400"/>
+                <a:gridCol w="914400"/>
+                <a:gridCol w="914400"/>
+                <a:gridCol w="914400"/>
+              </a:tblGrid>
+              <a:tr h="0">
+                <a:tc>
+                  <a:txBody>
+                    <a:bodyPr/>
+                    <a:lstStyle/>
+                    <a:p>
+                      <a:pPr indent="0" marL="0">
+                        <a:buNone/>
+                      </a:pPr>
+                      <a:endParaRPr lang="en-US" sz="1000" dirty="0">
+                        <a:latin typeface="Trebuchet MS" charset="0"/>
+                        <a:ea typeface="Trebuchet MS" charset="0"/>
+                        <a:cs typeface="Trebuchet MS" charset="0"/>
+                      </a:endParaRPr>
+                    </a:p>
+                  </a:txBody>
+                  <a:tcPr marL="91440" marR="91440" marT="45720" marB="45720">
+                    <a:lnL w="6350" cap="flat" cmpd="sng" algn="ctr">
+                      <a:solidFill>
+                        <a:srgbClr val="CCCCCC"/>
+                      </a:solidFill>
+                      <a:prstDash val="solid"/>
+                      <a:round/>
+                      <a:headEnd type="none" w="med" len="med"/>
+                      <a:tailEnd type="none" w="med" len="med"/>
+                    </a:lnL>
+                    <a:lnR w="6350" cap="flat" cmpd="sng" algn="ctr">
+                      <a:solidFill>
+                        <a:srgbClr val="CCCCCC"/>
+                      </a:solidFill>
+                      <a:prstDash val="solid"/>
+                      <a:round/>
+                      <a:headEnd type="none" w="med" len="med"/>
+                      <a:tailEnd type="none" w="med" len="med"/>
+                    </a:lnR>
+                    <a:lnT w="6350" cap="flat" cmpd="sng" algn="ctr">
+                      <a:solidFill>
+                        <a:srgbClr val="CCCCCC"/>
+                      </a:solidFill>
+                      <a:prstDash val="solid"/>
+                      <a:round/>
+                      <a:headEnd type="none" w="med" len="med"/>
+                      <a:tailEnd type="none" w="med" len="med"/>
+                    </a:lnT>
+                    <a:lnB w="6350" cap="flat" cmpd="sng" algn="ctr">
+                      <a:solidFill>
+                        <a:srgbClr val="CCCCCC"/>
+                      </a:solidFill>
+                      <a:prstDash val="solid"/>
+                      <a:round/>
+                      <a:headEnd type="none" w="med" len="med"/>
+                      <a:tailEnd type="none" w="med" len="med"/>
+                    </a:lnB>
+                    <a:solidFill>
+                      <a:srgbClr val="2E7D32"/>
+                    </a:solidFill>
+                  </a:tcPr>
+                </a:tc>
+                <a:tc>
+                  <a:txBody>
+                    <a:bodyPr/>
+                    <a:lstStyle/>
+                    <a:p>
+                      <a:pPr indent="0" marL="0">
+                        <a:buNone/>
+                      </a:pPr>
+                      <a:r>
+                        <a:rPr lang="en-US" sz="1000" b="1" dirty="0">
+                          <a:solidFill>
+                            <a:srgbClr val="FFFFFF"/>
+                          </a:solidFill>
+                          <a:latin typeface="Trebuchet MS" pitchFamily="34" charset="0"/>
+                          <a:ea typeface="Trebuchet MS" pitchFamily="34" charset="-122"/>
+                          <a:cs typeface="Trebuchet MS" pitchFamily="34" charset="-120"/>
+                        </a:rPr>
+                        <a:t>id_art</a:t>
+                      </a:r>
+                      <a:endParaRPr lang="en-US" sz="1000" dirty="0">
+                        <a:latin typeface="Trebuchet MS" charset="0"/>
+                        <a:ea typeface="Trebuchet MS" charset="0"/>
+                        <a:cs typeface="Trebuchet MS" charset="0"/>
+                      </a:endParaRPr>
+                    </a:p>
+                  </a:txBody>
+                  <a:tcPr marL="91440" marR="91440" marT="45720" marB="45720">
+                    <a:lnL w="6350" cap="flat" cmpd="sng" algn="ctr">
+                      <a:solidFill>
+                        <a:srgbClr val="CCCCCC"/>
+                      </a:solidFill>
+                      <a:prstDash val="solid"/>
+                      <a:round/>
+                      <a:headEnd type="none" w="med" len="med"/>
+                      <a:tailEnd type="none" w="med" len="med"/>
+                    </a:lnL>
+                    <a:lnR w="6350" cap="flat" cmpd="sng" algn="ctr">
+                      <a:solidFill>
+                        <a:srgbClr val="CCCCCC"/>
+                      </a:solidFill>
+                      <a:prstDash val="solid"/>
+                      <a:round/>
+                      <a:headEnd type="none" w="med" len="med"/>
+                      <a:tailEnd type="none" w="med" len="med"/>
+                    </a:lnR>
+                    <a:lnT w="6350" cap="flat" cmpd="sng" algn="ctr">
+                      <a:solidFill>
+                        <a:srgbClr val="CCCCCC"/>
+                      </a:solidFill>
+                      <a:prstDash val="solid"/>
+                      <a:round/>
+                      <a:headEnd type="none" w="med" len="med"/>
+                      <a:tailEnd type="none" w="med" len="med"/>
+                    </a:lnT>
+                    <a:lnB w="6350" cap="flat" cmpd="sng" algn="ctr">
+                      <a:solidFill>
+                        <a:srgbClr val="CCCCCC"/>
+                      </a:solidFill>
+                      <a:prstDash val="solid"/>
+                      <a:round/>
+                      <a:headEnd type="none" w="med" len="med"/>
+                      <a:tailEnd type="none" w="med" len="med"/>
+                    </a:lnB>
+                    <a:solidFill>
+                      <a:srgbClr val="2E7D32"/>
+                    </a:solidFill>
+                  </a:tcPr>
+                </a:tc>
+                <a:tc>
+                  <a:txBody>
+                    <a:bodyPr/>
+                    <a:lstStyle/>
+                    <a:p>
+                      <a:pPr indent="0" marL="0">
+                        <a:buNone/>
+                      </a:pPr>
+                      <a:r>
+                        <a:rPr lang="en-US" sz="1000" b="1" dirty="0">
+                          <a:solidFill>
+                            <a:srgbClr val="FFFFFF"/>
+                          </a:solidFill>
+                          <a:latin typeface="Trebuchet MS" pitchFamily="34" charset="0"/>
+                          <a:ea typeface="Trebuchet MS" pitchFamily="34" charset="-122"/>
+                          <a:cs typeface="Trebuchet MS" pitchFamily="34" charset="-120"/>
+                        </a:rPr>
+                        <a:t>nom</a:t>
+                      </a:r>
+                      <a:endParaRPr lang="en-US" sz="1000" dirty="0">
+                        <a:latin typeface="Trebuchet MS" charset="0"/>
+                        <a:ea typeface="Trebuchet MS" charset="0"/>
+                        <a:cs typeface="Trebuchet MS" charset="0"/>
+                      </a:endParaRPr>
+                    </a:p>
+                  </a:txBody>
+                  <a:tcPr marL="91440" marR="91440" marT="45720" marB="45720">
+                    <a:lnL w="6350" cap="flat" cmpd="sng" algn="ctr">
+                      <a:solidFill>
+                        <a:srgbClr val="CCCCCC"/>
+                      </a:solidFill>
+                      <a:prstDash val="solid"/>
+                      <a:round/>
+                      <a:headEnd type="none" w="med" len="med"/>
+                      <a:tailEnd type="none" w="med" len="med"/>
+                    </a:lnL>
+                    <a:lnR w="6350" cap="flat" cmpd="sng" algn="ctr">
+                      <a:solidFill>
+                        <a:srgbClr val="CCCCCC"/>
+                      </a:solidFill>
+                      <a:prstDash val="solid"/>
+                      <a:round/>
+                      <a:headEnd type="none" w="med" len="med"/>
+                      <a:tailEnd type="none" w="med" len="med"/>
+                    </a:lnR>
+                    <a:lnT w="6350" cap="flat" cmpd="sng" algn="ctr">
+                      <a:solidFill>
+                        <a:srgbClr val="CCCCCC"/>
+                      </a:solidFill>
+                      <a:prstDash val="solid"/>
+                      <a:round/>
+                      <a:headEnd type="none" w="med" len="med"/>
+                      <a:tailEnd type="none" w="med" len="med"/>
+                    </a:lnT>
+                    <a:lnB w="6350" cap="flat" cmpd="sng" algn="ctr">
+                      <a:solidFill>
+                        <a:srgbClr val="CCCCCC"/>
+                      </a:solidFill>
+                      <a:prstDash val="solid"/>
+                      <a:round/>
+                      <a:headEnd type="none" w="med" len="med"/>
+                      <a:tailEnd type="none" w="med" len="med"/>
+                    </a:lnB>
+                    <a:solidFill>
+                      <a:srgbClr val="2E7D32"/>
+                    </a:solidFill>
+                  </a:tcPr>
+                </a:tc>
+                <a:tc>
+                  <a:txBody>
+                    <a:bodyPr/>
+                    <a:lstStyle/>
+                    <a:p>
+                      <a:pPr indent="0" marL="0">
+                        <a:buNone/>
+                      </a:pPr>
+                      <a:r>
+                        <a:rPr lang="en-US" sz="1000" b="1" dirty="0">
+                          <a:solidFill>
+                            <a:srgbClr val="FFFFFF"/>
+                          </a:solidFill>
+                          <a:latin typeface="Trebuchet MS" pitchFamily="34" charset="0"/>
+                          <a:ea typeface="Trebuchet MS" pitchFamily="34" charset="-122"/>
+                          <a:cs typeface="Trebuchet MS" pitchFamily="34" charset="-120"/>
+                        </a:rPr>
+                        <a:t>prenom</a:t>
+                      </a:r>
+                      <a:endParaRPr lang="en-US" sz="1000" dirty="0">
+                        <a:latin typeface="Trebuchet MS" charset="0"/>
+                        <a:ea typeface="Trebuchet MS" charset="0"/>
+                        <a:cs typeface="Trebuchet MS" charset="0"/>
+                      </a:endParaRPr>
+                    </a:p>
+                  </a:txBody>
+                  <a:tcPr marL="91440" marR="91440" marT="45720" marB="45720">
+                    <a:lnL w="6350" cap="flat" cmpd="sng" algn="ctr">
+                      <a:solidFill>
+                        <a:srgbClr val="CCCCCC"/>
+                      </a:solidFill>
+                      <a:prstDash val="solid"/>
+                      <a:round/>
+                      <a:headEnd type="none" w="med" len="med"/>
+                      <a:tailEnd type="none" w="med" len="med"/>
+                    </a:lnL>
+                    <a:lnR w="6350" cap="flat" cmpd="sng" algn="ctr">
+                      <a:solidFill>
+                        <a:srgbClr val="CCCCCC"/>
+                      </a:solidFill>
+                      <a:prstDash val="solid"/>
+                      <a:round/>
+                      <a:headEnd type="none" w="med" len="med"/>
+                      <a:tailEnd type="none" w="med" len="med"/>
+                    </a:lnR>
+                    <a:lnT w="6350" cap="flat" cmpd="sng" algn="ctr">
+                      <a:solidFill>
+                        <a:srgbClr val="CCCCCC"/>
+                      </a:solidFill>
+                      <a:prstDash val="solid"/>
+                      <a:round/>
+                      <a:headEnd type="none" w="med" len="med"/>
+                      <a:tailEnd type="none" w="med" len="med"/>
+                    </a:lnT>
+                    <a:lnB w="6350" cap="flat" cmpd="sng" algn="ctr">
+                      <a:solidFill>
+                        <a:srgbClr val="CCCCCC"/>
+                      </a:solidFill>
+                      <a:prstDash val="solid"/>
+                      <a:round/>
+                      <a:headEnd type="none" w="med" len="med"/>
+                      <a:tailEnd type="none" w="med" len="med"/>
+                    </a:lnB>
+                    <a:solidFill>
+                      <a:srgbClr val="2E7D32"/>
+                    </a:solidFill>
+                  </a:tcPr>
+                </a:tc>
+                <a:tc>
+                  <a:txBody>
+                    <a:bodyPr/>
+                    <a:lstStyle/>
+                    <a:p>
+                      <a:pPr indent="0" marL="0">
+                        <a:buNone/>
+                      </a:pPr>
+                      <a:r>
+                        <a:rPr lang="en-US" sz="1000" b="1" dirty="0">
+                          <a:solidFill>
+                            <a:srgbClr val="FFFFFF"/>
+                          </a:solidFill>
+                          <a:latin typeface="Trebuchet MS" pitchFamily="34" charset="0"/>
+                          <a:ea typeface="Trebuchet MS" pitchFamily="34" charset="-122"/>
+                          <a:cs typeface="Trebuchet MS" pitchFamily="34" charset="-120"/>
+                        </a:rPr>
+                        <a:t>email</a:t>
+                      </a:r>
+                      <a:endParaRPr lang="en-US" sz="1000" dirty="0">
+                        <a:latin typeface="Trebuchet MS" charset="0"/>
+                        <a:ea typeface="Trebuchet MS" charset="0"/>
+                        <a:cs typeface="Trebuchet MS" charset="0"/>
+                      </a:endParaRPr>
+                    </a:p>
+                  </a:txBody>
+                  <a:tcPr marL="91440" marR="91440" marT="45720" marB="45720">
+                    <a:lnL w="6350" cap="flat" cmpd="sng" algn="ctr">
+                      <a:solidFill>
+                        <a:srgbClr val="CCCCCC"/>
+                      </a:solidFill>
+                      <a:prstDash val="solid"/>
+                      <a:round/>
+                      <a:headEnd type="none" w="med" len="med"/>
+                      <a:tailEnd type="none" w="med" len="med"/>
+                    </a:lnL>
+                    <a:lnR w="6350" cap="flat" cmpd="sng" algn="ctr">
+                      <a:solidFill>
+                        <a:srgbClr val="CCCCCC"/>
+                      </a:solidFill>
+                      <a:prstDash val="solid"/>
+                      <a:round/>
+                      <a:headEnd type="none" w="med" len="med"/>
+                      <a:tailEnd type="none" w="med" len="med"/>
+                    </a:lnR>
+                    <a:lnT w="6350" cap="flat" cmpd="sng" algn="ctr">
+                      <a:solidFill>
+                        <a:srgbClr val="CCCCCC"/>
+                      </a:solidFill>
+                      <a:prstDash val="solid"/>
+                      <a:round/>
+                      <a:headEnd type="none" w="med" len="med"/>
+                      <a:tailEnd type="none" w="med" len="med"/>
+                    </a:lnT>
+                    <a:lnB w="6350" cap="flat" cmpd="sng" algn="ctr">
+                      <a:solidFill>
+                        <a:srgbClr val="CCCCCC"/>
+                      </a:solidFill>
+                      <a:prstDash val="solid"/>
+                      <a:round/>
+                      <a:headEnd type="none" w="med" len="med"/>
+                      <a:tailEnd type="none" w="med" len="med"/>
+                    </a:lnB>
+                    <a:solidFill>
+                      <a:srgbClr val="2E7D32"/>
+                    </a:solidFill>
+                  </a:tcPr>
+                </a:tc>
+                <a:tc>
+                  <a:txBody>
+                    <a:bodyPr/>
+                    <a:lstStyle/>
+                    <a:p>
+                      <a:pPr indent="0" marL="0">
+                        <a:buNone/>
+                      </a:pPr>
+                      <a:r>
+                        <a:rPr lang="en-US" sz="1000" b="1" dirty="0">
+                          <a:solidFill>
+                            <a:srgbClr val="FFFFFF"/>
+                          </a:solidFill>
+                          <a:latin typeface="Trebuchet MS" pitchFamily="34" charset="0"/>
+                          <a:ea typeface="Trebuchet MS" pitchFamily="34" charset="-122"/>
+                          <a:cs typeface="Trebuchet MS" pitchFamily="34" charset="-120"/>
+                        </a:rPr>
+                        <a:t>id_alb</a:t>
+                      </a:r>
+                      <a:endParaRPr lang="en-US" sz="1000" dirty="0">
+                        <a:latin typeface="Trebuchet MS" charset="0"/>
+                        <a:ea typeface="Trebuchet MS" charset="0"/>
+                        <a:cs typeface="Trebuchet MS" charset="0"/>
+                      </a:endParaRPr>
+                    </a:p>
+                  </a:txBody>
+                  <a:tcPr marL="91440" marR="91440" marT="45720" marB="45720">
+                    <a:lnL w="6350" cap="flat" cmpd="sng" algn="ctr">
+                      <a:solidFill>
+                        <a:srgbClr val="CCCCCC"/>
+                      </a:solidFill>
+                      <a:prstDash val="solid"/>
+                      <a:round/>
+                      <a:headEnd type="none" w="med" len="med"/>
+                      <a:tailEnd type="none" w="med" len="med"/>
+                    </a:lnL>
+                    <a:lnR w="6350" cap="flat" cmpd="sng" algn="ctr">
+                      <a:solidFill>
+                        <a:srgbClr val="CCCCCC"/>
+                      </a:solidFill>
+                      <a:prstDash val="solid"/>
+                      <a:round/>
+                      <a:headEnd type="none" w="med" len="med"/>
+                      <a:tailEnd type="none" w="med" len="med"/>
+                    </a:lnR>
+                    <a:lnT w="6350" cap="flat" cmpd="sng" algn="ctr">
+                      <a:solidFill>
+                        <a:srgbClr val="CCCCCC"/>
+                      </a:solidFill>
+                      <a:prstDash val="solid"/>
+                      <a:round/>
+                      <a:headEnd type="none" w="med" len="med"/>
+                      <a:tailEnd type="none" w="med" len="med"/>
+                    </a:lnT>
+                    <a:lnB w="6350" cap="flat" cmpd="sng" algn="ctr">
+                      <a:solidFill>
+                        <a:srgbClr val="CCCCCC"/>
+                      </a:solidFill>
+                      <a:prstDash val="solid"/>
+                      <a:round/>
+                      <a:headEnd type="none" w="med" len="med"/>
+                      <a:tailEnd type="none" w="med" len="med"/>
+                    </a:lnB>
+                    <a:solidFill>
+                      <a:srgbClr val="2E7D32"/>
+                    </a:solidFill>
+                  </a:tcPr>
+                </a:tc>
+                <a:tc>
+                  <a:txBody>
+                    <a:bodyPr/>
+                    <a:lstStyle/>
+                    <a:p>
+                      <a:pPr indent="0" marL="0">
+                        <a:buNone/>
+                      </a:pPr>
+                      <a:r>
+                        <a:rPr lang="en-US" sz="1000" b="1" dirty="0">
+                          <a:solidFill>
+                            <a:srgbClr val="FFFFFF"/>
+                          </a:solidFill>
+                          <a:latin typeface="Trebuchet MS" pitchFamily="34" charset="0"/>
+                          <a:ea typeface="Trebuchet MS" pitchFamily="34" charset="-122"/>
+                          <a:cs typeface="Trebuchet MS" pitchFamily="34" charset="-120"/>
+                        </a:rPr>
+                        <a:t>titre</a:t>
+                      </a:r>
+                      <a:endParaRPr lang="en-US" sz="1000" dirty="0">
+                        <a:latin typeface="Trebuchet MS" charset="0"/>
+                        <a:ea typeface="Trebuchet MS" charset="0"/>
+                        <a:cs typeface="Trebuchet MS" charset="0"/>
+                      </a:endParaRPr>
+                    </a:p>
+                  </a:txBody>
+                  <a:tcPr marL="91440" marR="91440" marT="45720" marB="45720">
+                    <a:lnL w="6350" cap="flat" cmpd="sng" algn="ctr">
+                      <a:solidFill>
+                        <a:srgbClr val="CCCCCC"/>
+                      </a:solidFill>
+                      <a:prstDash val="solid"/>
+                      <a:round/>
+                      <a:headEnd type="none" w="med" len="med"/>
+                      <a:tailEnd type="none" w="med" len="med"/>
+                    </a:lnL>
+                    <a:lnR w="6350" cap="flat" cmpd="sng" algn="ctr">
+                      <a:solidFill>
+                        <a:srgbClr val="CCCCCC"/>
+                      </a:solidFill>
+                      <a:prstDash val="solid"/>
+                      <a:round/>
+                      <a:headEnd type="none" w="med" len="med"/>
+                      <a:tailEnd type="none" w="med" len="med"/>
+                    </a:lnR>
+                    <a:lnT w="6350" cap="flat" cmpd="sng" algn="ctr">
+                      <a:solidFill>
+                        <a:srgbClr val="CCCCCC"/>
+                      </a:solidFill>
+                      <a:prstDash val="solid"/>
+                      <a:round/>
+                      <a:headEnd type="none" w="med" len="med"/>
+                      <a:tailEnd type="none" w="med" len="med"/>
+                    </a:lnT>
+                    <a:lnB w="6350" cap="flat" cmpd="sng" algn="ctr">
+                      <a:solidFill>
+                        <a:srgbClr val="CCCCCC"/>
+                      </a:solidFill>
+                      <a:prstDash val="solid"/>
+                      <a:round/>
+                      <a:headEnd type="none" w="med" len="med"/>
+                      <a:tailEnd type="none" w="med" len="med"/>
+                    </a:lnB>
+                    <a:solidFill>
+                      <a:srgbClr val="2E7D32"/>
+                    </a:solidFill>
+                  </a:tcPr>
+                </a:tc>
+                <a:tc>
+                  <a:txBody>
+                    <a:bodyPr/>
+                    <a:lstStyle/>
+                    <a:p>
+                      <a:pPr indent="0" marL="0">
+                        <a:buNone/>
+                      </a:pPr>
+                      <a:r>
+                        <a:rPr lang="en-US" sz="1000" b="1" dirty="0">
+                          <a:solidFill>
+                            <a:srgbClr val="FFFFFF"/>
+                          </a:solidFill>
+                          <a:latin typeface="Trebuchet MS" pitchFamily="34" charset="0"/>
+                          <a:ea typeface="Trebuchet MS" pitchFamily="34" charset="-122"/>
+                          <a:cs typeface="Trebuchet MS" pitchFamily="34" charset="-120"/>
+                        </a:rPr>
+                        <a:t>id_sal</a:t>
+                      </a:r>
+                      <a:endParaRPr lang="en-US" sz="1000" dirty="0">
+                        <a:latin typeface="Trebuchet MS" charset="0"/>
+                        <a:ea typeface="Trebuchet MS" charset="0"/>
+                        <a:cs typeface="Trebuchet MS" charset="0"/>
+                      </a:endParaRPr>
+                    </a:p>
+                  </a:txBody>
+                  <a:tcPr marL="91440" marR="91440" marT="45720" marB="45720">
+                    <a:lnL w="6350" cap="flat" cmpd="sng" algn="ctr">
+                      <a:solidFill>
+                        <a:srgbClr val="CCCCCC"/>
+                      </a:solidFill>
+                      <a:prstDash val="solid"/>
+                      <a:round/>
+                      <a:headEnd type="none" w="med" len="med"/>
+                      <a:tailEnd type="none" w="med" len="med"/>
+                    </a:lnL>
+                    <a:lnR w="6350" cap="flat" cmpd="sng" algn="ctr">
+                      <a:solidFill>
+                        <a:srgbClr val="CCCCCC"/>
+                      </a:solidFill>
+                      <a:prstDash val="solid"/>
+                      <a:round/>
+                      <a:headEnd type="none" w="med" len="med"/>
+                      <a:tailEnd type="none" w="med" len="med"/>
+                    </a:lnR>
+                    <a:lnT w="6350" cap="flat" cmpd="sng" algn="ctr">
+                      <a:solidFill>
+                        <a:srgbClr val="CCCCCC"/>
+                      </a:solidFill>
+                      <a:prstDash val="solid"/>
+                      <a:round/>
+                      <a:headEnd type="none" w="med" len="med"/>
+                      <a:tailEnd type="none" w="med" len="med"/>
+                    </a:lnT>
+                    <a:lnB w="6350" cap="flat" cmpd="sng" algn="ctr">
+                      <a:solidFill>
+                        <a:srgbClr val="CCCCCC"/>
+                      </a:solidFill>
+                      <a:prstDash val="solid"/>
+                      <a:round/>
+                      <a:headEnd type="none" w="med" len="med"/>
+                      <a:tailEnd type="none" w="med" len="med"/>
+                    </a:lnB>
+                    <a:solidFill>
+                      <a:srgbClr val="2E7D32"/>
+                    </a:solidFill>
+                  </a:tcPr>
+                </a:tc>
+                <a:tc>
+                  <a:txBody>
+                    <a:bodyPr/>
+                    <a:lstStyle/>
+                    <a:p>
+                      <a:pPr indent="0" marL="0">
+                        <a:buNone/>
+                      </a:pPr>
+                      <a:r>
+                        <a:rPr lang="en-US" sz="1000" b="1" dirty="0">
+                          <a:solidFill>
+                            <a:srgbClr val="FFFFFF"/>
+                          </a:solidFill>
+                          <a:latin typeface="Trebuchet MS" pitchFamily="34" charset="0"/>
+                          <a:ea typeface="Trebuchet MS" pitchFamily="34" charset="-122"/>
+                          <a:cs typeface="Trebuchet MS" pitchFamily="34" charset="-120"/>
+                        </a:rPr>
+                        <a:t>nom_sal</a:t>
+                      </a:r>
+                      <a:endParaRPr lang="en-US" sz="1000" dirty="0">
+                        <a:latin typeface="Trebuchet MS" charset="0"/>
+                        <a:ea typeface="Trebuchet MS" charset="0"/>
+                        <a:cs typeface="Trebuchet MS" charset="0"/>
+                      </a:endParaRPr>
+                    </a:p>
+                  </a:txBody>
+                  <a:tcPr marL="91440" marR="91440" marT="45720" marB="45720">
+                    <a:lnL w="6350" cap="flat" cmpd="sng" algn="ctr">
+                      <a:solidFill>
+                        <a:srgbClr val="CCCCCC"/>
+                      </a:solidFill>
+                      <a:prstDash val="solid"/>
+                      <a:round/>
+                      <a:headEnd type="none" w="med" len="med"/>
+                      <a:tailEnd type="none" w="med" len="med"/>
+                    </a:lnL>
+                    <a:lnR w="6350" cap="flat" cmpd="sng" algn="ctr">
+                      <a:solidFill>
+                        <a:srgbClr val="CCCCCC"/>
+                      </a:solidFill>
+                      <a:prstDash val="solid"/>
+                      <a:round/>
+                      <a:headEnd type="none" w="med" len="med"/>
+                      <a:tailEnd type="none" w="med" len="med"/>
+                    </a:lnR>
+                    <a:lnT w="6350" cap="flat" cmpd="sng" algn="ctr">
+                      <a:solidFill>
+                        <a:srgbClr val="CCCCCC"/>
+                      </a:solidFill>
+                      <a:prstDash val="solid"/>
+                      <a:round/>
+                      <a:headEnd type="none" w="med" len="med"/>
+                      <a:tailEnd type="none" w="med" len="med"/>
+                    </a:lnT>
+                    <a:lnB w="6350" cap="flat" cmpd="sng" algn="ctr">
+                      <a:solidFill>
+                        <a:srgbClr val="CCCCCC"/>
+                      </a:solidFill>
+                      <a:prstDash val="solid"/>
+                      <a:round/>
+                      <a:headEnd type="none" w="med" len="med"/>
+                      <a:tailEnd type="none" w="med" len="med"/>
+                    </a:lnB>
+                    <a:solidFill>
+                      <a:srgbClr val="2E7D32"/>
+                    </a:solidFill>
+                  </a:tcPr>
+                </a:tc>
+              </a:tr>
+              <a:tr h="0">
+                <a:tc>
+                  <a:txBody>
+                    <a:bodyPr/>
+                    <a:lstStyle/>
+                    <a:p>
+                      <a:pPr indent="0" marL="0">
+                        <a:buNone/>
+                      </a:pPr>
+                      <a:r>
+                        <a:rPr lang="en-US" sz="900" dirty="0">
+                          <a:solidFill>
+                            <a:srgbClr val="000000"/>
+                          </a:solidFill>
+                          <a:latin typeface="Calibri" pitchFamily="34" charset="0"/>
+                          <a:ea typeface="Calibri" pitchFamily="34" charset="-122"/>
+                          <a:cs typeface="Calibri" pitchFamily="34" charset="-120"/>
+                        </a:rPr>
+                        <a:t>id_artiste</a:t>
+                      </a:r>
+                      <a:endParaRPr lang="en-US" sz="900" dirty="0">
+                        <a:latin typeface="Calibri" charset="0"/>
+                        <a:ea typeface="Calibri" charset="0"/>
+                        <a:cs typeface="Calibri" charset="0"/>
+                      </a:endParaRPr>
+                    </a:p>
+                  </a:txBody>
+                  <a:tcPr marL="91440" marR="91440" marT="45720" marB="45720">
+                    <a:lnL w="6350" cap="flat" cmpd="sng" algn="ctr">
+                      <a:solidFill>
+                        <a:srgbClr val="CCCCCC"/>
+                      </a:solidFill>
+                      <a:prstDash val="solid"/>
+                      <a:round/>
+                      <a:headEnd type="none" w="med" len="med"/>
+                      <a:tailEnd type="none" w="med" len="med"/>
+                    </a:lnL>
+                    <a:lnR w="6350" cap="flat" cmpd="sng" algn="ctr">
+                      <a:solidFill>
+                        <a:srgbClr val="CCCCCC"/>
+                      </a:solidFill>
+                      <a:prstDash val="solid"/>
+                      <a:round/>
+                      <a:headEnd type="none" w="med" len="med"/>
+                      <a:tailEnd type="none" w="med" len="med"/>
+                    </a:lnR>
+                    <a:lnT w="6350" cap="flat" cmpd="sng" algn="ctr">
+                      <a:solidFill>
+                        <a:srgbClr val="CCCCCC"/>
+                      </a:solidFill>
+                      <a:prstDash val="solid"/>
+                      <a:round/>
+                      <a:headEnd type="none" w="med" len="med"/>
+                      <a:tailEnd type="none" w="med" len="med"/>
+                    </a:lnT>
+                    <a:lnB w="6350" cap="flat" cmpd="sng" algn="ctr">
+                      <a:solidFill>
+                        <a:srgbClr val="CCCCCC"/>
+                      </a:solidFill>
+                      <a:prstDash val="solid"/>
+                      <a:round/>
+                      <a:headEnd type="none" w="med" len="med"/>
+                      <a:tailEnd type="none" w="med" len="med"/>
+                    </a:lnB>
+                    <a:solidFill>
+                      <a:srgbClr val="FFFFFF"/>
+                    </a:solidFill>
+                  </a:tcPr>
+                </a:tc>
+                <a:tc>
+                  <a:txBody>
+                    <a:bodyPr/>
+                    <a:lstStyle/>
+                    <a:p>
+                      <a:pPr indent="0" marL="0">
+                        <a:buNone/>
+                      </a:pPr>
+                      <a:r>
+                        <a:rPr lang="en-US" sz="900" dirty="0">
+                          <a:solidFill>
+                            <a:srgbClr val="000000"/>
+                          </a:solidFill>
+                          <a:latin typeface="Calibri" pitchFamily="34" charset="0"/>
+                          <a:ea typeface="Calibri" pitchFamily="34" charset="-122"/>
+                          <a:cs typeface="Calibri" pitchFamily="34" charset="-120"/>
+                        </a:rPr>
+                        <a:t>—</a:t>
+                      </a:r>
+                      <a:endParaRPr lang="en-US" sz="900" dirty="0">
+                        <a:latin typeface="Calibri" charset="0"/>
+                        <a:ea typeface="Calibri" charset="0"/>
+                        <a:cs typeface="Calibri" charset="0"/>
+                      </a:endParaRPr>
+                    </a:p>
+                  </a:txBody>
+                  <a:tcPr marL="91440" marR="91440" marT="45720" marB="45720">
+                    <a:lnL w="6350" cap="flat" cmpd="sng" algn="ctr">
+                      <a:solidFill>
+                        <a:srgbClr val="CCCCCC"/>
+                      </a:solidFill>
+                      <a:prstDash val="solid"/>
+                      <a:round/>
+                      <a:headEnd type="none" w="med" len="med"/>
+                      <a:tailEnd type="none" w="med" len="med"/>
+                    </a:lnL>
+                    <a:lnR w="6350" cap="flat" cmpd="sng" algn="ctr">
+                      <a:solidFill>
+                        <a:srgbClr val="CCCCCC"/>
+                      </a:solidFill>
+                      <a:prstDash val="solid"/>
+                      <a:round/>
+                      <a:headEnd type="none" w="med" len="med"/>
+                      <a:tailEnd type="none" w="med" len="med"/>
+                    </a:lnR>
+                    <a:lnT w="6350" cap="flat" cmpd="sng" algn="ctr">
+                      <a:solidFill>
+                        <a:srgbClr val="CCCCCC"/>
+                      </a:solidFill>
+                      <a:prstDash val="solid"/>
+                      <a:round/>
+                      <a:headEnd type="none" w="med" len="med"/>
+                      <a:tailEnd type="none" w="med" len="med"/>
+                    </a:lnT>
+                    <a:lnB w="6350" cap="flat" cmpd="sng" algn="ctr">
+                      <a:solidFill>
+                        <a:srgbClr val="CCCCCC"/>
+                      </a:solidFill>
+                      <a:prstDash val="solid"/>
+                      <a:round/>
+                      <a:headEnd type="none" w="med" len="med"/>
+                      <a:tailEnd type="none" w="med" len="med"/>
+                    </a:lnB>
+                    <a:solidFill>
+                      <a:srgbClr val="FFFFFF"/>
+                    </a:solidFill>
+                  </a:tcPr>
+                </a:tc>
+                <a:tc>
+                  <a:txBody>
+                    <a:bodyPr/>
+                    <a:lstStyle/>
+                    <a:p>
+                      <a:pPr indent="0" marL="0">
+                        <a:buNone/>
+                      </a:pPr>
+                      <a:r>
+                        <a:rPr lang="en-US" sz="900" dirty="0">
+                          <a:solidFill>
+                            <a:srgbClr val="000000"/>
+                          </a:solidFill>
+                          <a:latin typeface="Calibri" pitchFamily="34" charset="0"/>
+                          <a:ea typeface="Calibri" pitchFamily="34" charset="-122"/>
+                          <a:cs typeface="Calibri" pitchFamily="34" charset="-120"/>
+                        </a:rPr>
+                        <a:t>1</a:t>
+                      </a:r>
+                      <a:endParaRPr lang="en-US" sz="900" dirty="0">
+                        <a:latin typeface="Calibri" charset="0"/>
+                        <a:ea typeface="Calibri" charset="0"/>
+                        <a:cs typeface="Calibri" charset="0"/>
+                      </a:endParaRPr>
+                    </a:p>
+                  </a:txBody>
+                  <a:tcPr marL="91440" marR="91440" marT="45720" marB="45720">
+                    <a:lnL w="6350" cap="flat" cmpd="sng" algn="ctr">
+                      <a:solidFill>
+                        <a:srgbClr val="CCCCCC"/>
+                      </a:solidFill>
+                      <a:prstDash val="solid"/>
+                      <a:round/>
+                      <a:headEnd type="none" w="med" len="med"/>
+                      <a:tailEnd type="none" w="med" len="med"/>
+                    </a:lnL>
+                    <a:lnR w="6350" cap="flat" cmpd="sng" algn="ctr">
+                      <a:solidFill>
+                        <a:srgbClr val="CCCCCC"/>
+                      </a:solidFill>
+                      <a:prstDash val="solid"/>
+                      <a:round/>
+                      <a:headEnd type="none" w="med" len="med"/>
+                      <a:tailEnd type="none" w="med" len="med"/>
+                    </a:lnR>
+                    <a:lnT w="6350" cap="flat" cmpd="sng" algn="ctr">
+                      <a:solidFill>
+                        <a:srgbClr val="CCCCCC"/>
+                      </a:solidFill>
+                      <a:prstDash val="solid"/>
+                      <a:round/>
+                      <a:headEnd type="none" w="med" len="med"/>
+                      <a:tailEnd type="none" w="med" len="med"/>
+                    </a:lnT>
+                    <a:lnB w="6350" cap="flat" cmpd="sng" algn="ctr">
+                      <a:solidFill>
+                        <a:srgbClr val="CCCCCC"/>
+                      </a:solidFill>
+                      <a:prstDash val="solid"/>
+                      <a:round/>
+                      <a:headEnd type="none" w="med" len="med"/>
+                      <a:tailEnd type="none" w="med" len="med"/>
+                    </a:lnB>
+                    <a:solidFill>
+                      <a:srgbClr val="FFFFFF"/>
+                    </a:solidFill>
+                  </a:tcPr>
+                </a:tc>
+                <a:tc>
+                  <a:txBody>
+                    <a:bodyPr/>
+                    <a:lstStyle/>
+                    <a:p>
+                      <a:pPr indent="0" marL="0">
+                        <a:buNone/>
+                      </a:pPr>
+                      <a:r>
+                        <a:rPr lang="en-US" sz="900" dirty="0">
+                          <a:solidFill>
+                            <a:srgbClr val="000000"/>
+                          </a:solidFill>
+                          <a:latin typeface="Calibri" pitchFamily="34" charset="0"/>
+                          <a:ea typeface="Calibri" pitchFamily="34" charset="-122"/>
+                          <a:cs typeface="Calibri" pitchFamily="34" charset="-120"/>
+                        </a:rPr>
+                        <a:t>1</a:t>
+                      </a:r>
+                      <a:endParaRPr lang="en-US" sz="900" dirty="0">
+                        <a:latin typeface="Calibri" charset="0"/>
+                        <a:ea typeface="Calibri" charset="0"/>
+                        <a:cs typeface="Calibri" charset="0"/>
+                      </a:endParaRPr>
+                    </a:p>
+                  </a:txBody>
+                  <a:tcPr marL="91440" marR="91440" marT="45720" marB="45720">
+                    <a:lnL w="6350" cap="flat" cmpd="sng" algn="ctr">
+                      <a:solidFill>
+                        <a:srgbClr val="CCCCCC"/>
+                      </a:solidFill>
+                      <a:prstDash val="solid"/>
+                      <a:round/>
+                      <a:headEnd type="none" w="med" len="med"/>
+                      <a:tailEnd type="none" w="med" len="med"/>
+                    </a:lnL>
+                    <a:lnR w="6350" cap="flat" cmpd="sng" algn="ctr">
+                      <a:solidFill>
+                        <a:srgbClr val="CCCCCC"/>
+                      </a:solidFill>
+                      <a:prstDash val="solid"/>
+                      <a:round/>
+                      <a:headEnd type="none" w="med" len="med"/>
+                      <a:tailEnd type="none" w="med" len="med"/>
+                    </a:lnR>
+                    <a:lnT w="6350" cap="flat" cmpd="sng" algn="ctr">
+                      <a:solidFill>
+                        <a:srgbClr val="CCCCCC"/>
+                      </a:solidFill>
+                      <a:prstDash val="solid"/>
+                      <a:round/>
+                      <a:headEnd type="none" w="med" len="med"/>
+                      <a:tailEnd type="none" w="med" len="med"/>
+                    </a:lnT>
+                    <a:lnB w="6350" cap="flat" cmpd="sng" algn="ctr">
+                      <a:solidFill>
+                        <a:srgbClr val="CCCCCC"/>
+                      </a:solidFill>
+                      <a:prstDash val="solid"/>
+                      <a:round/>
+                      <a:headEnd type="none" w="med" len="med"/>
+                      <a:tailEnd type="none" w="med" len="med"/>
+                    </a:lnB>
+                    <a:solidFill>
+                      <a:srgbClr val="FFFFFF"/>
+                    </a:solidFill>
+                  </a:tcPr>
+                </a:tc>
+                <a:tc>
+                  <a:txBody>
+                    <a:bodyPr/>
+                    <a:lstStyle/>
+                    <a:p>
+                      <a:pPr indent="0" marL="0">
+                        <a:buNone/>
+                      </a:pPr>
+                      <a:r>
+                        <a:rPr lang="en-US" sz="900" dirty="0">
+                          <a:solidFill>
+                            <a:srgbClr val="000000"/>
+                          </a:solidFill>
+                          <a:latin typeface="Calibri" pitchFamily="34" charset="0"/>
+                          <a:ea typeface="Calibri" pitchFamily="34" charset="-122"/>
+                          <a:cs typeface="Calibri" pitchFamily="34" charset="-120"/>
+                        </a:rPr>
+                        <a:t>1</a:t>
+                      </a:r>
+                      <a:endParaRPr lang="en-US" sz="900" dirty="0">
+                        <a:latin typeface="Calibri" charset="0"/>
+                        <a:ea typeface="Calibri" charset="0"/>
+                        <a:cs typeface="Calibri" charset="0"/>
+                      </a:endParaRPr>
+                    </a:p>
+                  </a:txBody>
+                  <a:tcPr marL="91440" marR="91440" marT="45720" marB="45720">
+                    <a:lnL w="6350" cap="flat" cmpd="sng" algn="ctr">
+                      <a:solidFill>
+                        <a:srgbClr val="CCCCCC"/>
+                      </a:solidFill>
+                      <a:prstDash val="solid"/>
+                      <a:round/>
+                      <a:headEnd type="none" w="med" len="med"/>
+                      <a:tailEnd type="none" w="med" len="med"/>
+                    </a:lnL>
+                    <a:lnR w="6350" cap="flat" cmpd="sng" algn="ctr">
+                      <a:solidFill>
+                        <a:srgbClr val="CCCCCC"/>
+                      </a:solidFill>
+                      <a:prstDash val="solid"/>
+                      <a:round/>
+                      <a:headEnd type="none" w="med" len="med"/>
+                      <a:tailEnd type="none" w="med" len="med"/>
+                    </a:lnR>
+                    <a:lnT w="6350" cap="flat" cmpd="sng" algn="ctr">
+                      <a:solidFill>
+                        <a:srgbClr val="CCCCCC"/>
+                      </a:solidFill>
+                      <a:prstDash val="solid"/>
+                      <a:round/>
+                      <a:headEnd type="none" w="med" len="med"/>
+                      <a:tailEnd type="none" w="med" len="med"/>
+                    </a:lnT>
+                    <a:lnB w="6350" cap="flat" cmpd="sng" algn="ctr">
+                      <a:solidFill>
+                        <a:srgbClr val="CCCCCC"/>
+                      </a:solidFill>
+                      <a:prstDash val="solid"/>
+                      <a:round/>
+                      <a:headEnd type="none" w="med" len="med"/>
+                      <a:tailEnd type="none" w="med" len="med"/>
+                    </a:lnB>
+                    <a:solidFill>
+                      <a:srgbClr val="FFFFFF"/>
+                    </a:solidFill>
+                  </a:tcPr>
+                </a:tc>
+                <a:tc>
+                  <a:txBody>
+                    <a:bodyPr/>
+                    <a:lstStyle/>
+                    <a:p>
+                      <a:pPr indent="0" marL="0">
+                        <a:buNone/>
+                      </a:pPr>
+                      <a:r>
+                        <a:rPr lang="en-US" sz="900" dirty="0">
+                          <a:solidFill>
+                            <a:srgbClr val="000000"/>
+                          </a:solidFill>
+                          <a:latin typeface="Calibri" pitchFamily="34" charset="0"/>
+                          <a:ea typeface="Calibri" pitchFamily="34" charset="-122"/>
+                          <a:cs typeface="Calibri" pitchFamily="34" charset="-120"/>
+                        </a:rPr>
+                        <a:t>0</a:t>
+                      </a:r>
+                      <a:endParaRPr lang="en-US" sz="900" dirty="0">
+                        <a:latin typeface="Calibri" charset="0"/>
+                        <a:ea typeface="Calibri" charset="0"/>
+                        <a:cs typeface="Calibri" charset="0"/>
+                      </a:endParaRPr>
+                    </a:p>
+                  </a:txBody>
+                  <a:tcPr marL="91440" marR="91440" marT="45720" marB="45720">
+                    <a:lnL w="6350" cap="flat" cmpd="sng" algn="ctr">
+                      <a:solidFill>
+                        <a:srgbClr val="CCCCCC"/>
+                      </a:solidFill>
+                      <a:prstDash val="solid"/>
+                      <a:round/>
+                      <a:headEnd type="none" w="med" len="med"/>
+                      <a:tailEnd type="none" w="med" len="med"/>
+                    </a:lnL>
+                    <a:lnR w="6350" cap="flat" cmpd="sng" algn="ctr">
+                      <a:solidFill>
+                        <a:srgbClr val="CCCCCC"/>
+                      </a:solidFill>
+                      <a:prstDash val="solid"/>
+                      <a:round/>
+                      <a:headEnd type="none" w="med" len="med"/>
+                      <a:tailEnd type="none" w="med" len="med"/>
+                    </a:lnR>
+                    <a:lnT w="6350" cap="flat" cmpd="sng" algn="ctr">
+                      <a:solidFill>
+                        <a:srgbClr val="CCCCCC"/>
+                      </a:solidFill>
+                      <a:prstDash val="solid"/>
+                      <a:round/>
+                      <a:headEnd type="none" w="med" len="med"/>
+                      <a:tailEnd type="none" w="med" len="med"/>
+                    </a:lnT>
+                    <a:lnB w="6350" cap="flat" cmpd="sng" algn="ctr">
+                      <a:solidFill>
+                        <a:srgbClr val="CCCCCC"/>
+                      </a:solidFill>
+                      <a:prstDash val="solid"/>
+                      <a:round/>
+                      <a:headEnd type="none" w="med" len="med"/>
+                      <a:tailEnd type="none" w="med" len="med"/>
+                    </a:lnB>
+                    <a:solidFill>
+                      <a:srgbClr val="FFFFFF"/>
+                    </a:solidFill>
+                  </a:tcPr>
+                </a:tc>
+                <a:tc>
+                  <a:txBody>
+                    <a:bodyPr/>
+                    <a:lstStyle/>
+                    <a:p>
+                      <a:pPr indent="0" marL="0">
+                        <a:buNone/>
+                      </a:pPr>
+                      <a:r>
+                        <a:rPr lang="en-US" sz="900" dirty="0">
+                          <a:solidFill>
+                            <a:srgbClr val="000000"/>
+                          </a:solidFill>
+                          <a:latin typeface="Calibri" pitchFamily="34" charset="0"/>
+                          <a:ea typeface="Calibri" pitchFamily="34" charset="-122"/>
+                          <a:cs typeface="Calibri" pitchFamily="34" charset="-120"/>
+                        </a:rPr>
+                        <a:t>0</a:t>
+                      </a:r>
+                      <a:endParaRPr lang="en-US" sz="900" dirty="0">
+                        <a:latin typeface="Calibri" charset="0"/>
+                        <a:ea typeface="Calibri" charset="0"/>
+                        <a:cs typeface="Calibri" charset="0"/>
+                      </a:endParaRPr>
+                    </a:p>
+                  </a:txBody>
+                  <a:tcPr marL="91440" marR="91440" marT="45720" marB="45720">
+                    <a:lnL w="6350" cap="flat" cmpd="sng" algn="ctr">
+                      <a:solidFill>
+                        <a:srgbClr val="CCCCCC"/>
+                      </a:solidFill>
+                      <a:prstDash val="solid"/>
+                      <a:round/>
+                      <a:headEnd type="none" w="med" len="med"/>
+                      <a:tailEnd type="none" w="med" len="med"/>
+                    </a:lnL>
+                    <a:lnR w="6350" cap="flat" cmpd="sng" algn="ctr">
+                      <a:solidFill>
+                        <a:srgbClr val="CCCCCC"/>
+                      </a:solidFill>
+                      <a:prstDash val="solid"/>
+                      <a:round/>
+                      <a:headEnd type="none" w="med" len="med"/>
+                      <a:tailEnd type="none" w="med" len="med"/>
+                    </a:lnR>
+                    <a:lnT w="6350" cap="flat" cmpd="sng" algn="ctr">
+                      <a:solidFill>
+                        <a:srgbClr val="CCCCCC"/>
+                      </a:solidFill>
+                      <a:prstDash val="solid"/>
+                      <a:round/>
+                      <a:headEnd type="none" w="med" len="med"/>
+                      <a:tailEnd type="none" w="med" len="med"/>
+                    </a:lnT>
+                    <a:lnB w="6350" cap="flat" cmpd="sng" algn="ctr">
+                      <a:solidFill>
+                        <a:srgbClr val="CCCCCC"/>
+                      </a:solidFill>
+                      <a:prstDash val="solid"/>
+                      <a:round/>
+                      <a:headEnd type="none" w="med" len="med"/>
+                      <a:tailEnd type="none" w="med" len="med"/>
+                    </a:lnB>
+                    <a:solidFill>
+                      <a:srgbClr val="FFFFFF"/>
+                    </a:solidFill>
+                  </a:tcPr>
+                </a:tc>
+                <a:tc>
+                  <a:txBody>
+                    <a:bodyPr/>
+                    <a:lstStyle/>
+                    <a:p>
+                      <a:pPr indent="0" marL="0">
+                        <a:buNone/>
+                      </a:pPr>
+                      <a:r>
+                        <a:rPr lang="en-US" sz="900" dirty="0">
+                          <a:solidFill>
+                            <a:srgbClr val="000000"/>
+                          </a:solidFill>
+                          <a:latin typeface="Calibri" pitchFamily="34" charset="0"/>
+                          <a:ea typeface="Calibri" pitchFamily="34" charset="-122"/>
+                          <a:cs typeface="Calibri" pitchFamily="34" charset="-120"/>
+                        </a:rPr>
+                        <a:t>0</a:t>
+                      </a:r>
+                      <a:endParaRPr lang="en-US" sz="900" dirty="0">
+                        <a:latin typeface="Calibri" charset="0"/>
+                        <a:ea typeface="Calibri" charset="0"/>
+                        <a:cs typeface="Calibri" charset="0"/>
+                      </a:endParaRPr>
+                    </a:p>
+                  </a:txBody>
+                  <a:tcPr marL="91440" marR="91440" marT="45720" marB="45720">
+                    <a:lnL w="6350" cap="flat" cmpd="sng" algn="ctr">
+                      <a:solidFill>
+                        <a:srgbClr val="CCCCCC"/>
+                      </a:solidFill>
+                      <a:prstDash val="solid"/>
+                      <a:round/>
+                      <a:headEnd type="none" w="med" len="med"/>
+                      <a:tailEnd type="none" w="med" len="med"/>
+                    </a:lnL>
+                    <a:lnR w="6350" cap="flat" cmpd="sng" algn="ctr">
+                      <a:solidFill>
+                        <a:srgbClr val="CCCCCC"/>
+                      </a:solidFill>
+                      <a:prstDash val="solid"/>
+                      <a:round/>
+                      <a:headEnd type="none" w="med" len="med"/>
+                      <a:tailEnd type="none" w="med" len="med"/>
+                    </a:lnR>
+                    <a:lnT w="6350" cap="flat" cmpd="sng" algn="ctr">
+                      <a:solidFill>
+                        <a:srgbClr val="CCCCCC"/>
+                      </a:solidFill>
+                      <a:prstDash val="solid"/>
+                      <a:round/>
+                      <a:headEnd type="none" w="med" len="med"/>
+                      <a:tailEnd type="none" w="med" len="med"/>
+                    </a:lnT>
+                    <a:lnB w="6350" cap="flat" cmpd="sng" algn="ctr">
+                      <a:solidFill>
+                        <a:srgbClr val="CCCCCC"/>
+                      </a:solidFill>
+                      <a:prstDash val="solid"/>
+                      <a:round/>
+                      <a:headEnd type="none" w="med" len="med"/>
+                      <a:tailEnd type="none" w="med" len="med"/>
+                    </a:lnB>
+                    <a:solidFill>
+                      <a:srgbClr val="FFFFFF"/>
+                    </a:solidFill>
+                  </a:tcPr>
+                </a:tc>
+                <a:tc>
+                  <a:txBody>
+                    <a:bodyPr/>
+                    <a:lstStyle/>
+                    <a:p>
+                      <a:pPr indent="0" marL="0">
+                        <a:buNone/>
+                      </a:pPr>
+                      <a:r>
+                        <a:rPr lang="en-US" sz="900" dirty="0">
+                          <a:solidFill>
+                            <a:srgbClr val="000000"/>
+                          </a:solidFill>
+                          <a:latin typeface="Calibri" pitchFamily="34" charset="0"/>
+                          <a:ea typeface="Calibri" pitchFamily="34" charset="-122"/>
+                          <a:cs typeface="Calibri" pitchFamily="34" charset="-120"/>
+                        </a:rPr>
+                        <a:t>0</a:t>
+                      </a:r>
+                      <a:endParaRPr lang="en-US" sz="900" dirty="0">
+                        <a:latin typeface="Calibri" charset="0"/>
+                        <a:ea typeface="Calibri" charset="0"/>
+                        <a:cs typeface="Calibri" charset="0"/>
+                      </a:endParaRPr>
+                    </a:p>
+                  </a:txBody>
+                  <a:tcPr marL="91440" marR="91440" marT="45720" marB="45720">
+                    <a:lnL w="6350" cap="flat" cmpd="sng" algn="ctr">
+                      <a:solidFill>
+                        <a:srgbClr val="CCCCCC"/>
+                      </a:solidFill>
+                      <a:prstDash val="solid"/>
+                      <a:round/>
+                      <a:headEnd type="none" w="med" len="med"/>
+                      <a:tailEnd type="none" w="med" len="med"/>
+                    </a:lnL>
+                    <a:lnR w="6350" cap="flat" cmpd="sng" algn="ctr">
+                      <a:solidFill>
+                        <a:srgbClr val="CCCCCC"/>
+                      </a:solidFill>
+                      <a:prstDash val="solid"/>
+                      <a:round/>
+                      <a:headEnd type="none" w="med" len="med"/>
+                      <a:tailEnd type="none" w="med" len="med"/>
+                    </a:lnR>
+                    <a:lnT w="6350" cap="flat" cmpd="sng" algn="ctr">
+                      <a:solidFill>
+                        <a:srgbClr val="CCCCCC"/>
+                      </a:solidFill>
+                      <a:prstDash val="solid"/>
+                      <a:round/>
+                      <a:headEnd type="none" w="med" len="med"/>
+                      <a:tailEnd type="none" w="med" len="med"/>
+                    </a:lnT>
+                    <a:lnB w="6350" cap="flat" cmpd="sng" algn="ctr">
+                      <a:solidFill>
+                        <a:srgbClr val="CCCCCC"/>
+                      </a:solidFill>
+                      <a:prstDash val="solid"/>
+                      <a:round/>
+                      <a:headEnd type="none" w="med" len="med"/>
+                      <a:tailEnd type="none" w="med" len="med"/>
+                    </a:lnB>
+                    <a:solidFill>
+                      <a:srgbClr val="FFFFFF"/>
+                    </a:solidFill>
+                  </a:tcPr>
+                </a:tc>
+              </a:tr>
+              <a:tr h="0">
+                <a:tc>
+                  <a:txBody>
+                    <a:bodyPr/>
+                    <a:lstStyle/>
+                    <a:p>
+                      <a:pPr indent="0" marL="0">
+                        <a:buNone/>
+                      </a:pPr>
+                      <a:r>
+                        <a:rPr lang="en-US" sz="900" dirty="0">
+                          <a:solidFill>
+                            <a:srgbClr val="000000"/>
+                          </a:solidFill>
+                          <a:latin typeface="Calibri" pitchFamily="34" charset="0"/>
+                          <a:ea typeface="Calibri" pitchFamily="34" charset="-122"/>
+                          <a:cs typeface="Calibri" pitchFamily="34" charset="-120"/>
+                        </a:rPr>
+                        <a:t>nom</a:t>
+                      </a:r>
+                      <a:endParaRPr lang="en-US" sz="900" dirty="0">
+                        <a:latin typeface="Calibri" charset="0"/>
+                        <a:ea typeface="Calibri" charset="0"/>
+                        <a:cs typeface="Calibri" charset="0"/>
+                      </a:endParaRPr>
+                    </a:p>
+                  </a:txBody>
+                  <a:tcPr marL="91440" marR="91440" marT="45720" marB="45720">
+                    <a:lnL w="6350" cap="flat" cmpd="sng" algn="ctr">
+                      <a:solidFill>
+                        <a:srgbClr val="CCCCCC"/>
+                      </a:solidFill>
+                      <a:prstDash val="solid"/>
+                      <a:round/>
+                      <a:headEnd type="none" w="med" len="med"/>
+                      <a:tailEnd type="none" w="med" len="med"/>
+                    </a:lnL>
+                    <a:lnR w="6350" cap="flat" cmpd="sng" algn="ctr">
+                      <a:solidFill>
+                        <a:srgbClr val="CCCCCC"/>
+                      </a:solidFill>
+                      <a:prstDash val="solid"/>
+                      <a:round/>
+                      <a:headEnd type="none" w="med" len="med"/>
+                      <a:tailEnd type="none" w="med" len="med"/>
+                    </a:lnR>
+                    <a:lnT w="6350" cap="flat" cmpd="sng" algn="ctr">
+                      <a:solidFill>
+                        <a:srgbClr val="CCCCCC"/>
+                      </a:solidFill>
+                      <a:prstDash val="solid"/>
+                      <a:round/>
+                      <a:headEnd type="none" w="med" len="med"/>
+                      <a:tailEnd type="none" w="med" len="med"/>
+                    </a:lnT>
+                    <a:lnB w="6350" cap="flat" cmpd="sng" algn="ctr">
+                      <a:solidFill>
+                        <a:srgbClr val="CCCCCC"/>
+                      </a:solidFill>
+                      <a:prstDash val="solid"/>
+                      <a:round/>
+                      <a:headEnd type="none" w="med" len="med"/>
+                      <a:tailEnd type="none" w="med" len="med"/>
+                    </a:lnB>
+                    <a:solidFill>
+                      <a:srgbClr val="E8F5E9"/>
+                    </a:solidFill>
+                  </a:tcPr>
+                </a:tc>
+                <a:tc>
+                  <a:txBody>
+                    <a:bodyPr/>
+                    <a:lstStyle/>
+                    <a:p>
+                      <a:pPr indent="0" marL="0">
+                        <a:buNone/>
+                      </a:pPr>
+                      <a:r>
+                        <a:rPr lang="en-US" sz="900" dirty="0">
+                          <a:solidFill>
+                            <a:srgbClr val="000000"/>
+                          </a:solidFill>
+                          <a:latin typeface="Calibri" pitchFamily="34" charset="0"/>
+                          <a:ea typeface="Calibri" pitchFamily="34" charset="-122"/>
+                          <a:cs typeface="Calibri" pitchFamily="34" charset="-120"/>
+                        </a:rPr>
+                        <a:t>0</a:t>
+                      </a:r>
+                      <a:endParaRPr lang="en-US" sz="900" dirty="0">
+                        <a:latin typeface="Calibri" charset="0"/>
+                        <a:ea typeface="Calibri" charset="0"/>
+                        <a:cs typeface="Calibri" charset="0"/>
+                      </a:endParaRPr>
+                    </a:p>
+                  </a:txBody>
+                  <a:tcPr marL="91440" marR="91440" marT="45720" marB="45720">
+                    <a:lnL w="6350" cap="flat" cmpd="sng" algn="ctr">
+                      <a:solidFill>
+                        <a:srgbClr val="CCCCCC"/>
+                      </a:solidFill>
+                      <a:prstDash val="solid"/>
+                      <a:round/>
+                      <a:headEnd type="none" w="med" len="med"/>
+                      <a:tailEnd type="none" w="med" len="med"/>
+                    </a:lnL>
+                    <a:lnR w="6350" cap="flat" cmpd="sng" algn="ctr">
+                      <a:solidFill>
+                        <a:srgbClr val="CCCCCC"/>
+                      </a:solidFill>
+                      <a:prstDash val="solid"/>
+                      <a:round/>
+                      <a:headEnd type="none" w="med" len="med"/>
+                      <a:tailEnd type="none" w="med" len="med"/>
+                    </a:lnR>
+                    <a:lnT w="6350" cap="flat" cmpd="sng" algn="ctr">
+                      <a:solidFill>
+                        <a:srgbClr val="CCCCCC"/>
+                      </a:solidFill>
+                      <a:prstDash val="solid"/>
+                      <a:round/>
+                      <a:headEnd type="none" w="med" len="med"/>
+                      <a:tailEnd type="none" w="med" len="med"/>
+                    </a:lnT>
+                    <a:lnB w="6350" cap="flat" cmpd="sng" algn="ctr">
+                      <a:solidFill>
+                        <a:srgbClr val="CCCCCC"/>
+                      </a:solidFill>
+                      <a:prstDash val="solid"/>
+                      <a:round/>
+                      <a:headEnd type="none" w="med" len="med"/>
+                      <a:tailEnd type="none" w="med" len="med"/>
+                    </a:lnB>
+                    <a:solidFill>
+                      <a:srgbClr val="E8F5E9"/>
+                    </a:solidFill>
+                  </a:tcPr>
+                </a:tc>
+                <a:tc>
+                  <a:txBody>
+                    <a:bodyPr/>
+                    <a:lstStyle/>
+                    <a:p>
+                      <a:pPr indent="0" marL="0">
+                        <a:buNone/>
+                      </a:pPr>
+                      <a:r>
+                        <a:rPr lang="en-US" sz="900" dirty="0">
+                          <a:solidFill>
+                            <a:srgbClr val="000000"/>
+                          </a:solidFill>
+                          <a:latin typeface="Calibri" pitchFamily="34" charset="0"/>
+                          <a:ea typeface="Calibri" pitchFamily="34" charset="-122"/>
+                          <a:cs typeface="Calibri" pitchFamily="34" charset="-120"/>
+                        </a:rPr>
+                        <a:t>—</a:t>
+                      </a:r>
+                      <a:endParaRPr lang="en-US" sz="900" dirty="0">
+                        <a:latin typeface="Calibri" charset="0"/>
+                        <a:ea typeface="Calibri" charset="0"/>
+                        <a:cs typeface="Calibri" charset="0"/>
+                      </a:endParaRPr>
+                    </a:p>
+                  </a:txBody>
+                  <a:tcPr marL="91440" marR="91440" marT="45720" marB="45720">
+                    <a:lnL w="6350" cap="flat" cmpd="sng" algn="ctr">
+                      <a:solidFill>
+                        <a:srgbClr val="CCCCCC"/>
+                      </a:solidFill>
+                      <a:prstDash val="solid"/>
+                      <a:round/>
+                      <a:headEnd type="none" w="med" len="med"/>
+                      <a:tailEnd type="none" w="med" len="med"/>
+                    </a:lnL>
+                    <a:lnR w="6350" cap="flat" cmpd="sng" algn="ctr">
+                      <a:solidFill>
+                        <a:srgbClr val="CCCCCC"/>
+                      </a:solidFill>
+                      <a:prstDash val="solid"/>
+                      <a:round/>
+                      <a:headEnd type="none" w="med" len="med"/>
+                      <a:tailEnd type="none" w="med" len="med"/>
+                    </a:lnR>
+                    <a:lnT w="6350" cap="flat" cmpd="sng" algn="ctr">
+                      <a:solidFill>
+                        <a:srgbClr val="CCCCCC"/>
+                      </a:solidFill>
+                      <a:prstDash val="solid"/>
+                      <a:round/>
+                      <a:headEnd type="none" w="med" len="med"/>
+                      <a:tailEnd type="none" w="med" len="med"/>
+                    </a:lnT>
+                    <a:lnB w="6350" cap="flat" cmpd="sng" algn="ctr">
+                      <a:solidFill>
+                        <a:srgbClr val="CCCCCC"/>
+                      </a:solidFill>
+                      <a:prstDash val="solid"/>
+                      <a:round/>
+                      <a:headEnd type="none" w="med" len="med"/>
+                      <a:tailEnd type="none" w="med" len="med"/>
+                    </a:lnB>
+                    <a:solidFill>
+                      <a:srgbClr val="E8F5E9"/>
+                    </a:solidFill>
+                  </a:tcPr>
+                </a:tc>
+                <a:tc>
+                  <a:txBody>
+                    <a:bodyPr/>
+                    <a:lstStyle/>
+                    <a:p>
+                      <a:pPr indent="0" marL="0">
+                        <a:buNone/>
+                      </a:pPr>
+                      <a:r>
+                        <a:rPr lang="en-US" sz="900" dirty="0">
+                          <a:solidFill>
+                            <a:srgbClr val="000000"/>
+                          </a:solidFill>
+                          <a:latin typeface="Calibri" pitchFamily="34" charset="0"/>
+                          <a:ea typeface="Calibri" pitchFamily="34" charset="-122"/>
+                          <a:cs typeface="Calibri" pitchFamily="34" charset="-120"/>
+                        </a:rPr>
+                        <a:t>0</a:t>
+                      </a:r>
+                      <a:endParaRPr lang="en-US" sz="900" dirty="0">
+                        <a:latin typeface="Calibri" charset="0"/>
+                        <a:ea typeface="Calibri" charset="0"/>
+                        <a:cs typeface="Calibri" charset="0"/>
+                      </a:endParaRPr>
+                    </a:p>
+                  </a:txBody>
+                  <a:tcPr marL="91440" marR="91440" marT="45720" marB="45720">
+                    <a:lnL w="6350" cap="flat" cmpd="sng" algn="ctr">
+                      <a:solidFill>
+                        <a:srgbClr val="CCCCCC"/>
+                      </a:solidFill>
+                      <a:prstDash val="solid"/>
+                      <a:round/>
+                      <a:headEnd type="none" w="med" len="med"/>
+                      <a:tailEnd type="none" w="med" len="med"/>
+                    </a:lnL>
+                    <a:lnR w="6350" cap="flat" cmpd="sng" algn="ctr">
+                      <a:solidFill>
+                        <a:srgbClr val="CCCCCC"/>
+                      </a:solidFill>
+                      <a:prstDash val="solid"/>
+                      <a:round/>
+                      <a:headEnd type="none" w="med" len="med"/>
+                      <a:tailEnd type="none" w="med" len="med"/>
+                    </a:lnR>
+                    <a:lnT w="6350" cap="flat" cmpd="sng" algn="ctr">
+                      <a:solidFill>
+                        <a:srgbClr val="CCCCCC"/>
+                      </a:solidFill>
+                      <a:prstDash val="solid"/>
+                      <a:round/>
+                      <a:headEnd type="none" w="med" len="med"/>
+                      <a:tailEnd type="none" w="med" len="med"/>
+                    </a:lnT>
+                    <a:lnB w="6350" cap="flat" cmpd="sng" algn="ctr">
+                      <a:solidFill>
+                        <a:srgbClr val="CCCCCC"/>
+                      </a:solidFill>
+                      <a:prstDash val="solid"/>
+                      <a:round/>
+                      <a:headEnd type="none" w="med" len="med"/>
+                      <a:tailEnd type="none" w="med" len="med"/>
+                    </a:lnB>
+                    <a:solidFill>
+                      <a:srgbClr val="E8F5E9"/>
+                    </a:solidFill>
+                  </a:tcPr>
+                </a:tc>
+                <a:tc>
+                  <a:txBody>
+                    <a:bodyPr/>
+                    <a:lstStyle/>
+                    <a:p>
+                      <a:pPr indent="0" marL="0">
+                        <a:buNone/>
+                      </a:pPr>
+                      <a:r>
+                        <a:rPr lang="en-US" sz="900" dirty="0">
+                          <a:solidFill>
+                            <a:srgbClr val="000000"/>
+                          </a:solidFill>
+                          <a:latin typeface="Calibri" pitchFamily="34" charset="0"/>
+                          <a:ea typeface="Calibri" pitchFamily="34" charset="-122"/>
+                          <a:cs typeface="Calibri" pitchFamily="34" charset="-120"/>
+                        </a:rPr>
+                        <a:t>0</a:t>
+                      </a:r>
+                      <a:endParaRPr lang="en-US" sz="900" dirty="0">
+                        <a:latin typeface="Calibri" charset="0"/>
+                        <a:ea typeface="Calibri" charset="0"/>
+                        <a:cs typeface="Calibri" charset="0"/>
+                      </a:endParaRPr>
+                    </a:p>
+                  </a:txBody>
+                  <a:tcPr marL="91440" marR="91440" marT="45720" marB="45720">
+                    <a:lnL w="6350" cap="flat" cmpd="sng" algn="ctr">
+                      <a:solidFill>
+                        <a:srgbClr val="CCCCCC"/>
+                      </a:solidFill>
+                      <a:prstDash val="solid"/>
+                      <a:round/>
+                      <a:headEnd type="none" w="med" len="med"/>
+                      <a:tailEnd type="none" w="med" len="med"/>
+                    </a:lnL>
+                    <a:lnR w="6350" cap="flat" cmpd="sng" algn="ctr">
+                      <a:solidFill>
+                        <a:srgbClr val="CCCCCC"/>
+                      </a:solidFill>
+                      <a:prstDash val="solid"/>
+                      <a:round/>
+                      <a:headEnd type="none" w="med" len="med"/>
+                      <a:tailEnd type="none" w="med" len="med"/>
+                    </a:lnR>
+                    <a:lnT w="6350" cap="flat" cmpd="sng" algn="ctr">
+                      <a:solidFill>
+                        <a:srgbClr val="CCCCCC"/>
+                      </a:solidFill>
+                      <a:prstDash val="solid"/>
+                      <a:round/>
+                      <a:headEnd type="none" w="med" len="med"/>
+                      <a:tailEnd type="none" w="med" len="med"/>
+                    </a:lnT>
+                    <a:lnB w="6350" cap="flat" cmpd="sng" algn="ctr">
+                      <a:solidFill>
+                        <a:srgbClr val="CCCCCC"/>
+                      </a:solidFill>
+                      <a:prstDash val="solid"/>
+                      <a:round/>
+                      <a:headEnd type="none" w="med" len="med"/>
+                      <a:tailEnd type="none" w="med" len="med"/>
+                    </a:lnB>
+                    <a:solidFill>
+                      <a:srgbClr val="E8F5E9"/>
+                    </a:solidFill>
+                  </a:tcPr>
+                </a:tc>
+                <a:tc>
+                  <a:txBody>
+                    <a:bodyPr/>
+                    <a:lstStyle/>
+                    <a:p>
+                      <a:pPr indent="0" marL="0">
+                        <a:buNone/>
+                      </a:pPr>
+                      <a:r>
+                        <a:rPr lang="en-US" sz="900" dirty="0">
+                          <a:solidFill>
+                            <a:srgbClr val="000000"/>
+                          </a:solidFill>
+                          <a:latin typeface="Calibri" pitchFamily="34" charset="0"/>
+                          <a:ea typeface="Calibri" pitchFamily="34" charset="-122"/>
+                          <a:cs typeface="Calibri" pitchFamily="34" charset="-120"/>
+                        </a:rPr>
+                        <a:t>0</a:t>
+                      </a:r>
+                      <a:endParaRPr lang="en-US" sz="900" dirty="0">
+                        <a:latin typeface="Calibri" charset="0"/>
+                        <a:ea typeface="Calibri" charset="0"/>
+                        <a:cs typeface="Calibri" charset="0"/>
+                      </a:endParaRPr>
+                    </a:p>
+                  </a:txBody>
+                  <a:tcPr marL="91440" marR="91440" marT="45720" marB="45720">
+                    <a:lnL w="6350" cap="flat" cmpd="sng" algn="ctr">
+                      <a:solidFill>
+                        <a:srgbClr val="CCCCCC"/>
+                      </a:solidFill>
+                      <a:prstDash val="solid"/>
+                      <a:round/>
+                      <a:headEnd type="none" w="med" len="med"/>
+                      <a:tailEnd type="none" w="med" len="med"/>
+                    </a:lnL>
+                    <a:lnR w="6350" cap="flat" cmpd="sng" algn="ctr">
+                      <a:solidFill>
+                        <a:srgbClr val="CCCCCC"/>
+                      </a:solidFill>
+                      <a:prstDash val="solid"/>
+                      <a:round/>
+                      <a:headEnd type="none" w="med" len="med"/>
+                      <a:tailEnd type="none" w="med" len="med"/>
+                    </a:lnR>
+                    <a:lnT w="6350" cap="flat" cmpd="sng" algn="ctr">
+                      <a:solidFill>
+                        <a:srgbClr val="CCCCCC"/>
+                      </a:solidFill>
+                      <a:prstDash val="solid"/>
+                      <a:round/>
+                      <a:headEnd type="none" w="med" len="med"/>
+                      <a:tailEnd type="none" w="med" len="med"/>
+                    </a:lnT>
+                    <a:lnB w="6350" cap="flat" cmpd="sng" algn="ctr">
+                      <a:solidFill>
+                        <a:srgbClr val="CCCCCC"/>
+                      </a:solidFill>
+                      <a:prstDash val="solid"/>
+                      <a:round/>
+                      <a:headEnd type="none" w="med" len="med"/>
+                      <a:tailEnd type="none" w="med" len="med"/>
+                    </a:lnB>
+                    <a:solidFill>
+                      <a:srgbClr val="E8F5E9"/>
+                    </a:solidFill>
+                  </a:tcPr>
+                </a:tc>
+                <a:tc>
+                  <a:txBody>
+                    <a:bodyPr/>
+                    <a:lstStyle/>
+                    <a:p>
+                      <a:pPr indent="0" marL="0">
+                        <a:buNone/>
+                      </a:pPr>
+                      <a:r>
+                        <a:rPr lang="en-US" sz="900" dirty="0">
+                          <a:solidFill>
+                            <a:srgbClr val="000000"/>
+                          </a:solidFill>
+                          <a:latin typeface="Calibri" pitchFamily="34" charset="0"/>
+                          <a:ea typeface="Calibri" pitchFamily="34" charset="-122"/>
+                          <a:cs typeface="Calibri" pitchFamily="34" charset="-120"/>
+                        </a:rPr>
+                        <a:t>0</a:t>
+                      </a:r>
+                      <a:endParaRPr lang="en-US" sz="900" dirty="0">
+                        <a:latin typeface="Calibri" charset="0"/>
+                        <a:ea typeface="Calibri" charset="0"/>
+                        <a:cs typeface="Calibri" charset="0"/>
+                      </a:endParaRPr>
+                    </a:p>
+                  </a:txBody>
+                  <a:tcPr marL="91440" marR="91440" marT="45720" marB="45720">
+                    <a:lnL w="6350" cap="flat" cmpd="sng" algn="ctr">
+                      <a:solidFill>
+                        <a:srgbClr val="CCCCCC"/>
+                      </a:solidFill>
+                      <a:prstDash val="solid"/>
+                      <a:round/>
+                      <a:headEnd type="none" w="med" len="med"/>
+                      <a:tailEnd type="none" w="med" len="med"/>
+                    </a:lnL>
+                    <a:lnR w="6350" cap="flat" cmpd="sng" algn="ctr">
+                      <a:solidFill>
+                        <a:srgbClr val="CCCCCC"/>
+                      </a:solidFill>
+                      <a:prstDash val="solid"/>
+                      <a:round/>
+                      <a:headEnd type="none" w="med" len="med"/>
+                      <a:tailEnd type="none" w="med" len="med"/>
+                    </a:lnR>
+                    <a:lnT w="6350" cap="flat" cmpd="sng" algn="ctr">
+                      <a:solidFill>
+                        <a:srgbClr val="CCCCCC"/>
+                      </a:solidFill>
+                      <a:prstDash val="solid"/>
+                      <a:round/>
+                      <a:headEnd type="none" w="med" len="med"/>
+                      <a:tailEnd type="none" w="med" len="med"/>
+                    </a:lnT>
+                    <a:lnB w="6350" cap="flat" cmpd="sng" algn="ctr">
+                      <a:solidFill>
+                        <a:srgbClr val="CCCCCC"/>
+                      </a:solidFill>
+                      <a:prstDash val="solid"/>
+                      <a:round/>
+                      <a:headEnd type="none" w="med" len="med"/>
+                      <a:tailEnd type="none" w="med" len="med"/>
+                    </a:lnB>
+                    <a:solidFill>
+                      <a:srgbClr val="E8F5E9"/>
+                    </a:solidFill>
+                  </a:tcPr>
+                </a:tc>
+                <a:tc>
+                  <a:txBody>
+                    <a:bodyPr/>
+                    <a:lstStyle/>
+                    <a:p>
+                      <a:pPr indent="0" marL="0">
+                        <a:buNone/>
+                      </a:pPr>
+                      <a:r>
+                        <a:rPr lang="en-US" sz="900" dirty="0">
+                          <a:solidFill>
+                            <a:srgbClr val="000000"/>
+                          </a:solidFill>
+                          <a:latin typeface="Calibri" pitchFamily="34" charset="0"/>
+                          <a:ea typeface="Calibri" pitchFamily="34" charset="-122"/>
+                          <a:cs typeface="Calibri" pitchFamily="34" charset="-120"/>
+                        </a:rPr>
+                        <a:t>0</a:t>
+                      </a:r>
+                      <a:endParaRPr lang="en-US" sz="900" dirty="0">
+                        <a:latin typeface="Calibri" charset="0"/>
+                        <a:ea typeface="Calibri" charset="0"/>
+                        <a:cs typeface="Calibri" charset="0"/>
+                      </a:endParaRPr>
+                    </a:p>
+                  </a:txBody>
+                  <a:tcPr marL="91440" marR="91440" marT="45720" marB="45720">
+                    <a:lnL w="6350" cap="flat" cmpd="sng" algn="ctr">
+                      <a:solidFill>
+                        <a:srgbClr val="CCCCCC"/>
+                      </a:solidFill>
+                      <a:prstDash val="solid"/>
+                      <a:round/>
+                      <a:headEnd type="none" w="med" len="med"/>
+                      <a:tailEnd type="none" w="med" len="med"/>
+                    </a:lnL>
+                    <a:lnR w="6350" cap="flat" cmpd="sng" algn="ctr">
+                      <a:solidFill>
+                        <a:srgbClr val="CCCCCC"/>
+                      </a:solidFill>
+                      <a:prstDash val="solid"/>
+                      <a:round/>
+                      <a:headEnd type="none" w="med" len="med"/>
+                      <a:tailEnd type="none" w="med" len="med"/>
+                    </a:lnR>
+                    <a:lnT w="6350" cap="flat" cmpd="sng" algn="ctr">
+                      <a:solidFill>
+                        <a:srgbClr val="CCCCCC"/>
+                      </a:solidFill>
+                      <a:prstDash val="solid"/>
+                      <a:round/>
+                      <a:headEnd type="none" w="med" len="med"/>
+                      <a:tailEnd type="none" w="med" len="med"/>
+                    </a:lnT>
+                    <a:lnB w="6350" cap="flat" cmpd="sng" algn="ctr">
+                      <a:solidFill>
+                        <a:srgbClr val="CCCCCC"/>
+                      </a:solidFill>
+                      <a:prstDash val="solid"/>
+                      <a:round/>
+                      <a:headEnd type="none" w="med" len="med"/>
+                      <a:tailEnd type="none" w="med" len="med"/>
+                    </a:lnB>
+                    <a:solidFill>
+                      <a:srgbClr val="E8F5E9"/>
+                    </a:solidFill>
+                  </a:tcPr>
+                </a:tc>
+                <a:tc>
+                  <a:txBody>
+                    <a:bodyPr/>
+                    <a:lstStyle/>
+                    <a:p>
+                      <a:pPr indent="0" marL="0">
+                        <a:buNone/>
+                      </a:pPr>
+                      <a:r>
+                        <a:rPr lang="en-US" sz="900" dirty="0">
+                          <a:solidFill>
+                            <a:srgbClr val="000000"/>
+                          </a:solidFill>
+                          <a:latin typeface="Calibri" pitchFamily="34" charset="0"/>
+                          <a:ea typeface="Calibri" pitchFamily="34" charset="-122"/>
+                          <a:cs typeface="Calibri" pitchFamily="34" charset="-120"/>
+                        </a:rPr>
+                        <a:t>0</a:t>
+                      </a:r>
+                      <a:endParaRPr lang="en-US" sz="900" dirty="0">
+                        <a:latin typeface="Calibri" charset="0"/>
+                        <a:ea typeface="Calibri" charset="0"/>
+                        <a:cs typeface="Calibri" charset="0"/>
+                      </a:endParaRPr>
+                    </a:p>
+                  </a:txBody>
+                  <a:tcPr marL="91440" marR="91440" marT="45720" marB="45720">
+                    <a:lnL w="6350" cap="flat" cmpd="sng" algn="ctr">
+                      <a:solidFill>
+                        <a:srgbClr val="CCCCCC"/>
+                      </a:solidFill>
+                      <a:prstDash val="solid"/>
+                      <a:round/>
+                      <a:headEnd type="none" w="med" len="med"/>
+                      <a:tailEnd type="none" w="med" len="med"/>
+                    </a:lnL>
+                    <a:lnR w="6350" cap="flat" cmpd="sng" algn="ctr">
+                      <a:solidFill>
+                        <a:srgbClr val="CCCCCC"/>
+                      </a:solidFill>
+                      <a:prstDash val="solid"/>
+                      <a:round/>
+                      <a:headEnd type="none" w="med" len="med"/>
+                      <a:tailEnd type="none" w="med" len="med"/>
+                    </a:lnR>
+                    <a:lnT w="6350" cap="flat" cmpd="sng" algn="ctr">
+                      <a:solidFill>
+                        <a:srgbClr val="CCCCCC"/>
+                      </a:solidFill>
+                      <a:prstDash val="solid"/>
+                      <a:round/>
+                      <a:headEnd type="none" w="med" len="med"/>
+                      <a:tailEnd type="none" w="med" len="med"/>
+                    </a:lnT>
+                    <a:lnB w="6350" cap="flat" cmpd="sng" algn="ctr">
+                      <a:solidFill>
+                        <a:srgbClr val="CCCCCC"/>
+                      </a:solidFill>
+                      <a:prstDash val="solid"/>
+                      <a:round/>
+                      <a:headEnd type="none" w="med" len="med"/>
+                      <a:tailEnd type="none" w="med" len="med"/>
+                    </a:lnB>
+                    <a:solidFill>
+                      <a:srgbClr val="E8F5E9"/>
+                    </a:solidFill>
+                  </a:tcPr>
+                </a:tc>
+              </a:tr>
+              <a:tr h="0">
+                <a:tc>
+                  <a:txBody>
+                    <a:bodyPr/>
+                    <a:lstStyle/>
+                    <a:p>
+                      <a:pPr indent="0" marL="0">
+                        <a:buNone/>
+                      </a:pPr>
+                      <a:r>
+                        <a:rPr lang="en-US" sz="900" dirty="0">
+                          <a:solidFill>
+                            <a:srgbClr val="000000"/>
+                          </a:solidFill>
+                          <a:latin typeface="Calibri" pitchFamily="34" charset="0"/>
+                          <a:ea typeface="Calibri" pitchFamily="34" charset="-122"/>
+                          <a:cs typeface="Calibri" pitchFamily="34" charset="-120"/>
+                        </a:rPr>
+                        <a:t>email</a:t>
+                      </a:r>
+                      <a:endParaRPr lang="en-US" sz="900" dirty="0">
+                        <a:latin typeface="Calibri" charset="0"/>
+                        <a:ea typeface="Calibri" charset="0"/>
+                        <a:cs typeface="Calibri" charset="0"/>
+                      </a:endParaRPr>
+                    </a:p>
+                  </a:txBody>
+                  <a:tcPr marL="91440" marR="91440" marT="45720" marB="45720">
+                    <a:lnL w="6350" cap="flat" cmpd="sng" algn="ctr">
+                      <a:solidFill>
+                        <a:srgbClr val="CCCCCC"/>
+                      </a:solidFill>
+                      <a:prstDash val="solid"/>
+                      <a:round/>
+                      <a:headEnd type="none" w="med" len="med"/>
+                      <a:tailEnd type="none" w="med" len="med"/>
+                    </a:lnL>
+                    <a:lnR w="6350" cap="flat" cmpd="sng" algn="ctr">
+                      <a:solidFill>
+                        <a:srgbClr val="CCCCCC"/>
+                      </a:solidFill>
+                      <a:prstDash val="solid"/>
+                      <a:round/>
+                      <a:headEnd type="none" w="med" len="med"/>
+                      <a:tailEnd type="none" w="med" len="med"/>
+                    </a:lnR>
+                    <a:lnT w="6350" cap="flat" cmpd="sng" algn="ctr">
+                      <a:solidFill>
+                        <a:srgbClr val="CCCCCC"/>
+                      </a:solidFill>
+                      <a:prstDash val="solid"/>
+                      <a:round/>
+                      <a:headEnd type="none" w="med" len="med"/>
+                      <a:tailEnd type="none" w="med" len="med"/>
+                    </a:lnT>
+                    <a:lnB w="6350" cap="flat" cmpd="sng" algn="ctr">
+                      <a:solidFill>
+                        <a:srgbClr val="CCCCCC"/>
+                      </a:solidFill>
+                      <a:prstDash val="solid"/>
+                      <a:round/>
+                      <a:headEnd type="none" w="med" len="med"/>
+                      <a:tailEnd type="none" w="med" len="med"/>
+                    </a:lnB>
+                    <a:solidFill>
+                      <a:srgbClr val="FFFFFF"/>
+                    </a:solidFill>
+                  </a:tcPr>
+                </a:tc>
+                <a:tc>
+                  <a:txBody>
+                    <a:bodyPr/>
+                    <a:lstStyle/>
+                    <a:p>
+                      <a:pPr indent="0" marL="0">
+                        <a:buNone/>
+                      </a:pPr>
+                      <a:r>
+                        <a:rPr lang="en-US" sz="900" dirty="0">
+                          <a:solidFill>
+                            <a:srgbClr val="000000"/>
+                          </a:solidFill>
+                          <a:latin typeface="Calibri" pitchFamily="34" charset="0"/>
+                          <a:ea typeface="Calibri" pitchFamily="34" charset="-122"/>
+                          <a:cs typeface="Calibri" pitchFamily="34" charset="-120"/>
+                        </a:rPr>
+                        <a:t>0</a:t>
+                      </a:r>
+                      <a:endParaRPr lang="en-US" sz="900" dirty="0">
+                        <a:latin typeface="Calibri" charset="0"/>
+                        <a:ea typeface="Calibri" charset="0"/>
+                        <a:cs typeface="Calibri" charset="0"/>
+                      </a:endParaRPr>
+                    </a:p>
+                  </a:txBody>
+                  <a:tcPr marL="91440" marR="91440" marT="45720" marB="45720">
+                    <a:lnL w="6350" cap="flat" cmpd="sng" algn="ctr">
+                      <a:solidFill>
+                        <a:srgbClr val="CCCCCC"/>
+                      </a:solidFill>
+                      <a:prstDash val="solid"/>
+                      <a:round/>
+                      <a:headEnd type="none" w="med" len="med"/>
+                      <a:tailEnd type="none" w="med" len="med"/>
+                    </a:lnL>
+                    <a:lnR w="6350" cap="flat" cmpd="sng" algn="ctr">
+                      <a:solidFill>
+                        <a:srgbClr val="CCCCCC"/>
+                      </a:solidFill>
+                      <a:prstDash val="solid"/>
+                      <a:round/>
+                      <a:headEnd type="none" w="med" len="med"/>
+                      <a:tailEnd type="none" w="med" len="med"/>
+                    </a:lnR>
+                    <a:lnT w="6350" cap="flat" cmpd="sng" algn="ctr">
+                      <a:solidFill>
+                        <a:srgbClr val="CCCCCC"/>
+                      </a:solidFill>
+                      <a:prstDash val="solid"/>
+                      <a:round/>
+                      <a:headEnd type="none" w="med" len="med"/>
+                      <a:tailEnd type="none" w="med" len="med"/>
+                    </a:lnT>
+                    <a:lnB w="6350" cap="flat" cmpd="sng" algn="ctr">
+                      <a:solidFill>
+                        <a:srgbClr val="CCCCCC"/>
+                      </a:solidFill>
+                      <a:prstDash val="solid"/>
+                      <a:round/>
+                      <a:headEnd type="none" w="med" len="med"/>
+                      <a:tailEnd type="none" w="med" len="med"/>
+                    </a:lnB>
+                    <a:solidFill>
+                      <a:srgbClr val="FFFFFF"/>
+                    </a:solidFill>
+                  </a:tcPr>
+                </a:tc>
+                <a:tc>
+                  <a:txBody>
+                    <a:bodyPr/>
+                    <a:lstStyle/>
+                    <a:p>
+                      <a:pPr indent="0" marL="0">
+                        <a:buNone/>
+                      </a:pPr>
+                      <a:r>
+                        <a:rPr lang="en-US" sz="900" dirty="0">
+                          <a:solidFill>
+                            <a:srgbClr val="000000"/>
+                          </a:solidFill>
+                          <a:latin typeface="Calibri" pitchFamily="34" charset="0"/>
+                          <a:ea typeface="Calibri" pitchFamily="34" charset="-122"/>
+                          <a:cs typeface="Calibri" pitchFamily="34" charset="-120"/>
+                        </a:rPr>
+                        <a:t>0</a:t>
+                      </a:r>
+                      <a:endParaRPr lang="en-US" sz="900" dirty="0">
+                        <a:latin typeface="Calibri" charset="0"/>
+                        <a:ea typeface="Calibri" charset="0"/>
+                        <a:cs typeface="Calibri" charset="0"/>
+                      </a:endParaRPr>
+                    </a:p>
+                  </a:txBody>
+                  <a:tcPr marL="91440" marR="91440" marT="45720" marB="45720">
+                    <a:lnL w="6350" cap="flat" cmpd="sng" algn="ctr">
+                      <a:solidFill>
+                        <a:srgbClr val="CCCCCC"/>
+                      </a:solidFill>
+                      <a:prstDash val="solid"/>
+                      <a:round/>
+                      <a:headEnd type="none" w="med" len="med"/>
+                      <a:tailEnd type="none" w="med" len="med"/>
+                    </a:lnL>
+                    <a:lnR w="6350" cap="flat" cmpd="sng" algn="ctr">
+                      <a:solidFill>
+                        <a:srgbClr val="CCCCCC"/>
+                      </a:solidFill>
+                      <a:prstDash val="solid"/>
+                      <a:round/>
+                      <a:headEnd type="none" w="med" len="med"/>
+                      <a:tailEnd type="none" w="med" len="med"/>
+                    </a:lnR>
+                    <a:lnT w="6350" cap="flat" cmpd="sng" algn="ctr">
+                      <a:solidFill>
+                        <a:srgbClr val="CCCCCC"/>
+                      </a:solidFill>
+                      <a:prstDash val="solid"/>
+                      <a:round/>
+                      <a:headEnd type="none" w="med" len="med"/>
+                      <a:tailEnd type="none" w="med" len="med"/>
+                    </a:lnT>
+                    <a:lnB w="6350" cap="flat" cmpd="sng" algn="ctr">
+                      <a:solidFill>
+                        <a:srgbClr val="CCCCCC"/>
+                      </a:solidFill>
+                      <a:prstDash val="solid"/>
+                      <a:round/>
+                      <a:headEnd type="none" w="med" len="med"/>
+                      <a:tailEnd type="none" w="med" len="med"/>
+                    </a:lnB>
+                    <a:solidFill>
+                      <a:srgbClr val="FFFFFF"/>
+                    </a:solidFill>
+                  </a:tcPr>
+                </a:tc>
+                <a:tc>
+                  <a:txBody>
+                    <a:bodyPr/>
+                    <a:lstStyle/>
+                    <a:p>
+                      <a:pPr indent="0" marL="0">
+                        <a:buNone/>
+                      </a:pPr>
+                      <a:r>
+                        <a:rPr lang="en-US" sz="900" dirty="0">
+                          <a:solidFill>
+                            <a:srgbClr val="000000"/>
+                          </a:solidFill>
+                          <a:latin typeface="Calibri" pitchFamily="34" charset="0"/>
+                          <a:ea typeface="Calibri" pitchFamily="34" charset="-122"/>
+                          <a:cs typeface="Calibri" pitchFamily="34" charset="-120"/>
+                        </a:rPr>
+                        <a:t>0</a:t>
+                      </a:r>
+                      <a:endParaRPr lang="en-US" sz="900" dirty="0">
+                        <a:latin typeface="Calibri" charset="0"/>
+                        <a:ea typeface="Calibri" charset="0"/>
+                        <a:cs typeface="Calibri" charset="0"/>
+                      </a:endParaRPr>
+                    </a:p>
+                  </a:txBody>
+                  <a:tcPr marL="91440" marR="91440" marT="45720" marB="45720">
+                    <a:lnL w="6350" cap="flat" cmpd="sng" algn="ctr">
+                      <a:solidFill>
+                        <a:srgbClr val="CCCCCC"/>
+                      </a:solidFill>
+                      <a:prstDash val="solid"/>
+                      <a:round/>
+                      <a:headEnd type="none" w="med" len="med"/>
+                      <a:tailEnd type="none" w="med" len="med"/>
+                    </a:lnL>
+                    <a:lnR w="6350" cap="flat" cmpd="sng" algn="ctr">
+                      <a:solidFill>
+                        <a:srgbClr val="CCCCCC"/>
+                      </a:solidFill>
+                      <a:prstDash val="solid"/>
+                      <a:round/>
+                      <a:headEnd type="none" w="med" len="med"/>
+                      <a:tailEnd type="none" w="med" len="med"/>
+                    </a:lnR>
+                    <a:lnT w="6350" cap="flat" cmpd="sng" algn="ctr">
+                      <a:solidFill>
+                        <a:srgbClr val="CCCCCC"/>
+                      </a:solidFill>
+                      <a:prstDash val="solid"/>
+                      <a:round/>
+                      <a:headEnd type="none" w="med" len="med"/>
+                      <a:tailEnd type="none" w="med" len="med"/>
+                    </a:lnT>
+                    <a:lnB w="6350" cap="flat" cmpd="sng" algn="ctr">
+                      <a:solidFill>
+                        <a:srgbClr val="CCCCCC"/>
+                      </a:solidFill>
+                      <a:prstDash val="solid"/>
+                      <a:round/>
+                      <a:headEnd type="none" w="med" len="med"/>
+                      <a:tailEnd type="none" w="med" len="med"/>
+                    </a:lnB>
+                    <a:solidFill>
+                      <a:srgbClr val="FFFFFF"/>
+                    </a:solidFill>
+                  </a:tcPr>
+                </a:tc>
+                <a:tc>
+                  <a:txBody>
+                    <a:bodyPr/>
+                    <a:lstStyle/>
+                    <a:p>
+                      <a:pPr indent="0" marL="0">
+                        <a:buNone/>
+                      </a:pPr>
+                      <a:r>
+                        <a:rPr lang="en-US" sz="900" dirty="0">
+                          <a:solidFill>
+                            <a:srgbClr val="000000"/>
+                          </a:solidFill>
+                          <a:latin typeface="Calibri" pitchFamily="34" charset="0"/>
+                          <a:ea typeface="Calibri" pitchFamily="34" charset="-122"/>
+                          <a:cs typeface="Calibri" pitchFamily="34" charset="-120"/>
+                        </a:rPr>
+                        <a:t>—</a:t>
+                      </a:r>
+                      <a:endParaRPr lang="en-US" sz="900" dirty="0">
+                        <a:latin typeface="Calibri" charset="0"/>
+                        <a:ea typeface="Calibri" charset="0"/>
+                        <a:cs typeface="Calibri" charset="0"/>
+                      </a:endParaRPr>
+                    </a:p>
+                  </a:txBody>
+                  <a:tcPr marL="91440" marR="91440" marT="45720" marB="45720">
+                    <a:lnL w="6350" cap="flat" cmpd="sng" algn="ctr">
+                      <a:solidFill>
+                        <a:srgbClr val="CCCCCC"/>
+                      </a:solidFill>
+                      <a:prstDash val="solid"/>
+                      <a:round/>
+                      <a:headEnd type="none" w="med" len="med"/>
+                      <a:tailEnd type="none" w="med" len="med"/>
+                    </a:lnL>
+                    <a:lnR w="6350" cap="flat" cmpd="sng" algn="ctr">
+                      <a:solidFill>
+                        <a:srgbClr val="CCCCCC"/>
+                      </a:solidFill>
+                      <a:prstDash val="solid"/>
+                      <a:round/>
+                      <a:headEnd type="none" w="med" len="med"/>
+                      <a:tailEnd type="none" w="med" len="med"/>
+                    </a:lnR>
+                    <a:lnT w="6350" cap="flat" cmpd="sng" algn="ctr">
+                      <a:solidFill>
+                        <a:srgbClr val="CCCCCC"/>
+                      </a:solidFill>
+                      <a:prstDash val="solid"/>
+                      <a:round/>
+                      <a:headEnd type="none" w="med" len="med"/>
+                      <a:tailEnd type="none" w="med" len="med"/>
+                    </a:lnT>
+                    <a:lnB w="6350" cap="flat" cmpd="sng" algn="ctr">
+                      <a:solidFill>
+                        <a:srgbClr val="CCCCCC"/>
+                      </a:solidFill>
+                      <a:prstDash val="solid"/>
+                      <a:round/>
+                      <a:headEnd type="none" w="med" len="med"/>
+                      <a:tailEnd type="none" w="med" len="med"/>
+                    </a:lnB>
+                    <a:solidFill>
+                      <a:srgbClr val="FFFFFF"/>
+                    </a:solidFill>
+                  </a:tcPr>
+                </a:tc>
+                <a:tc>
+                  <a:txBody>
+                    <a:bodyPr/>
+                    <a:lstStyle/>
+                    <a:p>
+                      <a:pPr indent="0" marL="0">
+                        <a:buNone/>
+                      </a:pPr>
+                      <a:r>
+                        <a:rPr lang="en-US" sz="900" dirty="0">
+                          <a:solidFill>
+                            <a:srgbClr val="000000"/>
+                          </a:solidFill>
+                          <a:latin typeface="Calibri" pitchFamily="34" charset="0"/>
+                          <a:ea typeface="Calibri" pitchFamily="34" charset="-122"/>
+                          <a:cs typeface="Calibri" pitchFamily="34" charset="-120"/>
+                        </a:rPr>
+                        <a:t>0</a:t>
+                      </a:r>
+                      <a:endParaRPr lang="en-US" sz="900" dirty="0">
+                        <a:latin typeface="Calibri" charset="0"/>
+                        <a:ea typeface="Calibri" charset="0"/>
+                        <a:cs typeface="Calibri" charset="0"/>
+                      </a:endParaRPr>
+                    </a:p>
+                  </a:txBody>
+                  <a:tcPr marL="91440" marR="91440" marT="45720" marB="45720">
+                    <a:lnL w="6350" cap="flat" cmpd="sng" algn="ctr">
+                      <a:solidFill>
+                        <a:srgbClr val="CCCCCC"/>
+                      </a:solidFill>
+                      <a:prstDash val="solid"/>
+                      <a:round/>
+                      <a:headEnd type="none" w="med" len="med"/>
+                      <a:tailEnd type="none" w="med" len="med"/>
+                    </a:lnL>
+                    <a:lnR w="6350" cap="flat" cmpd="sng" algn="ctr">
+                      <a:solidFill>
+                        <a:srgbClr val="CCCCCC"/>
+                      </a:solidFill>
+                      <a:prstDash val="solid"/>
+                      <a:round/>
+                      <a:headEnd type="none" w="med" len="med"/>
+                      <a:tailEnd type="none" w="med" len="med"/>
+                    </a:lnR>
+                    <a:lnT w="6350" cap="flat" cmpd="sng" algn="ctr">
+                      <a:solidFill>
+                        <a:srgbClr val="CCCCCC"/>
+                      </a:solidFill>
+                      <a:prstDash val="solid"/>
+                      <a:round/>
+                      <a:headEnd type="none" w="med" len="med"/>
+                      <a:tailEnd type="none" w="med" len="med"/>
+                    </a:lnT>
+                    <a:lnB w="6350" cap="flat" cmpd="sng" algn="ctr">
+                      <a:solidFill>
+                        <a:srgbClr val="CCCCCC"/>
+                      </a:solidFill>
+                      <a:prstDash val="solid"/>
+                      <a:round/>
+                      <a:headEnd type="none" w="med" len="med"/>
+                      <a:tailEnd type="none" w="med" len="med"/>
+                    </a:lnB>
+                    <a:solidFill>
+                      <a:srgbClr val="FFFFFF"/>
+                    </a:solidFill>
+                  </a:tcPr>
+                </a:tc>
+                <a:tc>
+                  <a:txBody>
+                    <a:bodyPr/>
+                    <a:lstStyle/>
+                    <a:p>
+                      <a:pPr indent="0" marL="0">
+                        <a:buNone/>
+                      </a:pPr>
+                      <a:r>
+                        <a:rPr lang="en-US" sz="900" dirty="0">
+                          <a:solidFill>
+                            <a:srgbClr val="000000"/>
+                          </a:solidFill>
+                          <a:latin typeface="Calibri" pitchFamily="34" charset="0"/>
+                          <a:ea typeface="Calibri" pitchFamily="34" charset="-122"/>
+                          <a:cs typeface="Calibri" pitchFamily="34" charset="-120"/>
+                        </a:rPr>
+                        <a:t>0</a:t>
+                      </a:r>
+                      <a:endParaRPr lang="en-US" sz="900" dirty="0">
+                        <a:latin typeface="Calibri" charset="0"/>
+                        <a:ea typeface="Calibri" charset="0"/>
+                        <a:cs typeface="Calibri" charset="0"/>
+                      </a:endParaRPr>
+                    </a:p>
+                  </a:txBody>
+                  <a:tcPr marL="91440" marR="91440" marT="45720" marB="45720">
+                    <a:lnL w="6350" cap="flat" cmpd="sng" algn="ctr">
+                      <a:solidFill>
+                        <a:srgbClr val="CCCCCC"/>
+                      </a:solidFill>
+                      <a:prstDash val="solid"/>
+                      <a:round/>
+                      <a:headEnd type="none" w="med" len="med"/>
+                      <a:tailEnd type="none" w="med" len="med"/>
+                    </a:lnL>
+                    <a:lnR w="6350" cap="flat" cmpd="sng" algn="ctr">
+                      <a:solidFill>
+                        <a:srgbClr val="CCCCCC"/>
+                      </a:solidFill>
+                      <a:prstDash val="solid"/>
+                      <a:round/>
+                      <a:headEnd type="none" w="med" len="med"/>
+                      <a:tailEnd type="none" w="med" len="med"/>
+                    </a:lnR>
+                    <a:lnT w="6350" cap="flat" cmpd="sng" algn="ctr">
+                      <a:solidFill>
+                        <a:srgbClr val="CCCCCC"/>
+                      </a:solidFill>
+                      <a:prstDash val="solid"/>
+                      <a:round/>
+                      <a:headEnd type="none" w="med" len="med"/>
+                      <a:tailEnd type="none" w="med" len="med"/>
+                    </a:lnT>
+                    <a:lnB w="6350" cap="flat" cmpd="sng" algn="ctr">
+                      <a:solidFill>
+                        <a:srgbClr val="CCCCCC"/>
+                      </a:solidFill>
+                      <a:prstDash val="solid"/>
+                      <a:round/>
+                      <a:headEnd type="none" w="med" len="med"/>
+                      <a:tailEnd type="none" w="med" len="med"/>
+                    </a:lnB>
+                    <a:solidFill>
+                      <a:srgbClr val="FFFFFF"/>
+                    </a:solidFill>
+                  </a:tcPr>
+                </a:tc>
+                <a:tc>
+                  <a:txBody>
+                    <a:bodyPr/>
+                    <a:lstStyle/>
+                    <a:p>
+                      <a:pPr indent="0" marL="0">
+                        <a:buNone/>
+                      </a:pPr>
+                      <a:r>
+                        <a:rPr lang="en-US" sz="900" dirty="0">
+                          <a:solidFill>
+                            <a:srgbClr val="000000"/>
+                          </a:solidFill>
+                          <a:latin typeface="Calibri" pitchFamily="34" charset="0"/>
+                          <a:ea typeface="Calibri" pitchFamily="34" charset="-122"/>
+                          <a:cs typeface="Calibri" pitchFamily="34" charset="-120"/>
+                        </a:rPr>
+                        <a:t>0</a:t>
+                      </a:r>
+                      <a:endParaRPr lang="en-US" sz="900" dirty="0">
+                        <a:latin typeface="Calibri" charset="0"/>
+                        <a:ea typeface="Calibri" charset="0"/>
+                        <a:cs typeface="Calibri" charset="0"/>
+                      </a:endParaRPr>
+                    </a:p>
+                  </a:txBody>
+                  <a:tcPr marL="91440" marR="91440" marT="45720" marB="45720">
+                    <a:lnL w="6350" cap="flat" cmpd="sng" algn="ctr">
+                      <a:solidFill>
+                        <a:srgbClr val="CCCCCC"/>
+                      </a:solidFill>
+                      <a:prstDash val="solid"/>
+                      <a:round/>
+                      <a:headEnd type="none" w="med" len="med"/>
+                      <a:tailEnd type="none" w="med" len="med"/>
+                    </a:lnL>
+                    <a:lnR w="6350" cap="flat" cmpd="sng" algn="ctr">
+                      <a:solidFill>
+                        <a:srgbClr val="CCCCCC"/>
+                      </a:solidFill>
+                      <a:prstDash val="solid"/>
+                      <a:round/>
+                      <a:headEnd type="none" w="med" len="med"/>
+                      <a:tailEnd type="none" w="med" len="med"/>
+                    </a:lnR>
+                    <a:lnT w="6350" cap="flat" cmpd="sng" algn="ctr">
+                      <a:solidFill>
+                        <a:srgbClr val="CCCCCC"/>
+                      </a:solidFill>
+                      <a:prstDash val="solid"/>
+                      <a:round/>
+                      <a:headEnd type="none" w="med" len="med"/>
+                      <a:tailEnd type="none" w="med" len="med"/>
+                    </a:lnT>
+                    <a:lnB w="6350" cap="flat" cmpd="sng" algn="ctr">
+                      <a:solidFill>
+                        <a:srgbClr val="CCCCCC"/>
+                      </a:solidFill>
+                      <a:prstDash val="solid"/>
+                      <a:round/>
+                      <a:headEnd type="none" w="med" len="med"/>
+                      <a:tailEnd type="none" w="med" len="med"/>
+                    </a:lnB>
+                    <a:solidFill>
+                      <a:srgbClr val="FFFFFF"/>
+                    </a:solidFill>
+                  </a:tcPr>
+                </a:tc>
+                <a:tc>
+                  <a:txBody>
+                    <a:bodyPr/>
+                    <a:lstStyle/>
+                    <a:p>
+                      <a:pPr indent="0" marL="0">
+                        <a:buNone/>
+                      </a:pPr>
+                      <a:r>
+                        <a:rPr lang="en-US" sz="900" dirty="0">
+                          <a:solidFill>
+                            <a:srgbClr val="000000"/>
+                          </a:solidFill>
+                          <a:latin typeface="Calibri" pitchFamily="34" charset="0"/>
+                          <a:ea typeface="Calibri" pitchFamily="34" charset="-122"/>
+                          <a:cs typeface="Calibri" pitchFamily="34" charset="-120"/>
+                        </a:rPr>
+                        <a:t>0</a:t>
+                      </a:r>
+                      <a:endParaRPr lang="en-US" sz="900" dirty="0">
+                        <a:latin typeface="Calibri" charset="0"/>
+                        <a:ea typeface="Calibri" charset="0"/>
+                        <a:cs typeface="Calibri" charset="0"/>
+                      </a:endParaRPr>
+                    </a:p>
+                  </a:txBody>
+                  <a:tcPr marL="91440" marR="91440" marT="45720" marB="45720">
+                    <a:lnL w="6350" cap="flat" cmpd="sng" algn="ctr">
+                      <a:solidFill>
+                        <a:srgbClr val="CCCCCC"/>
+                      </a:solidFill>
+                      <a:prstDash val="solid"/>
+                      <a:round/>
+                      <a:headEnd type="none" w="med" len="med"/>
+                      <a:tailEnd type="none" w="med" len="med"/>
+                    </a:lnL>
+                    <a:lnR w="6350" cap="flat" cmpd="sng" algn="ctr">
+                      <a:solidFill>
+                        <a:srgbClr val="CCCCCC"/>
+                      </a:solidFill>
+                      <a:prstDash val="solid"/>
+                      <a:round/>
+                      <a:headEnd type="none" w="med" len="med"/>
+                      <a:tailEnd type="none" w="med" len="med"/>
+                    </a:lnR>
+                    <a:lnT w="6350" cap="flat" cmpd="sng" algn="ctr">
+                      <a:solidFill>
+                        <a:srgbClr val="CCCCCC"/>
+                      </a:solidFill>
+                      <a:prstDash val="solid"/>
+                      <a:round/>
+                      <a:headEnd type="none" w="med" len="med"/>
+                      <a:tailEnd type="none" w="med" len="med"/>
+                    </a:lnT>
+                    <a:lnB w="6350" cap="flat" cmpd="sng" algn="ctr">
+                      <a:solidFill>
+                        <a:srgbClr val="CCCCCC"/>
+                      </a:solidFill>
+                      <a:prstDash val="solid"/>
+                      <a:round/>
+                      <a:headEnd type="none" w="med" len="med"/>
+                      <a:tailEnd type="none" w="med" len="med"/>
+                    </a:lnB>
+                    <a:solidFill>
+                      <a:srgbClr val="FFFFFF"/>
+                    </a:solidFill>
+                  </a:tcPr>
+                </a:tc>
+              </a:tr>
+              <a:tr h="0">
+                <a:tc>
+                  <a:txBody>
+                    <a:bodyPr/>
+                    <a:lstStyle/>
+                    <a:p>
+                      <a:pPr indent="0" marL="0">
+                        <a:buNone/>
+                      </a:pPr>
+                      <a:r>
+                        <a:rPr lang="en-US" sz="900" dirty="0">
+                          <a:solidFill>
+                            <a:srgbClr val="000000"/>
+                          </a:solidFill>
+                          <a:latin typeface="Calibri" pitchFamily="34" charset="0"/>
+                          <a:ea typeface="Calibri" pitchFamily="34" charset="-122"/>
+                          <a:cs typeface="Calibri" pitchFamily="34" charset="-120"/>
+                        </a:rPr>
+                        <a:t>id_album</a:t>
+                      </a:r>
+                      <a:endParaRPr lang="en-US" sz="900" dirty="0">
+                        <a:latin typeface="Calibri" charset="0"/>
+                        <a:ea typeface="Calibri" charset="0"/>
+                        <a:cs typeface="Calibri" charset="0"/>
+                      </a:endParaRPr>
+                    </a:p>
+                  </a:txBody>
+                  <a:tcPr marL="91440" marR="91440" marT="45720" marB="45720">
+                    <a:lnL w="6350" cap="flat" cmpd="sng" algn="ctr">
+                      <a:solidFill>
+                        <a:srgbClr val="CCCCCC"/>
+                      </a:solidFill>
+                      <a:prstDash val="solid"/>
+                      <a:round/>
+                      <a:headEnd type="none" w="med" len="med"/>
+                      <a:tailEnd type="none" w="med" len="med"/>
+                    </a:lnL>
+                    <a:lnR w="6350" cap="flat" cmpd="sng" algn="ctr">
+                      <a:solidFill>
+                        <a:srgbClr val="CCCCCC"/>
+                      </a:solidFill>
+                      <a:prstDash val="solid"/>
+                      <a:round/>
+                      <a:headEnd type="none" w="med" len="med"/>
+                      <a:tailEnd type="none" w="med" len="med"/>
+                    </a:lnR>
+                    <a:lnT w="6350" cap="flat" cmpd="sng" algn="ctr">
+                      <a:solidFill>
+                        <a:srgbClr val="CCCCCC"/>
+                      </a:solidFill>
+                      <a:prstDash val="solid"/>
+                      <a:round/>
+                      <a:headEnd type="none" w="med" len="med"/>
+                      <a:tailEnd type="none" w="med" len="med"/>
+                    </a:lnT>
+                    <a:lnB w="6350" cap="flat" cmpd="sng" algn="ctr">
+                      <a:solidFill>
+                        <a:srgbClr val="CCCCCC"/>
+                      </a:solidFill>
+                      <a:prstDash val="solid"/>
+                      <a:round/>
+                      <a:headEnd type="none" w="med" len="med"/>
+                      <a:tailEnd type="none" w="med" len="med"/>
+                    </a:lnB>
+                    <a:solidFill>
+                      <a:srgbClr val="E8F5E9"/>
+                    </a:solidFill>
+                  </a:tcPr>
+                </a:tc>
+                <a:tc>
+                  <a:txBody>
+                    <a:bodyPr/>
+                    <a:lstStyle/>
+                    <a:p>
+                      <a:pPr indent="0" marL="0">
+                        <a:buNone/>
+                      </a:pPr>
+                      <a:r>
+                        <a:rPr lang="en-US" sz="900" dirty="0">
+                          <a:solidFill>
+                            <a:srgbClr val="000000"/>
+                          </a:solidFill>
+                          <a:latin typeface="Calibri" pitchFamily="34" charset="0"/>
+                          <a:ea typeface="Calibri" pitchFamily="34" charset="-122"/>
+                          <a:cs typeface="Calibri" pitchFamily="34" charset="-120"/>
+                        </a:rPr>
+                        <a:t>0</a:t>
+                      </a:r>
+                      <a:endParaRPr lang="en-US" sz="900" dirty="0">
+                        <a:latin typeface="Calibri" charset="0"/>
+                        <a:ea typeface="Calibri" charset="0"/>
+                        <a:cs typeface="Calibri" charset="0"/>
+                      </a:endParaRPr>
+                    </a:p>
+                  </a:txBody>
+                  <a:tcPr marL="91440" marR="91440" marT="45720" marB="45720">
+                    <a:lnL w="6350" cap="flat" cmpd="sng" algn="ctr">
+                      <a:solidFill>
+                        <a:srgbClr val="CCCCCC"/>
+                      </a:solidFill>
+                      <a:prstDash val="solid"/>
+                      <a:round/>
+                      <a:headEnd type="none" w="med" len="med"/>
+                      <a:tailEnd type="none" w="med" len="med"/>
+                    </a:lnL>
+                    <a:lnR w="6350" cap="flat" cmpd="sng" algn="ctr">
+                      <a:solidFill>
+                        <a:srgbClr val="CCCCCC"/>
+                      </a:solidFill>
+                      <a:prstDash val="solid"/>
+                      <a:round/>
+                      <a:headEnd type="none" w="med" len="med"/>
+                      <a:tailEnd type="none" w="med" len="med"/>
+                    </a:lnR>
+                    <a:lnT w="6350" cap="flat" cmpd="sng" algn="ctr">
+                      <a:solidFill>
+                        <a:srgbClr val="CCCCCC"/>
+                      </a:solidFill>
+                      <a:prstDash val="solid"/>
+                      <a:round/>
+                      <a:headEnd type="none" w="med" len="med"/>
+                      <a:tailEnd type="none" w="med" len="med"/>
+                    </a:lnT>
+                    <a:lnB w="6350" cap="flat" cmpd="sng" algn="ctr">
+                      <a:solidFill>
+                        <a:srgbClr val="CCCCCC"/>
+                      </a:solidFill>
+                      <a:prstDash val="solid"/>
+                      <a:round/>
+                      <a:headEnd type="none" w="med" len="med"/>
+                      <a:tailEnd type="none" w="med" len="med"/>
+                    </a:lnB>
+                    <a:solidFill>
+                      <a:srgbClr val="E8F5E9"/>
+                    </a:solidFill>
+                  </a:tcPr>
+                </a:tc>
+                <a:tc>
+                  <a:txBody>
+                    <a:bodyPr/>
+                    <a:lstStyle/>
+                    <a:p>
+                      <a:pPr indent="0" marL="0">
+                        <a:buNone/>
+                      </a:pPr>
+                      <a:r>
+                        <a:rPr lang="en-US" sz="900" dirty="0">
+                          <a:solidFill>
+                            <a:srgbClr val="000000"/>
+                          </a:solidFill>
+                          <a:latin typeface="Calibri" pitchFamily="34" charset="0"/>
+                          <a:ea typeface="Calibri" pitchFamily="34" charset="-122"/>
+                          <a:cs typeface="Calibri" pitchFamily="34" charset="-120"/>
+                        </a:rPr>
+                        <a:t>0</a:t>
+                      </a:r>
+                      <a:endParaRPr lang="en-US" sz="900" dirty="0">
+                        <a:latin typeface="Calibri" charset="0"/>
+                        <a:ea typeface="Calibri" charset="0"/>
+                        <a:cs typeface="Calibri" charset="0"/>
+                      </a:endParaRPr>
+                    </a:p>
+                  </a:txBody>
+                  <a:tcPr marL="91440" marR="91440" marT="45720" marB="45720">
+                    <a:lnL w="6350" cap="flat" cmpd="sng" algn="ctr">
+                      <a:solidFill>
+                        <a:srgbClr val="CCCCCC"/>
+                      </a:solidFill>
+                      <a:prstDash val="solid"/>
+                      <a:round/>
+                      <a:headEnd type="none" w="med" len="med"/>
+                      <a:tailEnd type="none" w="med" len="med"/>
+                    </a:lnL>
+                    <a:lnR w="6350" cap="flat" cmpd="sng" algn="ctr">
+                      <a:solidFill>
+                        <a:srgbClr val="CCCCCC"/>
+                      </a:solidFill>
+                      <a:prstDash val="solid"/>
+                      <a:round/>
+                      <a:headEnd type="none" w="med" len="med"/>
+                      <a:tailEnd type="none" w="med" len="med"/>
+                    </a:lnR>
+                    <a:lnT w="6350" cap="flat" cmpd="sng" algn="ctr">
+                      <a:solidFill>
+                        <a:srgbClr val="CCCCCC"/>
+                      </a:solidFill>
+                      <a:prstDash val="solid"/>
+                      <a:round/>
+                      <a:headEnd type="none" w="med" len="med"/>
+                      <a:tailEnd type="none" w="med" len="med"/>
+                    </a:lnT>
+                    <a:lnB w="6350" cap="flat" cmpd="sng" algn="ctr">
+                      <a:solidFill>
+                        <a:srgbClr val="CCCCCC"/>
+                      </a:solidFill>
+                      <a:prstDash val="solid"/>
+                      <a:round/>
+                      <a:headEnd type="none" w="med" len="med"/>
+                      <a:tailEnd type="none" w="med" len="med"/>
+                    </a:lnB>
+                    <a:solidFill>
+                      <a:srgbClr val="E8F5E9"/>
+                    </a:solidFill>
+                  </a:tcPr>
+                </a:tc>
+                <a:tc>
+                  <a:txBody>
+                    <a:bodyPr/>
+                    <a:lstStyle/>
+                    <a:p>
+                      <a:pPr indent="0" marL="0">
+                        <a:buNone/>
+                      </a:pPr>
+                      <a:r>
+                        <a:rPr lang="en-US" sz="900" dirty="0">
+                          <a:solidFill>
+                            <a:srgbClr val="000000"/>
+                          </a:solidFill>
+                          <a:latin typeface="Calibri" pitchFamily="34" charset="0"/>
+                          <a:ea typeface="Calibri" pitchFamily="34" charset="-122"/>
+                          <a:cs typeface="Calibri" pitchFamily="34" charset="-120"/>
+                        </a:rPr>
+                        <a:t>0</a:t>
+                      </a:r>
+                      <a:endParaRPr lang="en-US" sz="900" dirty="0">
+                        <a:latin typeface="Calibri" charset="0"/>
+                        <a:ea typeface="Calibri" charset="0"/>
+                        <a:cs typeface="Calibri" charset="0"/>
+                      </a:endParaRPr>
+                    </a:p>
+                  </a:txBody>
+                  <a:tcPr marL="91440" marR="91440" marT="45720" marB="45720">
+                    <a:lnL w="6350" cap="flat" cmpd="sng" algn="ctr">
+                      <a:solidFill>
+                        <a:srgbClr val="CCCCCC"/>
+                      </a:solidFill>
+                      <a:prstDash val="solid"/>
+                      <a:round/>
+                      <a:headEnd type="none" w="med" len="med"/>
+                      <a:tailEnd type="none" w="med" len="med"/>
+                    </a:lnL>
+                    <a:lnR w="6350" cap="flat" cmpd="sng" algn="ctr">
+                      <a:solidFill>
+                        <a:srgbClr val="CCCCCC"/>
+                      </a:solidFill>
+                      <a:prstDash val="solid"/>
+                      <a:round/>
+                      <a:headEnd type="none" w="med" len="med"/>
+                      <a:tailEnd type="none" w="med" len="med"/>
+                    </a:lnR>
+                    <a:lnT w="6350" cap="flat" cmpd="sng" algn="ctr">
+                      <a:solidFill>
+                        <a:srgbClr val="CCCCCC"/>
+                      </a:solidFill>
+                      <a:prstDash val="solid"/>
+                      <a:round/>
+                      <a:headEnd type="none" w="med" len="med"/>
+                      <a:tailEnd type="none" w="med" len="med"/>
+                    </a:lnT>
+                    <a:lnB w="6350" cap="flat" cmpd="sng" algn="ctr">
+                      <a:solidFill>
+                        <a:srgbClr val="CCCCCC"/>
+                      </a:solidFill>
+                      <a:prstDash val="solid"/>
+                      <a:round/>
+                      <a:headEnd type="none" w="med" len="med"/>
+                      <a:tailEnd type="none" w="med" len="med"/>
+                    </a:lnB>
+                    <a:solidFill>
+                      <a:srgbClr val="E8F5E9"/>
+                    </a:solidFill>
+                  </a:tcPr>
+                </a:tc>
+                <a:tc>
+                  <a:txBody>
+                    <a:bodyPr/>
+                    <a:lstStyle/>
+                    <a:p>
+                      <a:pPr indent="0" marL="0">
+                        <a:buNone/>
+                      </a:pPr>
+                      <a:r>
+                        <a:rPr lang="en-US" sz="900" dirty="0">
+                          <a:solidFill>
+                            <a:srgbClr val="000000"/>
+                          </a:solidFill>
+                          <a:latin typeface="Calibri" pitchFamily="34" charset="0"/>
+                          <a:ea typeface="Calibri" pitchFamily="34" charset="-122"/>
+                          <a:cs typeface="Calibri" pitchFamily="34" charset="-120"/>
+                        </a:rPr>
+                        <a:t>0</a:t>
+                      </a:r>
+                      <a:endParaRPr lang="en-US" sz="900" dirty="0">
+                        <a:latin typeface="Calibri" charset="0"/>
+                        <a:ea typeface="Calibri" charset="0"/>
+                        <a:cs typeface="Calibri" charset="0"/>
+                      </a:endParaRPr>
+                    </a:p>
+                  </a:txBody>
+                  <a:tcPr marL="91440" marR="91440" marT="45720" marB="45720">
+                    <a:lnL w="6350" cap="flat" cmpd="sng" algn="ctr">
+                      <a:solidFill>
+                        <a:srgbClr val="CCCCCC"/>
+                      </a:solidFill>
+                      <a:prstDash val="solid"/>
+                      <a:round/>
+                      <a:headEnd type="none" w="med" len="med"/>
+                      <a:tailEnd type="none" w="med" len="med"/>
+                    </a:lnL>
+                    <a:lnR w="6350" cap="flat" cmpd="sng" algn="ctr">
+                      <a:solidFill>
+                        <a:srgbClr val="CCCCCC"/>
+                      </a:solidFill>
+                      <a:prstDash val="solid"/>
+                      <a:round/>
+                      <a:headEnd type="none" w="med" len="med"/>
+                      <a:tailEnd type="none" w="med" len="med"/>
+                    </a:lnR>
+                    <a:lnT w="6350" cap="flat" cmpd="sng" algn="ctr">
+                      <a:solidFill>
+                        <a:srgbClr val="CCCCCC"/>
+                      </a:solidFill>
+                      <a:prstDash val="solid"/>
+                      <a:round/>
+                      <a:headEnd type="none" w="med" len="med"/>
+                      <a:tailEnd type="none" w="med" len="med"/>
+                    </a:lnT>
+                    <a:lnB w="6350" cap="flat" cmpd="sng" algn="ctr">
+                      <a:solidFill>
+                        <a:srgbClr val="CCCCCC"/>
+                      </a:solidFill>
+                      <a:prstDash val="solid"/>
+                      <a:round/>
+                      <a:headEnd type="none" w="med" len="med"/>
+                      <a:tailEnd type="none" w="med" len="med"/>
+                    </a:lnB>
+                    <a:solidFill>
+                      <a:srgbClr val="E8F5E9"/>
+                    </a:solidFill>
+                  </a:tcPr>
+                </a:tc>
+                <a:tc>
+                  <a:txBody>
+                    <a:bodyPr/>
+                    <a:lstStyle/>
+                    <a:p>
+                      <a:pPr indent="0" marL="0">
+                        <a:buNone/>
+                      </a:pPr>
+                      <a:r>
+                        <a:rPr lang="en-US" sz="900" dirty="0">
+                          <a:solidFill>
+                            <a:srgbClr val="000000"/>
+                          </a:solidFill>
+                          <a:latin typeface="Calibri" pitchFamily="34" charset="0"/>
+                          <a:ea typeface="Calibri" pitchFamily="34" charset="-122"/>
+                          <a:cs typeface="Calibri" pitchFamily="34" charset="-120"/>
+                        </a:rPr>
+                        <a:t>—</a:t>
+                      </a:r>
+                      <a:endParaRPr lang="en-US" sz="900" dirty="0">
+                        <a:latin typeface="Calibri" charset="0"/>
+                        <a:ea typeface="Calibri" charset="0"/>
+                        <a:cs typeface="Calibri" charset="0"/>
+                      </a:endParaRPr>
+                    </a:p>
+                  </a:txBody>
+                  <a:tcPr marL="91440" marR="91440" marT="45720" marB="45720">
+                    <a:lnL w="6350" cap="flat" cmpd="sng" algn="ctr">
+                      <a:solidFill>
+                        <a:srgbClr val="CCCCCC"/>
+                      </a:solidFill>
+                      <a:prstDash val="solid"/>
+                      <a:round/>
+                      <a:headEnd type="none" w="med" len="med"/>
+                      <a:tailEnd type="none" w="med" len="med"/>
+                    </a:lnL>
+                    <a:lnR w="6350" cap="flat" cmpd="sng" algn="ctr">
+                      <a:solidFill>
+                        <a:srgbClr val="CCCCCC"/>
+                      </a:solidFill>
+                      <a:prstDash val="solid"/>
+                      <a:round/>
+                      <a:headEnd type="none" w="med" len="med"/>
+                      <a:tailEnd type="none" w="med" len="med"/>
+                    </a:lnR>
+                    <a:lnT w="6350" cap="flat" cmpd="sng" algn="ctr">
+                      <a:solidFill>
+                        <a:srgbClr val="CCCCCC"/>
+                      </a:solidFill>
+                      <a:prstDash val="solid"/>
+                      <a:round/>
+                      <a:headEnd type="none" w="med" len="med"/>
+                      <a:tailEnd type="none" w="med" len="med"/>
+                    </a:lnT>
+                    <a:lnB w="6350" cap="flat" cmpd="sng" algn="ctr">
+                      <a:solidFill>
+                        <a:srgbClr val="CCCCCC"/>
+                      </a:solidFill>
+                      <a:prstDash val="solid"/>
+                      <a:round/>
+                      <a:headEnd type="none" w="med" len="med"/>
+                      <a:tailEnd type="none" w="med" len="med"/>
+                    </a:lnB>
+                    <a:solidFill>
+                      <a:srgbClr val="E8F5E9"/>
+                    </a:solidFill>
+                  </a:tcPr>
+                </a:tc>
+                <a:tc>
+                  <a:txBody>
+                    <a:bodyPr/>
+                    <a:lstStyle/>
+                    <a:p>
+                      <a:pPr indent="0" marL="0">
+                        <a:buNone/>
+                      </a:pPr>
+                      <a:r>
+                        <a:rPr lang="en-US" sz="900" dirty="0">
+                          <a:solidFill>
+                            <a:srgbClr val="000000"/>
+                          </a:solidFill>
+                          <a:latin typeface="Calibri" pitchFamily="34" charset="0"/>
+                          <a:ea typeface="Calibri" pitchFamily="34" charset="-122"/>
+                          <a:cs typeface="Calibri" pitchFamily="34" charset="-120"/>
+                        </a:rPr>
+                        <a:t>1</a:t>
+                      </a:r>
+                      <a:endParaRPr lang="en-US" sz="900" dirty="0">
+                        <a:latin typeface="Calibri" charset="0"/>
+                        <a:ea typeface="Calibri" charset="0"/>
+                        <a:cs typeface="Calibri" charset="0"/>
+                      </a:endParaRPr>
+                    </a:p>
+                  </a:txBody>
+                  <a:tcPr marL="91440" marR="91440" marT="45720" marB="45720">
+                    <a:lnL w="6350" cap="flat" cmpd="sng" algn="ctr">
+                      <a:solidFill>
+                        <a:srgbClr val="CCCCCC"/>
+                      </a:solidFill>
+                      <a:prstDash val="solid"/>
+                      <a:round/>
+                      <a:headEnd type="none" w="med" len="med"/>
+                      <a:tailEnd type="none" w="med" len="med"/>
+                    </a:lnL>
+                    <a:lnR w="6350" cap="flat" cmpd="sng" algn="ctr">
+                      <a:solidFill>
+                        <a:srgbClr val="CCCCCC"/>
+                      </a:solidFill>
+                      <a:prstDash val="solid"/>
+                      <a:round/>
+                      <a:headEnd type="none" w="med" len="med"/>
+                      <a:tailEnd type="none" w="med" len="med"/>
+                    </a:lnR>
+                    <a:lnT w="6350" cap="flat" cmpd="sng" algn="ctr">
+                      <a:solidFill>
+                        <a:srgbClr val="CCCCCC"/>
+                      </a:solidFill>
+                      <a:prstDash val="solid"/>
+                      <a:round/>
+                      <a:headEnd type="none" w="med" len="med"/>
+                      <a:tailEnd type="none" w="med" len="med"/>
+                    </a:lnT>
+                    <a:lnB w="6350" cap="flat" cmpd="sng" algn="ctr">
+                      <a:solidFill>
+                        <a:srgbClr val="CCCCCC"/>
+                      </a:solidFill>
+                      <a:prstDash val="solid"/>
+                      <a:round/>
+                      <a:headEnd type="none" w="med" len="med"/>
+                      <a:tailEnd type="none" w="med" len="med"/>
+                    </a:lnB>
+                    <a:solidFill>
+                      <a:srgbClr val="E8F5E9"/>
+                    </a:solidFill>
+                  </a:tcPr>
+                </a:tc>
+                <a:tc>
+                  <a:txBody>
+                    <a:bodyPr/>
+                    <a:lstStyle/>
+                    <a:p>
+                      <a:pPr indent="0" marL="0">
+                        <a:buNone/>
+                      </a:pPr>
+                      <a:r>
+                        <a:rPr lang="en-US" sz="900" dirty="0">
+                          <a:solidFill>
+                            <a:srgbClr val="000000"/>
+                          </a:solidFill>
+                          <a:latin typeface="Calibri" pitchFamily="34" charset="0"/>
+                          <a:ea typeface="Calibri" pitchFamily="34" charset="-122"/>
+                          <a:cs typeface="Calibri" pitchFamily="34" charset="-120"/>
+                        </a:rPr>
+                        <a:t>0</a:t>
+                      </a:r>
+                      <a:endParaRPr lang="en-US" sz="900" dirty="0">
+                        <a:latin typeface="Calibri" charset="0"/>
+                        <a:ea typeface="Calibri" charset="0"/>
+                        <a:cs typeface="Calibri" charset="0"/>
+                      </a:endParaRPr>
+                    </a:p>
+                  </a:txBody>
+                  <a:tcPr marL="91440" marR="91440" marT="45720" marB="45720">
+                    <a:lnL w="6350" cap="flat" cmpd="sng" algn="ctr">
+                      <a:solidFill>
+                        <a:srgbClr val="CCCCCC"/>
+                      </a:solidFill>
+                      <a:prstDash val="solid"/>
+                      <a:round/>
+                      <a:headEnd type="none" w="med" len="med"/>
+                      <a:tailEnd type="none" w="med" len="med"/>
+                    </a:lnL>
+                    <a:lnR w="6350" cap="flat" cmpd="sng" algn="ctr">
+                      <a:solidFill>
+                        <a:srgbClr val="CCCCCC"/>
+                      </a:solidFill>
+                      <a:prstDash val="solid"/>
+                      <a:round/>
+                      <a:headEnd type="none" w="med" len="med"/>
+                      <a:tailEnd type="none" w="med" len="med"/>
+                    </a:lnR>
+                    <a:lnT w="6350" cap="flat" cmpd="sng" algn="ctr">
+                      <a:solidFill>
+                        <a:srgbClr val="CCCCCC"/>
+                      </a:solidFill>
+                      <a:prstDash val="solid"/>
+                      <a:round/>
+                      <a:headEnd type="none" w="med" len="med"/>
+                      <a:tailEnd type="none" w="med" len="med"/>
+                    </a:lnT>
+                    <a:lnB w="6350" cap="flat" cmpd="sng" algn="ctr">
+                      <a:solidFill>
+                        <a:srgbClr val="CCCCCC"/>
+                      </a:solidFill>
+                      <a:prstDash val="solid"/>
+                      <a:round/>
+                      <a:headEnd type="none" w="med" len="med"/>
+                      <a:tailEnd type="none" w="med" len="med"/>
+                    </a:lnB>
+                    <a:solidFill>
+                      <a:srgbClr val="E8F5E9"/>
+                    </a:solidFill>
+                  </a:tcPr>
+                </a:tc>
+                <a:tc>
+                  <a:txBody>
+                    <a:bodyPr/>
+                    <a:lstStyle/>
+                    <a:p>
+                      <a:pPr indent="0" marL="0">
+                        <a:buNone/>
+                      </a:pPr>
+                      <a:r>
+                        <a:rPr lang="en-US" sz="900" dirty="0">
+                          <a:solidFill>
+                            <a:srgbClr val="000000"/>
+                          </a:solidFill>
+                          <a:latin typeface="Calibri" pitchFamily="34" charset="0"/>
+                          <a:ea typeface="Calibri" pitchFamily="34" charset="-122"/>
+                          <a:cs typeface="Calibri" pitchFamily="34" charset="-120"/>
+                        </a:rPr>
+                        <a:t>0</a:t>
+                      </a:r>
+                      <a:endParaRPr lang="en-US" sz="900" dirty="0">
+                        <a:latin typeface="Calibri" charset="0"/>
+                        <a:ea typeface="Calibri" charset="0"/>
+                        <a:cs typeface="Calibri" charset="0"/>
+                      </a:endParaRPr>
+                    </a:p>
+                  </a:txBody>
+                  <a:tcPr marL="91440" marR="91440" marT="45720" marB="45720">
+                    <a:lnL w="6350" cap="flat" cmpd="sng" algn="ctr">
+                      <a:solidFill>
+                        <a:srgbClr val="CCCCCC"/>
+                      </a:solidFill>
+                      <a:prstDash val="solid"/>
+                      <a:round/>
+                      <a:headEnd type="none" w="med" len="med"/>
+                      <a:tailEnd type="none" w="med" len="med"/>
+                    </a:lnL>
+                    <a:lnR w="6350" cap="flat" cmpd="sng" algn="ctr">
+                      <a:solidFill>
+                        <a:srgbClr val="CCCCCC"/>
+                      </a:solidFill>
+                      <a:prstDash val="solid"/>
+                      <a:round/>
+                      <a:headEnd type="none" w="med" len="med"/>
+                      <a:tailEnd type="none" w="med" len="med"/>
+                    </a:lnR>
+                    <a:lnT w="6350" cap="flat" cmpd="sng" algn="ctr">
+                      <a:solidFill>
+                        <a:srgbClr val="CCCCCC"/>
+                      </a:solidFill>
+                      <a:prstDash val="solid"/>
+                      <a:round/>
+                      <a:headEnd type="none" w="med" len="med"/>
+                      <a:tailEnd type="none" w="med" len="med"/>
+                    </a:lnT>
+                    <a:lnB w="6350" cap="flat" cmpd="sng" algn="ctr">
+                      <a:solidFill>
+                        <a:srgbClr val="CCCCCC"/>
+                      </a:solidFill>
+                      <a:prstDash val="solid"/>
+                      <a:round/>
+                      <a:headEnd type="none" w="med" len="med"/>
+                      <a:tailEnd type="none" w="med" len="med"/>
+                    </a:lnB>
+                    <a:solidFill>
+                      <a:srgbClr val="E8F5E9"/>
+                    </a:solidFill>
+                  </a:tcPr>
+                </a:tc>
+              </a:tr>
+              <a:tr h="0">
+                <a:tc>
+                  <a:txBody>
+                    <a:bodyPr/>
+                    <a:lstStyle/>
+                    <a:p>
+                      <a:pPr indent="0" marL="0">
+                        <a:buNone/>
+                      </a:pPr>
+                      <a:r>
+                        <a:rPr lang="en-US" sz="900" dirty="0">
+                          <a:solidFill>
+                            <a:srgbClr val="000000"/>
+                          </a:solidFill>
+                          <a:latin typeface="Calibri" pitchFamily="34" charset="0"/>
+                          <a:ea typeface="Calibri" pitchFamily="34" charset="-122"/>
+                          <a:cs typeface="Calibri" pitchFamily="34" charset="-120"/>
+                        </a:rPr>
+                        <a:t>id_salle</a:t>
+                      </a:r>
+                      <a:endParaRPr lang="en-US" sz="900" dirty="0">
+                        <a:latin typeface="Calibri" charset="0"/>
+                        <a:ea typeface="Calibri" charset="0"/>
+                        <a:cs typeface="Calibri" charset="0"/>
+                      </a:endParaRPr>
+                    </a:p>
+                  </a:txBody>
+                  <a:tcPr marL="91440" marR="91440" marT="45720" marB="45720">
+                    <a:lnL w="6350" cap="flat" cmpd="sng" algn="ctr">
+                      <a:solidFill>
+                        <a:srgbClr val="CCCCCC"/>
+                      </a:solidFill>
+                      <a:prstDash val="solid"/>
+                      <a:round/>
+                      <a:headEnd type="none" w="med" len="med"/>
+                      <a:tailEnd type="none" w="med" len="med"/>
+                    </a:lnL>
+                    <a:lnR w="6350" cap="flat" cmpd="sng" algn="ctr">
+                      <a:solidFill>
+                        <a:srgbClr val="CCCCCC"/>
+                      </a:solidFill>
+                      <a:prstDash val="solid"/>
+                      <a:round/>
+                      <a:headEnd type="none" w="med" len="med"/>
+                      <a:tailEnd type="none" w="med" len="med"/>
+                    </a:lnR>
+                    <a:lnT w="6350" cap="flat" cmpd="sng" algn="ctr">
+                      <a:solidFill>
+                        <a:srgbClr val="CCCCCC"/>
+                      </a:solidFill>
+                      <a:prstDash val="solid"/>
+                      <a:round/>
+                      <a:headEnd type="none" w="med" len="med"/>
+                      <a:tailEnd type="none" w="med" len="med"/>
+                    </a:lnT>
+                    <a:lnB w="6350" cap="flat" cmpd="sng" algn="ctr">
+                      <a:solidFill>
+                        <a:srgbClr val="CCCCCC"/>
+                      </a:solidFill>
+                      <a:prstDash val="solid"/>
+                      <a:round/>
+                      <a:headEnd type="none" w="med" len="med"/>
+                      <a:tailEnd type="none" w="med" len="med"/>
+                    </a:lnB>
+                    <a:solidFill>
+                      <a:srgbClr val="FFFFFF"/>
+                    </a:solidFill>
+                  </a:tcPr>
+                </a:tc>
+                <a:tc>
+                  <a:txBody>
+                    <a:bodyPr/>
+                    <a:lstStyle/>
+                    <a:p>
+                      <a:pPr indent="0" marL="0">
+                        <a:buNone/>
+                      </a:pPr>
+                      <a:r>
+                        <a:rPr lang="en-US" sz="900" dirty="0">
+                          <a:solidFill>
+                            <a:srgbClr val="000000"/>
+                          </a:solidFill>
+                          <a:latin typeface="Calibri" pitchFamily="34" charset="0"/>
+                          <a:ea typeface="Calibri" pitchFamily="34" charset="-122"/>
+                          <a:cs typeface="Calibri" pitchFamily="34" charset="-120"/>
+                        </a:rPr>
+                        <a:t>0</a:t>
+                      </a:r>
+                      <a:endParaRPr lang="en-US" sz="900" dirty="0">
+                        <a:latin typeface="Calibri" charset="0"/>
+                        <a:ea typeface="Calibri" charset="0"/>
+                        <a:cs typeface="Calibri" charset="0"/>
+                      </a:endParaRPr>
+                    </a:p>
+                  </a:txBody>
+                  <a:tcPr marL="91440" marR="91440" marT="45720" marB="45720">
+                    <a:lnL w="6350" cap="flat" cmpd="sng" algn="ctr">
+                      <a:solidFill>
+                        <a:srgbClr val="CCCCCC"/>
+                      </a:solidFill>
+                      <a:prstDash val="solid"/>
+                      <a:round/>
+                      <a:headEnd type="none" w="med" len="med"/>
+                      <a:tailEnd type="none" w="med" len="med"/>
+                    </a:lnL>
+                    <a:lnR w="6350" cap="flat" cmpd="sng" algn="ctr">
+                      <a:solidFill>
+                        <a:srgbClr val="CCCCCC"/>
+                      </a:solidFill>
+                      <a:prstDash val="solid"/>
+                      <a:round/>
+                      <a:headEnd type="none" w="med" len="med"/>
+                      <a:tailEnd type="none" w="med" len="med"/>
+                    </a:lnR>
+                    <a:lnT w="6350" cap="flat" cmpd="sng" algn="ctr">
+                      <a:solidFill>
+                        <a:srgbClr val="CCCCCC"/>
+                      </a:solidFill>
+                      <a:prstDash val="solid"/>
+                      <a:round/>
+                      <a:headEnd type="none" w="med" len="med"/>
+                      <a:tailEnd type="none" w="med" len="med"/>
+                    </a:lnT>
+                    <a:lnB w="6350" cap="flat" cmpd="sng" algn="ctr">
+                      <a:solidFill>
+                        <a:srgbClr val="CCCCCC"/>
+                      </a:solidFill>
+                      <a:prstDash val="solid"/>
+                      <a:round/>
+                      <a:headEnd type="none" w="med" len="med"/>
+                      <a:tailEnd type="none" w="med" len="med"/>
+                    </a:lnB>
+                    <a:solidFill>
+                      <a:srgbClr val="FFFFFF"/>
+                    </a:solidFill>
+                  </a:tcPr>
+                </a:tc>
+                <a:tc>
+                  <a:txBody>
+                    <a:bodyPr/>
+                    <a:lstStyle/>
+                    <a:p>
+                      <a:pPr indent="0" marL="0">
+                        <a:buNone/>
+                      </a:pPr>
+                      <a:r>
+                        <a:rPr lang="en-US" sz="900" dirty="0">
+                          <a:solidFill>
+                            <a:srgbClr val="000000"/>
+                          </a:solidFill>
+                          <a:latin typeface="Calibri" pitchFamily="34" charset="0"/>
+                          <a:ea typeface="Calibri" pitchFamily="34" charset="-122"/>
+                          <a:cs typeface="Calibri" pitchFamily="34" charset="-120"/>
+                        </a:rPr>
+                        <a:t>0</a:t>
+                      </a:r>
+                      <a:endParaRPr lang="en-US" sz="900" dirty="0">
+                        <a:latin typeface="Calibri" charset="0"/>
+                        <a:ea typeface="Calibri" charset="0"/>
+                        <a:cs typeface="Calibri" charset="0"/>
+                      </a:endParaRPr>
+                    </a:p>
+                  </a:txBody>
+                  <a:tcPr marL="91440" marR="91440" marT="45720" marB="45720">
+                    <a:lnL w="6350" cap="flat" cmpd="sng" algn="ctr">
+                      <a:solidFill>
+                        <a:srgbClr val="CCCCCC"/>
+                      </a:solidFill>
+                      <a:prstDash val="solid"/>
+                      <a:round/>
+                      <a:headEnd type="none" w="med" len="med"/>
+                      <a:tailEnd type="none" w="med" len="med"/>
+                    </a:lnL>
+                    <a:lnR w="6350" cap="flat" cmpd="sng" algn="ctr">
+                      <a:solidFill>
+                        <a:srgbClr val="CCCCCC"/>
+                      </a:solidFill>
+                      <a:prstDash val="solid"/>
+                      <a:round/>
+                      <a:headEnd type="none" w="med" len="med"/>
+                      <a:tailEnd type="none" w="med" len="med"/>
+                    </a:lnR>
+                    <a:lnT w="6350" cap="flat" cmpd="sng" algn="ctr">
+                      <a:solidFill>
+                        <a:srgbClr val="CCCCCC"/>
+                      </a:solidFill>
+                      <a:prstDash val="solid"/>
+                      <a:round/>
+                      <a:headEnd type="none" w="med" len="med"/>
+                      <a:tailEnd type="none" w="med" len="med"/>
+                    </a:lnT>
+                    <a:lnB w="6350" cap="flat" cmpd="sng" algn="ctr">
+                      <a:solidFill>
+                        <a:srgbClr val="CCCCCC"/>
+                      </a:solidFill>
+                      <a:prstDash val="solid"/>
+                      <a:round/>
+                      <a:headEnd type="none" w="med" len="med"/>
+                      <a:tailEnd type="none" w="med" len="med"/>
+                    </a:lnB>
+                    <a:solidFill>
+                      <a:srgbClr val="FFFFFF"/>
+                    </a:solidFill>
+                  </a:tcPr>
+                </a:tc>
+                <a:tc>
+                  <a:txBody>
+                    <a:bodyPr/>
+                    <a:lstStyle/>
+                    <a:p>
+                      <a:pPr indent="0" marL="0">
+                        <a:buNone/>
+                      </a:pPr>
+                      <a:r>
+                        <a:rPr lang="en-US" sz="900" dirty="0">
+                          <a:solidFill>
+                            <a:srgbClr val="000000"/>
+                          </a:solidFill>
+                          <a:latin typeface="Calibri" pitchFamily="34" charset="0"/>
+                          <a:ea typeface="Calibri" pitchFamily="34" charset="-122"/>
+                          <a:cs typeface="Calibri" pitchFamily="34" charset="-120"/>
+                        </a:rPr>
+                        <a:t>0</a:t>
+                      </a:r>
+                      <a:endParaRPr lang="en-US" sz="900" dirty="0">
+                        <a:latin typeface="Calibri" charset="0"/>
+                        <a:ea typeface="Calibri" charset="0"/>
+                        <a:cs typeface="Calibri" charset="0"/>
+                      </a:endParaRPr>
+                    </a:p>
+                  </a:txBody>
+                  <a:tcPr marL="91440" marR="91440" marT="45720" marB="45720">
+                    <a:lnL w="6350" cap="flat" cmpd="sng" algn="ctr">
+                      <a:solidFill>
+                        <a:srgbClr val="CCCCCC"/>
+                      </a:solidFill>
+                      <a:prstDash val="solid"/>
+                      <a:round/>
+                      <a:headEnd type="none" w="med" len="med"/>
+                      <a:tailEnd type="none" w="med" len="med"/>
+                    </a:lnL>
+                    <a:lnR w="6350" cap="flat" cmpd="sng" algn="ctr">
+                      <a:solidFill>
+                        <a:srgbClr val="CCCCCC"/>
+                      </a:solidFill>
+                      <a:prstDash val="solid"/>
+                      <a:round/>
+                      <a:headEnd type="none" w="med" len="med"/>
+                      <a:tailEnd type="none" w="med" len="med"/>
+                    </a:lnR>
+                    <a:lnT w="6350" cap="flat" cmpd="sng" algn="ctr">
+                      <a:solidFill>
+                        <a:srgbClr val="CCCCCC"/>
+                      </a:solidFill>
+                      <a:prstDash val="solid"/>
+                      <a:round/>
+                      <a:headEnd type="none" w="med" len="med"/>
+                      <a:tailEnd type="none" w="med" len="med"/>
+                    </a:lnT>
+                    <a:lnB w="6350" cap="flat" cmpd="sng" algn="ctr">
+                      <a:solidFill>
+                        <a:srgbClr val="CCCCCC"/>
+                      </a:solidFill>
+                      <a:prstDash val="solid"/>
+                      <a:round/>
+                      <a:headEnd type="none" w="med" len="med"/>
+                      <a:tailEnd type="none" w="med" len="med"/>
+                    </a:lnB>
+                    <a:solidFill>
+                      <a:srgbClr val="FFFFFF"/>
+                    </a:solidFill>
+                  </a:tcPr>
+                </a:tc>
+                <a:tc>
+                  <a:txBody>
+                    <a:bodyPr/>
+                    <a:lstStyle/>
+                    <a:p>
+                      <a:pPr indent="0" marL="0">
+                        <a:buNone/>
+                      </a:pPr>
+                      <a:r>
+                        <a:rPr lang="en-US" sz="900" dirty="0">
+                          <a:solidFill>
+                            <a:srgbClr val="000000"/>
+                          </a:solidFill>
+                          <a:latin typeface="Calibri" pitchFamily="34" charset="0"/>
+                          <a:ea typeface="Calibri" pitchFamily="34" charset="-122"/>
+                          <a:cs typeface="Calibri" pitchFamily="34" charset="-120"/>
+                        </a:rPr>
+                        <a:t>0</a:t>
+                      </a:r>
+                      <a:endParaRPr lang="en-US" sz="900" dirty="0">
+                        <a:latin typeface="Calibri" charset="0"/>
+                        <a:ea typeface="Calibri" charset="0"/>
+                        <a:cs typeface="Calibri" charset="0"/>
+                      </a:endParaRPr>
+                    </a:p>
+                  </a:txBody>
+                  <a:tcPr marL="91440" marR="91440" marT="45720" marB="45720">
+                    <a:lnL w="6350" cap="flat" cmpd="sng" algn="ctr">
+                      <a:solidFill>
+                        <a:srgbClr val="CCCCCC"/>
+                      </a:solidFill>
+                      <a:prstDash val="solid"/>
+                      <a:round/>
+                      <a:headEnd type="none" w="med" len="med"/>
+                      <a:tailEnd type="none" w="med" len="med"/>
+                    </a:lnL>
+                    <a:lnR w="6350" cap="flat" cmpd="sng" algn="ctr">
+                      <a:solidFill>
+                        <a:srgbClr val="CCCCCC"/>
+                      </a:solidFill>
+                      <a:prstDash val="solid"/>
+                      <a:round/>
+                      <a:headEnd type="none" w="med" len="med"/>
+                      <a:tailEnd type="none" w="med" len="med"/>
+                    </a:lnR>
+                    <a:lnT w="6350" cap="flat" cmpd="sng" algn="ctr">
+                      <a:solidFill>
+                        <a:srgbClr val="CCCCCC"/>
+                      </a:solidFill>
+                      <a:prstDash val="solid"/>
+                      <a:round/>
+                      <a:headEnd type="none" w="med" len="med"/>
+                      <a:tailEnd type="none" w="med" len="med"/>
+                    </a:lnT>
+                    <a:lnB w="6350" cap="flat" cmpd="sng" algn="ctr">
+                      <a:solidFill>
+                        <a:srgbClr val="CCCCCC"/>
+                      </a:solidFill>
+                      <a:prstDash val="solid"/>
+                      <a:round/>
+                      <a:headEnd type="none" w="med" len="med"/>
+                      <a:tailEnd type="none" w="med" len="med"/>
+                    </a:lnB>
+                    <a:solidFill>
+                      <a:srgbClr val="FFFFFF"/>
+                    </a:solidFill>
+                  </a:tcPr>
+                </a:tc>
+                <a:tc>
+                  <a:txBody>
+                    <a:bodyPr/>
+                    <a:lstStyle/>
+                    <a:p>
+                      <a:pPr indent="0" marL="0">
+                        <a:buNone/>
+                      </a:pPr>
+                      <a:r>
+                        <a:rPr lang="en-US" sz="900" dirty="0">
+                          <a:solidFill>
+                            <a:srgbClr val="000000"/>
+                          </a:solidFill>
+                          <a:latin typeface="Calibri" pitchFamily="34" charset="0"/>
+                          <a:ea typeface="Calibri" pitchFamily="34" charset="-122"/>
+                          <a:cs typeface="Calibri" pitchFamily="34" charset="-120"/>
+                        </a:rPr>
+                        <a:t>0</a:t>
+                      </a:r>
+                      <a:endParaRPr lang="en-US" sz="900" dirty="0">
+                        <a:latin typeface="Calibri" charset="0"/>
+                        <a:ea typeface="Calibri" charset="0"/>
+                        <a:cs typeface="Calibri" charset="0"/>
+                      </a:endParaRPr>
+                    </a:p>
+                  </a:txBody>
+                  <a:tcPr marL="91440" marR="91440" marT="45720" marB="45720">
+                    <a:lnL w="6350" cap="flat" cmpd="sng" algn="ctr">
+                      <a:solidFill>
+                        <a:srgbClr val="CCCCCC"/>
+                      </a:solidFill>
+                      <a:prstDash val="solid"/>
+                      <a:round/>
+                      <a:headEnd type="none" w="med" len="med"/>
+                      <a:tailEnd type="none" w="med" len="med"/>
+                    </a:lnL>
+                    <a:lnR w="6350" cap="flat" cmpd="sng" algn="ctr">
+                      <a:solidFill>
+                        <a:srgbClr val="CCCCCC"/>
+                      </a:solidFill>
+                      <a:prstDash val="solid"/>
+                      <a:round/>
+                      <a:headEnd type="none" w="med" len="med"/>
+                      <a:tailEnd type="none" w="med" len="med"/>
+                    </a:lnR>
+                    <a:lnT w="6350" cap="flat" cmpd="sng" algn="ctr">
+                      <a:solidFill>
+                        <a:srgbClr val="CCCCCC"/>
+                      </a:solidFill>
+                      <a:prstDash val="solid"/>
+                      <a:round/>
+                      <a:headEnd type="none" w="med" len="med"/>
+                      <a:tailEnd type="none" w="med" len="med"/>
+                    </a:lnT>
+                    <a:lnB w="6350" cap="flat" cmpd="sng" algn="ctr">
+                      <a:solidFill>
+                        <a:srgbClr val="CCCCCC"/>
+                      </a:solidFill>
+                      <a:prstDash val="solid"/>
+                      <a:round/>
+                      <a:headEnd type="none" w="med" len="med"/>
+                      <a:tailEnd type="none" w="med" len="med"/>
+                    </a:lnB>
+                    <a:solidFill>
+                      <a:srgbClr val="FFFFFF"/>
+                    </a:solidFill>
+                  </a:tcPr>
+                </a:tc>
+                <a:tc>
+                  <a:txBody>
+                    <a:bodyPr/>
+                    <a:lstStyle/>
+                    <a:p>
+                      <a:pPr indent="0" marL="0">
+                        <a:buNone/>
+                      </a:pPr>
+                      <a:r>
+                        <a:rPr lang="en-US" sz="900" dirty="0">
+                          <a:solidFill>
+                            <a:srgbClr val="000000"/>
+                          </a:solidFill>
+                          <a:latin typeface="Calibri" pitchFamily="34" charset="0"/>
+                          <a:ea typeface="Calibri" pitchFamily="34" charset="-122"/>
+                          <a:cs typeface="Calibri" pitchFamily="34" charset="-120"/>
+                        </a:rPr>
+                        <a:t>0</a:t>
+                      </a:r>
+                      <a:endParaRPr lang="en-US" sz="900" dirty="0">
+                        <a:latin typeface="Calibri" charset="0"/>
+                        <a:ea typeface="Calibri" charset="0"/>
+                        <a:cs typeface="Calibri" charset="0"/>
+                      </a:endParaRPr>
+                    </a:p>
+                  </a:txBody>
+                  <a:tcPr marL="91440" marR="91440" marT="45720" marB="45720">
+                    <a:lnL w="6350" cap="flat" cmpd="sng" algn="ctr">
+                      <a:solidFill>
+                        <a:srgbClr val="CCCCCC"/>
+                      </a:solidFill>
+                      <a:prstDash val="solid"/>
+                      <a:round/>
+                      <a:headEnd type="none" w="med" len="med"/>
+                      <a:tailEnd type="none" w="med" len="med"/>
+                    </a:lnL>
+                    <a:lnR w="6350" cap="flat" cmpd="sng" algn="ctr">
+                      <a:solidFill>
+                        <a:srgbClr val="CCCCCC"/>
+                      </a:solidFill>
+                      <a:prstDash val="solid"/>
+                      <a:round/>
+                      <a:headEnd type="none" w="med" len="med"/>
+                      <a:tailEnd type="none" w="med" len="med"/>
+                    </a:lnR>
+                    <a:lnT w="6350" cap="flat" cmpd="sng" algn="ctr">
+                      <a:solidFill>
+                        <a:srgbClr val="CCCCCC"/>
+                      </a:solidFill>
+                      <a:prstDash val="solid"/>
+                      <a:round/>
+                      <a:headEnd type="none" w="med" len="med"/>
+                      <a:tailEnd type="none" w="med" len="med"/>
+                    </a:lnT>
+                    <a:lnB w="6350" cap="flat" cmpd="sng" algn="ctr">
+                      <a:solidFill>
+                        <a:srgbClr val="CCCCCC"/>
+                      </a:solidFill>
+                      <a:prstDash val="solid"/>
+                      <a:round/>
+                      <a:headEnd type="none" w="med" len="med"/>
+                      <a:tailEnd type="none" w="med" len="med"/>
+                    </a:lnB>
+                    <a:solidFill>
+                      <a:srgbClr val="FFFFFF"/>
+                    </a:solidFill>
+                  </a:tcPr>
+                </a:tc>
+                <a:tc>
+                  <a:txBody>
+                    <a:bodyPr/>
+                    <a:lstStyle/>
+                    <a:p>
+                      <a:pPr indent="0" marL="0">
+                        <a:buNone/>
+                      </a:pPr>
+                      <a:r>
+                        <a:rPr lang="en-US" sz="900" dirty="0">
+                          <a:solidFill>
+                            <a:srgbClr val="000000"/>
+                          </a:solidFill>
+                          <a:latin typeface="Calibri" pitchFamily="34" charset="0"/>
+                          <a:ea typeface="Calibri" pitchFamily="34" charset="-122"/>
+                          <a:cs typeface="Calibri" pitchFamily="34" charset="-120"/>
+                        </a:rPr>
+                        <a:t>—</a:t>
+                      </a:r>
+                      <a:endParaRPr lang="en-US" sz="900" dirty="0">
+                        <a:latin typeface="Calibri" charset="0"/>
+                        <a:ea typeface="Calibri" charset="0"/>
+                        <a:cs typeface="Calibri" charset="0"/>
+                      </a:endParaRPr>
+                    </a:p>
+                  </a:txBody>
+                  <a:tcPr marL="91440" marR="91440" marT="45720" marB="45720">
+                    <a:lnL w="6350" cap="flat" cmpd="sng" algn="ctr">
+                      <a:solidFill>
+                        <a:srgbClr val="CCCCCC"/>
+                      </a:solidFill>
+                      <a:prstDash val="solid"/>
+                      <a:round/>
+                      <a:headEnd type="none" w="med" len="med"/>
+                      <a:tailEnd type="none" w="med" len="med"/>
+                    </a:lnL>
+                    <a:lnR w="6350" cap="flat" cmpd="sng" algn="ctr">
+                      <a:solidFill>
+                        <a:srgbClr val="CCCCCC"/>
+                      </a:solidFill>
+                      <a:prstDash val="solid"/>
+                      <a:round/>
+                      <a:headEnd type="none" w="med" len="med"/>
+                      <a:tailEnd type="none" w="med" len="med"/>
+                    </a:lnR>
+                    <a:lnT w="6350" cap="flat" cmpd="sng" algn="ctr">
+                      <a:solidFill>
+                        <a:srgbClr val="CCCCCC"/>
+                      </a:solidFill>
+                      <a:prstDash val="solid"/>
+                      <a:round/>
+                      <a:headEnd type="none" w="med" len="med"/>
+                      <a:tailEnd type="none" w="med" len="med"/>
+                    </a:lnT>
+                    <a:lnB w="6350" cap="flat" cmpd="sng" algn="ctr">
+                      <a:solidFill>
+                        <a:srgbClr val="CCCCCC"/>
+                      </a:solidFill>
+                      <a:prstDash val="solid"/>
+                      <a:round/>
+                      <a:headEnd type="none" w="med" len="med"/>
+                      <a:tailEnd type="none" w="med" len="med"/>
+                    </a:lnB>
+                    <a:solidFill>
+                      <a:srgbClr val="FFFFFF"/>
+                    </a:solidFill>
+                  </a:tcPr>
+                </a:tc>
+                <a:tc>
+                  <a:txBody>
+                    <a:bodyPr/>
+                    <a:lstStyle/>
+                    <a:p>
+                      <a:pPr indent="0" marL="0">
+                        <a:buNone/>
+                      </a:pPr>
+                      <a:r>
+                        <a:rPr lang="en-US" sz="900" dirty="0">
+                          <a:solidFill>
+                            <a:srgbClr val="000000"/>
+                          </a:solidFill>
+                          <a:latin typeface="Calibri" pitchFamily="34" charset="0"/>
+                          <a:ea typeface="Calibri" pitchFamily="34" charset="-122"/>
+                          <a:cs typeface="Calibri" pitchFamily="34" charset="-120"/>
+                        </a:rPr>
+                        <a:t>1</a:t>
+                      </a:r>
+                      <a:endParaRPr lang="en-US" sz="900" dirty="0">
+                        <a:latin typeface="Calibri" charset="0"/>
+                        <a:ea typeface="Calibri" charset="0"/>
+                        <a:cs typeface="Calibri" charset="0"/>
+                      </a:endParaRPr>
+                    </a:p>
+                  </a:txBody>
+                  <a:tcPr marL="91440" marR="91440" marT="45720" marB="45720">
+                    <a:lnL w="6350" cap="flat" cmpd="sng" algn="ctr">
+                      <a:solidFill>
+                        <a:srgbClr val="CCCCCC"/>
+                      </a:solidFill>
+                      <a:prstDash val="solid"/>
+                      <a:round/>
+                      <a:headEnd type="none" w="med" len="med"/>
+                      <a:tailEnd type="none" w="med" len="med"/>
+                    </a:lnL>
+                    <a:lnR w="6350" cap="flat" cmpd="sng" algn="ctr">
+                      <a:solidFill>
+                        <a:srgbClr val="CCCCCC"/>
+                      </a:solidFill>
+                      <a:prstDash val="solid"/>
+                      <a:round/>
+                      <a:headEnd type="none" w="med" len="med"/>
+                      <a:tailEnd type="none" w="med" len="med"/>
+                    </a:lnR>
+                    <a:lnT w="6350" cap="flat" cmpd="sng" algn="ctr">
+                      <a:solidFill>
+                        <a:srgbClr val="CCCCCC"/>
+                      </a:solidFill>
+                      <a:prstDash val="solid"/>
+                      <a:round/>
+                      <a:headEnd type="none" w="med" len="med"/>
+                      <a:tailEnd type="none" w="med" len="med"/>
+                    </a:lnT>
+                    <a:lnB w="6350" cap="flat" cmpd="sng" algn="ctr">
+                      <a:solidFill>
+                        <a:srgbClr val="CCCCCC"/>
+                      </a:solidFill>
+                      <a:prstDash val="solid"/>
+                      <a:round/>
+                      <a:headEnd type="none" w="med" len="med"/>
+                      <a:tailEnd type="none" w="med" len="med"/>
+                    </a:lnB>
+                    <a:solidFill>
+                      <a:srgbClr val="FFFFFF"/>
+                    </a:solidFill>
+                  </a:tcPr>
+                </a:tc>
+              </a:tr>
+            </a:tbl>
+          </a:graphicData>
+        </a:graphic>
+      </p:graphicFrame>
     </p:spTree>
   </p:cSld>
   <p:clrMapOvr>
@@ -3902,7 +8593,7 @@
     <p:bg>
       <p:bgPr>
         <a:solidFill>
-          <a:srgbClr val="1B5E20"/>
+          <a:srgbClr val="F5F7FA"/>
         </a:solidFill>
       </p:bgPr>
     </p:bg>
@@ -3920,40 +8611,36 @@
           <a:chExt cx="0" cy="0"/>
         </a:xfrm>
       </p:grpSpPr>
-      <p:pic>
-        <p:nvPicPr>
-          <p:cNvPr id="2" name="Image 0" descr="preencoded.png">    </p:cNvPr>
-          <p:cNvPicPr>
-            <a:picLocks noChangeAspect="1"/>
-          </p:cNvPicPr>
-          <p:nvPr/>
-        </p:nvPicPr>
-        <p:blipFill>
-          <a:blip r:embed="rId1"/>
-          <a:stretch>
-            <a:fillRect/>
-          </a:stretch>
-        </p:blipFill>
-        <p:spPr>
-          <a:xfrm>
-            <a:off x="4023360" y="457200"/>
-            <a:ext cx="1097280" cy="1097280"/>
-          </a:xfrm>
-          <a:prstGeom prst="rect">
-            <a:avLst/>
-          </a:prstGeom>
-        </p:spPr>
-      </p:pic>
-      <p:sp>
-        <p:nvSpPr>
-          <p:cNvPr id="3" name="Text 0"/>
-          <p:cNvSpPr/>
-          <p:nvPr/>
-        </p:nvSpPr>
-        <p:spPr>
-          <a:xfrm>
-            <a:off x="457200" y="1737360"/>
-            <a:ext cx="8229600" cy="548640"/>
+      <p:sp>
+        <p:nvSpPr>
+          <p:cNvPr id="2" name="Shape 0"/>
+          <p:cNvSpPr/>
+          <p:nvPr/>
+        </p:nvSpPr>
+        <p:spPr>
+          <a:xfrm>
+            <a:off x="0" y="0"/>
+            <a:ext cx="9144000" cy="54864"/>
+          </a:xfrm>
+          <a:prstGeom prst="rect">
+            <a:avLst/>
+          </a:prstGeom>
+          <a:solidFill>
+            <a:srgbClr val="2E7D32"/>
+          </a:solidFill>
+          <a:ln/>
+        </p:spPr>
+      </p:sp>
+      <p:sp>
+        <p:nvSpPr>
+          <p:cNvPr id="3" name="Text 1"/>
+          <p:cNvSpPr/>
+          <p:nvPr/>
+        </p:nvSpPr>
+        <p:spPr>
+          <a:xfrm>
+            <a:off x="457200" y="182880"/>
+            <a:ext cx="8229600" cy="594360"/>
           </a:xfrm>
           <a:prstGeom prst="rect">
             <a:avLst/>
@@ -3965,34 +8652,81 @@
           <a:bodyPr wrap="square" lIns="0" tIns="0" rIns="0" bIns="0" rtlCol="0" anchor="ctr"/>
           <a:lstStyle/>
           <a:p>
-            <a:pPr algn="ctr" indent="0" marL="0">
+            <a:pPr indent="0" marL="0">
               <a:buNone/>
             </a:pPr>
             <a:r>
-              <a:rPr lang="en-US" sz="2600" b="1" dirty="0">
+              <a:rPr lang="en-US" sz="2400" b="1" dirty="0">
                 <a:solidFill>
-                  <a:srgbClr val="FFFFFF"/>
+                  <a:srgbClr val="1B5E20"/>
                 </a:solidFill>
                 <a:latin typeface="Trebuchet MS" pitchFamily="34" charset="0"/>
                 <a:ea typeface="Trebuchet MS" pitchFamily="34" charset="-122"/>
                 <a:cs typeface="Trebuchet MS" pitchFamily="34" charset="-120"/>
               </a:rPr>
-              <a:t>🎮 Mini-jeu : Module 4</a:t>
+              <a:t>Le graphe des DF</a:t>
             </a:r>
-            <a:endParaRPr lang="en-US" sz="2600" dirty="0"/>
+            <a:endParaRPr lang="en-US" sz="2400" dirty="0"/>
           </a:p>
         </p:txBody>
       </p:sp>
       <p:sp>
         <p:nvSpPr>
-          <p:cNvPr id="4" name="Text 1"/>
-          <p:cNvSpPr/>
-          <p:nvPr/>
-        </p:nvSpPr>
-        <p:spPr>
-          <a:xfrm>
-            <a:off x="914400" y="2377440"/>
-            <a:ext cx="7315200" cy="457200"/>
+          <p:cNvPr id="4" name="Shape 2"/>
+          <p:cNvSpPr/>
+          <p:nvPr/>
+        </p:nvSpPr>
+        <p:spPr>
+          <a:xfrm>
+            <a:off x="457200" y="914400"/>
+            <a:ext cx="8229600" cy="560397"/>
+          </a:xfrm>
+          <a:prstGeom prst="rect">
+            <a:avLst/>
+          </a:prstGeom>
+          <a:solidFill>
+            <a:srgbClr val="FFFFFF"/>
+          </a:solidFill>
+          <a:ln/>
+          <a:effectLst>
+            <a:outerShdw sx="100000" sy="100000" kx="0" ky="0" algn="bl" rotWithShape="0" blurRad="50800" dist="25400" dir="8100000">
+              <a:srgbClr val="000000">
+                <a:alpha val="12000"/>
+              </a:srgbClr>
+            </a:outerShdw>
+          </a:effectLst>
+        </p:spPr>
+      </p:sp>
+      <p:sp>
+        <p:nvSpPr>
+          <p:cNvPr id="5" name="Shape 3"/>
+          <p:cNvSpPr/>
+          <p:nvPr/>
+        </p:nvSpPr>
+        <p:spPr>
+          <a:xfrm>
+            <a:off x="457200" y="914400"/>
+            <a:ext cx="45720" cy="560397"/>
+          </a:xfrm>
+          <a:prstGeom prst="rect">
+            <a:avLst/>
+          </a:prstGeom>
+          <a:solidFill>
+            <a:srgbClr val="2E7D32"/>
+          </a:solidFill>
+          <a:ln/>
+        </p:spPr>
+      </p:sp>
+      <p:sp>
+        <p:nvSpPr>
+          <p:cNvPr id="6" name="Text 4"/>
+          <p:cNvSpPr/>
+          <p:nvPr/>
+        </p:nvSpPr>
+        <p:spPr>
+          <a:xfrm>
+            <a:off x="685800" y="914400"/>
+            <a:ext cx="7818120" cy="560397"/>
           </a:xfrm>
           <a:prstGeom prst="rect">
             <a:avLst/>
@@ -4004,54 +8738,81 @@
           <a:bodyPr wrap="square" lIns="0" tIns="0" rIns="0" bIns="0" rtlCol="0" anchor="ctr"/>
           <a:lstStyle/>
           <a:p>
-            <a:pPr algn="ctr" indent="0" marL="0">
+            <a:pPr indent="0" marL="0">
               <a:buNone/>
             </a:pPr>
             <a:r>
-              <a:rPr lang="en-US" sz="1400" dirty="0">
+              <a:rPr lang="en-US" sz="1200" dirty="0">
                 <a:solidFill>
-                  <a:srgbClr val="CCCCCC"/>
+                  <a:srgbClr val="1A1A2E"/>
                 </a:solidFill>
                 <a:latin typeface="Calibri" pitchFamily="34" charset="0"/>
                 <a:ea typeface="Calibri" pitchFamily="34" charset="-122"/>
                 <a:cs typeface="Calibri" pitchFamily="34" charset="-120"/>
               </a:rPr>
-              <a:t>Quiz interactif + Score + Correction automatique</a:t>
+              <a:t>Représentation VISUELLE de la matrice</a:t>
             </a:r>
-            <a:endParaRPr lang="en-US" sz="1400" dirty="0"/>
+            <a:endParaRPr lang="en-US" sz="1200" dirty="0"/>
           </a:p>
         </p:txBody>
       </p:sp>
       <p:sp>
         <p:nvSpPr>
-          <p:cNvPr id="5" name="Shape 2"/>
-          <p:cNvSpPr/>
-          <p:nvPr/>
-        </p:nvSpPr>
-        <p:spPr>
-          <a:xfrm>
-            <a:off x="2286000" y="3200400"/>
-            <a:ext cx="4572000" cy="548640"/>
-          </a:xfrm>
-          <a:prstGeom prst="rect">
-            <a:avLst/>
-          </a:prstGeom>
-          <a:solidFill>
-            <a:srgbClr val="FF6F00"/>
-          </a:solidFill>
-          <a:ln/>
-        </p:spPr>
-      </p:sp>
-      <p:sp>
-        <p:nvSpPr>
-          <p:cNvPr id="6" name="Text 3"/>
-          <p:cNvSpPr/>
-          <p:nvPr/>
-        </p:nvSpPr>
-        <p:spPr>
-          <a:xfrm>
-            <a:off x="2286000" y="3200400"/>
-            <a:ext cx="4572000" cy="548640"/>
+          <p:cNvPr id="7" name="Shape 5"/>
+          <p:cNvSpPr/>
+          <p:nvPr/>
+        </p:nvSpPr>
+        <p:spPr>
+          <a:xfrm>
+            <a:off x="457200" y="1502229"/>
+            <a:ext cx="8229600" cy="560397"/>
+          </a:xfrm>
+          <a:prstGeom prst="rect">
+            <a:avLst/>
+          </a:prstGeom>
+          <a:solidFill>
+            <a:srgbClr val="E8F5E9"/>
+          </a:solidFill>
+          <a:ln/>
+          <a:effectLst>
+            <a:outerShdw sx="100000" sy="100000" kx="0" ky="0" algn="bl" rotWithShape="0" blurRad="50800" dist="25400" dir="8100000">
+              <a:srgbClr val="000000">
+                <a:alpha val="12000"/>
+              </a:srgbClr>
+            </a:outerShdw>
+          </a:effectLst>
+        </p:spPr>
+      </p:sp>
+      <p:sp>
+        <p:nvSpPr>
+          <p:cNvPr id="8" name="Shape 6"/>
+          <p:cNvSpPr/>
+          <p:nvPr/>
+        </p:nvSpPr>
+        <p:spPr>
+          <a:xfrm>
+            <a:off x="457200" y="1502229"/>
+            <a:ext cx="45720" cy="560397"/>
+          </a:xfrm>
+          <a:prstGeom prst="rect">
+            <a:avLst/>
+          </a:prstGeom>
+          <a:solidFill>
+            <a:srgbClr val="2E7D32"/>
+          </a:solidFill>
+          <a:ln/>
+        </p:spPr>
+      </p:sp>
+      <p:sp>
+        <p:nvSpPr>
+          <p:cNvPr id="9" name="Text 7"/>
+          <p:cNvSpPr/>
+          <p:nvPr/>
+        </p:nvSpPr>
+        <p:spPr>
+          <a:xfrm>
+            <a:off x="685800" y="1502229"/>
+            <a:ext cx="7818120" cy="560397"/>
           </a:xfrm>
           <a:prstGeom prst="rect">
             <a:avLst/>
@@ -4063,21 +8824,451 @@
           <a:bodyPr wrap="square" lIns="0" tIns="0" rIns="0" bIns="0" rtlCol="0" anchor="ctr"/>
           <a:lstStyle/>
           <a:p>
-            <a:pPr algn="ctr" indent="0" marL="0">
+            <a:pPr indent="0" marL="0">
               <a:buNone/>
             </a:pPr>
             <a:r>
-              <a:rPr lang="en-US" sz="1800" b="1" dirty="0">
+              <a:rPr lang="en-US" sz="1200" dirty="0">
                 <a:solidFill>
-                  <a:srgbClr val="FFFFFF"/>
+                  <a:srgbClr val="1A1A2E"/>
                 </a:solidFill>
-                <a:latin typeface="Trebuchet MS" pitchFamily="34" charset="0"/>
-                <a:ea typeface="Trebuchet MS" pitchFamily="34" charset="-122"/>
-                <a:cs typeface="Trebuchet MS" pitchFamily="34" charset="-120"/>
+                <a:latin typeface="Calibri" pitchFamily="34" charset="0"/>
+                <a:ea typeface="Calibri" pitchFamily="34" charset="-122"/>
+                <a:cs typeface="Calibri" pitchFamily="34" charset="-120"/>
               </a:rPr>
-              <a:t>▶  Lancer le jeu sur Vercel</a:t>
+              <a:t>Chaque donnée = un nœud (cercle)</a:t>
             </a:r>
-            <a:endParaRPr lang="en-US" sz="1800" dirty="0"/>
+            <a:endParaRPr lang="en-US" sz="1200" dirty="0"/>
+          </a:p>
+        </p:txBody>
+      </p:sp>
+      <p:sp>
+        <p:nvSpPr>
+          <p:cNvPr id="10" name="Shape 8"/>
+          <p:cNvSpPr/>
+          <p:nvPr/>
+        </p:nvSpPr>
+        <p:spPr>
+          <a:xfrm>
+            <a:off x="457200" y="2090057"/>
+            <a:ext cx="8229600" cy="560397"/>
+          </a:xfrm>
+          <a:prstGeom prst="rect">
+            <a:avLst/>
+          </a:prstGeom>
+          <a:solidFill>
+            <a:srgbClr val="FFFFFF"/>
+          </a:solidFill>
+          <a:ln/>
+          <a:effectLst>
+            <a:outerShdw sx="100000" sy="100000" kx="0" ky="0" algn="bl" rotWithShape="0" blurRad="50800" dist="25400" dir="8100000">
+              <a:srgbClr val="000000">
+                <a:alpha val="12000"/>
+              </a:srgbClr>
+            </a:outerShdw>
+          </a:effectLst>
+        </p:spPr>
+      </p:sp>
+      <p:sp>
+        <p:nvSpPr>
+          <p:cNvPr id="11" name="Shape 9"/>
+          <p:cNvSpPr/>
+          <p:nvPr/>
+        </p:nvSpPr>
+        <p:spPr>
+          <a:xfrm>
+            <a:off x="457200" y="2090057"/>
+            <a:ext cx="45720" cy="560397"/>
+          </a:xfrm>
+          <a:prstGeom prst="rect">
+            <a:avLst/>
+          </a:prstGeom>
+          <a:solidFill>
+            <a:srgbClr val="2E7D32"/>
+          </a:solidFill>
+          <a:ln/>
+        </p:spPr>
+      </p:sp>
+      <p:sp>
+        <p:nvSpPr>
+          <p:cNvPr id="12" name="Text 10"/>
+          <p:cNvSpPr/>
+          <p:nvPr/>
+        </p:nvSpPr>
+        <p:spPr>
+          <a:xfrm>
+            <a:off x="685800" y="2090057"/>
+            <a:ext cx="7818120" cy="560397"/>
+          </a:xfrm>
+          <a:prstGeom prst="rect">
+            <a:avLst/>
+          </a:prstGeom>
+          <a:noFill/>
+          <a:ln/>
+        </p:spPr>
+        <p:txBody>
+          <a:bodyPr wrap="square" lIns="0" tIns="0" rIns="0" bIns="0" rtlCol="0" anchor="ctr"/>
+          <a:lstStyle/>
+          <a:p>
+            <a:pPr indent="0" marL="0">
+              <a:buNone/>
+            </a:pPr>
+            <a:r>
+              <a:rPr lang="en-US" sz="1200" dirty="0">
+                <a:solidFill>
+                  <a:srgbClr val="1A1A2E"/>
+                </a:solidFill>
+                <a:latin typeface="Calibri" pitchFamily="34" charset="0"/>
+                <a:ea typeface="Calibri" pitchFamily="34" charset="-122"/>
+                <a:cs typeface="Calibri" pitchFamily="34" charset="-120"/>
+              </a:rPr>
+              <a:t>Chaque DF = une flèche de A vers B</a:t>
+            </a:r>
+            <a:endParaRPr lang="en-US" sz="1200" dirty="0"/>
+          </a:p>
+        </p:txBody>
+      </p:sp>
+      <p:sp>
+        <p:nvSpPr>
+          <p:cNvPr id="13" name="Shape 11"/>
+          <p:cNvSpPr/>
+          <p:nvPr/>
+        </p:nvSpPr>
+        <p:spPr>
+          <a:xfrm>
+            <a:off x="457200" y="2677886"/>
+            <a:ext cx="8229600" cy="560397"/>
+          </a:xfrm>
+          <a:prstGeom prst="rect">
+            <a:avLst/>
+          </a:prstGeom>
+          <a:solidFill>
+            <a:srgbClr val="E8F5E9"/>
+          </a:solidFill>
+          <a:ln/>
+          <a:effectLst>
+            <a:outerShdw sx="100000" sy="100000" kx="0" ky="0" algn="bl" rotWithShape="0" blurRad="50800" dist="25400" dir="8100000">
+              <a:srgbClr val="000000">
+                <a:alpha val="12000"/>
+              </a:srgbClr>
+            </a:outerShdw>
+          </a:effectLst>
+        </p:spPr>
+      </p:sp>
+      <p:sp>
+        <p:nvSpPr>
+          <p:cNvPr id="14" name="Shape 12"/>
+          <p:cNvSpPr/>
+          <p:nvPr/>
+        </p:nvSpPr>
+        <p:spPr>
+          <a:xfrm>
+            <a:off x="457200" y="2677886"/>
+            <a:ext cx="45720" cy="560397"/>
+          </a:xfrm>
+          <a:prstGeom prst="rect">
+            <a:avLst/>
+          </a:prstGeom>
+          <a:solidFill>
+            <a:srgbClr val="2E7D32"/>
+          </a:solidFill>
+          <a:ln/>
+        </p:spPr>
+      </p:sp>
+      <p:sp>
+        <p:nvSpPr>
+          <p:cNvPr id="15" name="Text 13"/>
+          <p:cNvSpPr/>
+          <p:nvPr/>
+        </p:nvSpPr>
+        <p:spPr>
+          <a:xfrm>
+            <a:off x="685800" y="2677886"/>
+            <a:ext cx="7818120" cy="560397"/>
+          </a:xfrm>
+          <a:prstGeom prst="rect">
+            <a:avLst/>
+          </a:prstGeom>
+          <a:noFill/>
+          <a:ln/>
+        </p:spPr>
+        <p:txBody>
+          <a:bodyPr wrap="square" lIns="0" tIns="0" rIns="0" bIns="0" rtlCol="0" anchor="ctr"/>
+          <a:lstStyle/>
+          <a:p>
+            <a:pPr indent="0" marL="0">
+              <a:buNone/>
+            </a:pPr>
+            <a:r>
+              <a:rPr lang="en-US" sz="1200" dirty="0">
+                <a:solidFill>
+                  <a:srgbClr val="1A1A2E"/>
+                </a:solidFill>
+                <a:latin typeface="Calibri" pitchFamily="34" charset="0"/>
+                <a:ea typeface="Calibri" pitchFamily="34" charset="-122"/>
+                <a:cs typeface="Calibri" pitchFamily="34" charset="-120"/>
+              </a:rPr>
+              <a:t>SOURCES = nœuds SANS flèche entrante (pas déterminés par d'autres)</a:t>
+            </a:r>
+            <a:endParaRPr lang="en-US" sz="1200" dirty="0"/>
+          </a:p>
+        </p:txBody>
+      </p:sp>
+      <p:sp>
+        <p:nvSpPr>
+          <p:cNvPr id="16" name="Shape 14"/>
+          <p:cNvSpPr/>
+          <p:nvPr/>
+        </p:nvSpPr>
+        <p:spPr>
+          <a:xfrm>
+            <a:off x="457200" y="3265714"/>
+            <a:ext cx="8229600" cy="560397"/>
+          </a:xfrm>
+          <a:prstGeom prst="rect">
+            <a:avLst/>
+          </a:prstGeom>
+          <a:solidFill>
+            <a:srgbClr val="FFFFFF"/>
+          </a:solidFill>
+          <a:ln/>
+          <a:effectLst>
+            <a:outerShdw sx="100000" sy="100000" kx="0" ky="0" algn="bl" rotWithShape="0" blurRad="50800" dist="25400" dir="8100000">
+              <a:srgbClr val="000000">
+                <a:alpha val="12000"/>
+              </a:srgbClr>
+            </a:outerShdw>
+          </a:effectLst>
+        </p:spPr>
+      </p:sp>
+      <p:sp>
+        <p:nvSpPr>
+          <p:cNvPr id="17" name="Shape 15"/>
+          <p:cNvSpPr/>
+          <p:nvPr/>
+        </p:nvSpPr>
+        <p:spPr>
+          <a:xfrm>
+            <a:off x="457200" y="3265714"/>
+            <a:ext cx="45720" cy="560397"/>
+          </a:xfrm>
+          <a:prstGeom prst="rect">
+            <a:avLst/>
+          </a:prstGeom>
+          <a:solidFill>
+            <a:srgbClr val="2E7D32"/>
+          </a:solidFill>
+          <a:ln/>
+        </p:spPr>
+      </p:sp>
+      <p:sp>
+        <p:nvSpPr>
+          <p:cNvPr id="18" name="Text 16"/>
+          <p:cNvSpPr/>
+          <p:nvPr/>
+        </p:nvSpPr>
+        <p:spPr>
+          <a:xfrm>
+            <a:off x="685800" y="3265714"/>
+            <a:ext cx="7818120" cy="560397"/>
+          </a:xfrm>
+          <a:prstGeom prst="rect">
+            <a:avLst/>
+          </a:prstGeom>
+          <a:noFill/>
+          <a:ln/>
+        </p:spPr>
+        <p:txBody>
+          <a:bodyPr wrap="square" lIns="0" tIns="0" rIns="0" bIns="0" rtlCol="0" anchor="ctr"/>
+          <a:lstStyle/>
+          <a:p>
+            <a:pPr indent="0" marL="0">
+              <a:buNone/>
+            </a:pPr>
+            <a:r>
+              <a:rPr lang="en-US" sz="1200" dirty="0">
+                <a:solidFill>
+                  <a:srgbClr val="1A1A2E"/>
+                </a:solidFill>
+                <a:latin typeface="Calibri" pitchFamily="34" charset="0"/>
+                <a:ea typeface="Calibri" pitchFamily="34" charset="-122"/>
+                <a:cs typeface="Calibri" pitchFamily="34" charset="-120"/>
+              </a:rPr>
+              <a:t>Sources = futures ENTITÉS avec leur identifiant</a:t>
+            </a:r>
+            <a:endParaRPr lang="en-US" sz="1200" dirty="0"/>
+          </a:p>
+        </p:txBody>
+      </p:sp>
+      <p:sp>
+        <p:nvSpPr>
+          <p:cNvPr id="19" name="Shape 17"/>
+          <p:cNvSpPr/>
+          <p:nvPr/>
+        </p:nvSpPr>
+        <p:spPr>
+          <a:xfrm>
+            <a:off x="457200" y="3853543"/>
+            <a:ext cx="8229600" cy="560397"/>
+          </a:xfrm>
+          <a:prstGeom prst="rect">
+            <a:avLst/>
+          </a:prstGeom>
+          <a:solidFill>
+            <a:srgbClr val="E8F5E9"/>
+          </a:solidFill>
+          <a:ln/>
+          <a:effectLst>
+            <a:outerShdw sx="100000" sy="100000" kx="0" ky="0" algn="bl" rotWithShape="0" blurRad="50800" dist="25400" dir="8100000">
+              <a:srgbClr val="000000">
+                <a:alpha val="12000"/>
+              </a:srgbClr>
+            </a:outerShdw>
+          </a:effectLst>
+        </p:spPr>
+      </p:sp>
+      <p:sp>
+        <p:nvSpPr>
+          <p:cNvPr id="20" name="Shape 18"/>
+          <p:cNvSpPr/>
+          <p:nvPr/>
+        </p:nvSpPr>
+        <p:spPr>
+          <a:xfrm>
+            <a:off x="457200" y="3853543"/>
+            <a:ext cx="45720" cy="560397"/>
+          </a:xfrm>
+          <a:prstGeom prst="rect">
+            <a:avLst/>
+          </a:prstGeom>
+          <a:solidFill>
+            <a:srgbClr val="2E7D32"/>
+          </a:solidFill>
+          <a:ln/>
+        </p:spPr>
+      </p:sp>
+      <p:sp>
+        <p:nvSpPr>
+          <p:cNvPr id="21" name="Text 19"/>
+          <p:cNvSpPr/>
+          <p:nvPr/>
+        </p:nvSpPr>
+        <p:spPr>
+          <a:xfrm>
+            <a:off x="685800" y="3853543"/>
+            <a:ext cx="7818120" cy="560397"/>
+          </a:xfrm>
+          <a:prstGeom prst="rect">
+            <a:avLst/>
+          </a:prstGeom>
+          <a:noFill/>
+          <a:ln/>
+        </p:spPr>
+        <p:txBody>
+          <a:bodyPr wrap="square" lIns="0" tIns="0" rIns="0" bIns="0" rtlCol="0" anchor="ctr"/>
+          <a:lstStyle/>
+          <a:p>
+            <a:pPr indent="0" marL="0">
+              <a:buNone/>
+            </a:pPr>
+            <a:r>
+              <a:rPr lang="en-US" sz="1200" dirty="0">
+                <a:solidFill>
+                  <a:srgbClr val="1A1A2E"/>
+                </a:solidFill>
+                <a:latin typeface="Calibri" pitchFamily="34" charset="0"/>
+                <a:ea typeface="Calibri" pitchFamily="34" charset="-122"/>
+                <a:cs typeface="Calibri" pitchFamily="34" charset="-120"/>
+              </a:rPr>
+              <a:t>Les nœuds dépendants = futurs ATTRIBUTS de ces entités</a:t>
+            </a:r>
+            <a:endParaRPr lang="en-US" sz="1200" dirty="0"/>
+          </a:p>
+        </p:txBody>
+      </p:sp>
+      <p:sp>
+        <p:nvSpPr>
+          <p:cNvPr id="22" name="Shape 20"/>
+          <p:cNvSpPr/>
+          <p:nvPr/>
+        </p:nvSpPr>
+        <p:spPr>
+          <a:xfrm>
+            <a:off x="457200" y="4441371"/>
+            <a:ext cx="8229600" cy="560397"/>
+          </a:xfrm>
+          <a:prstGeom prst="rect">
+            <a:avLst/>
+          </a:prstGeom>
+          <a:solidFill>
+            <a:srgbClr val="FFFFFF"/>
+          </a:solidFill>
+          <a:ln/>
+          <a:effectLst>
+            <a:outerShdw sx="100000" sy="100000" kx="0" ky="0" algn="bl" rotWithShape="0" blurRad="50800" dist="25400" dir="8100000">
+              <a:srgbClr val="000000">
+                <a:alpha val="12000"/>
+              </a:srgbClr>
+            </a:outerShdw>
+          </a:effectLst>
+        </p:spPr>
+      </p:sp>
+      <p:sp>
+        <p:nvSpPr>
+          <p:cNvPr id="23" name="Shape 21"/>
+          <p:cNvSpPr/>
+          <p:nvPr/>
+        </p:nvSpPr>
+        <p:spPr>
+          <a:xfrm>
+            <a:off x="457200" y="4441371"/>
+            <a:ext cx="45720" cy="560397"/>
+          </a:xfrm>
+          <a:prstGeom prst="rect">
+            <a:avLst/>
+          </a:prstGeom>
+          <a:solidFill>
+            <a:srgbClr val="2E7D32"/>
+          </a:solidFill>
+          <a:ln/>
+        </p:spPr>
+      </p:sp>
+      <p:sp>
+        <p:nvSpPr>
+          <p:cNvPr id="24" name="Text 22"/>
+          <p:cNvSpPr/>
+          <p:nvPr/>
+        </p:nvSpPr>
+        <p:spPr>
+          <a:xfrm>
+            <a:off x="685800" y="4441371"/>
+            <a:ext cx="7818120" cy="560397"/>
+          </a:xfrm>
+          <a:prstGeom prst="rect">
+            <a:avLst/>
+          </a:prstGeom>
+          <a:noFill/>
+          <a:ln/>
+        </p:spPr>
+        <p:txBody>
+          <a:bodyPr wrap="square" lIns="0" tIns="0" rIns="0" bIns="0" rtlCol="0" anchor="ctr"/>
+          <a:lstStyle/>
+          <a:p>
+            <a:pPr indent="0" marL="0">
+              <a:buNone/>
+            </a:pPr>
+            <a:r>
+              <a:rPr lang="en-US" sz="1200" dirty="0">
+                <a:solidFill>
+                  <a:srgbClr val="1A1A2E"/>
+                </a:solidFill>
+                <a:latin typeface="Calibri" pitchFamily="34" charset="0"/>
+                <a:ea typeface="Calibri" pitchFamily="34" charset="-122"/>
+                <a:cs typeface="Calibri" pitchFamily="34" charset="-120"/>
+              </a:rPr>
+              <a:t>Exercice : dessiner le graphe de SwissSound (Draw.io ou papier)</a:t>
+            </a:r>
+            <a:endParaRPr lang="en-US" sz="1200" dirty="0"/>
           </a:p>
         </p:txBody>
       </p:sp>
@@ -4115,14 +9306,34 @@
       </p:grpSpPr>
       <p:sp>
         <p:nvSpPr>
-          <p:cNvPr id="2" name="Text 0"/>
-          <p:cNvSpPr/>
-          <p:nvPr/>
-        </p:nvSpPr>
-        <p:spPr>
-          <a:xfrm>
-            <a:off x="457200" y="228600"/>
-            <a:ext cx="8229600" cy="457200"/>
+          <p:cNvPr id="2" name="Shape 0"/>
+          <p:cNvSpPr/>
+          <p:nvPr/>
+        </p:nvSpPr>
+        <p:spPr>
+          <a:xfrm>
+            <a:off x="0" y="0"/>
+            <a:ext cx="9144000" cy="54864"/>
+          </a:xfrm>
+          <a:prstGeom prst="rect">
+            <a:avLst/>
+          </a:prstGeom>
+          <a:solidFill>
+            <a:srgbClr val="2E7D32"/>
+          </a:solidFill>
+          <a:ln/>
+        </p:spPr>
+      </p:sp>
+      <p:sp>
+        <p:nvSpPr>
+          <p:cNvPr id="3" name="Text 1"/>
+          <p:cNvSpPr/>
+          <p:nvPr/>
+        </p:nvSpPr>
+        <p:spPr>
+          <a:xfrm>
+            <a:off x="457200" y="182880"/>
+            <a:ext cx="8229600" cy="594360"/>
           </a:xfrm>
           <a:prstGeom prst="rect">
             <a:avLst/>
@@ -4138,7 +9349,7 @@
               <a:buNone/>
             </a:pPr>
             <a:r>
-              <a:rPr lang="en-US" sz="2000" b="1" dirty="0">
+              <a:rPr lang="en-US" sz="2400" b="1" dirty="0">
                 <a:solidFill>
                   <a:srgbClr val="1B5E20"/>
                 </a:solidFill>
@@ -4146,42 +9357,69 @@
                 <a:ea typeface="Trebuchet MS" pitchFamily="34" charset="-122"/>
                 <a:cs typeface="Trebuchet MS" pitchFamily="34" charset="-120"/>
               </a:rPr>
-              <a:t>📋 Mémo Module 4 — Dépendances fonctionnelles</a:t>
+              <a:t>Des DF au MCD : le pont</a:t>
             </a:r>
-            <a:endParaRPr lang="en-US" sz="2000" dirty="0"/>
+            <a:endParaRPr lang="en-US" sz="2400" dirty="0"/>
           </a:p>
         </p:txBody>
       </p:sp>
       <p:sp>
         <p:nvSpPr>
-          <p:cNvPr id="3" name="Shape 1"/>
-          <p:cNvSpPr/>
-          <p:nvPr/>
-        </p:nvSpPr>
-        <p:spPr>
-          <a:xfrm>
-            <a:off x="457200" y="731520"/>
-            <a:ext cx="8229600" cy="320040"/>
-          </a:xfrm>
-          <a:prstGeom prst="rect">
-            <a:avLst/>
-          </a:prstGeom>
-          <a:solidFill>
-            <a:srgbClr val="FFF3E0"/>
-          </a:solidFill>
-          <a:ln/>
-        </p:spPr>
-      </p:sp>
-      <p:sp>
-        <p:nvSpPr>
-          <p:cNvPr id="4" name="Text 2"/>
-          <p:cNvSpPr/>
-          <p:nvPr/>
-        </p:nvSpPr>
-        <p:spPr>
-          <a:xfrm>
-            <a:off x="640080" y="731520"/>
-            <a:ext cx="7772400" cy="320040"/>
+          <p:cNvPr id="4" name="Shape 2"/>
+          <p:cNvSpPr/>
+          <p:nvPr/>
+        </p:nvSpPr>
+        <p:spPr>
+          <a:xfrm>
+            <a:off x="457200" y="914400"/>
+            <a:ext cx="8229600" cy="566928"/>
+          </a:xfrm>
+          <a:prstGeom prst="rect">
+            <a:avLst/>
+          </a:prstGeom>
+          <a:solidFill>
+            <a:srgbClr val="FFFFFF"/>
+          </a:solidFill>
+          <a:ln/>
+          <a:effectLst>
+            <a:outerShdw sx="100000" sy="100000" kx="0" ky="0" algn="bl" rotWithShape="0" blurRad="50800" dist="25400" dir="8100000">
+              <a:srgbClr val="000000">
+                <a:alpha val="12000"/>
+              </a:srgbClr>
+            </a:outerShdw>
+          </a:effectLst>
+        </p:spPr>
+      </p:sp>
+      <p:sp>
+        <p:nvSpPr>
+          <p:cNvPr id="5" name="Shape 3"/>
+          <p:cNvSpPr/>
+          <p:nvPr/>
+        </p:nvSpPr>
+        <p:spPr>
+          <a:xfrm>
+            <a:off x="457200" y="914400"/>
+            <a:ext cx="45720" cy="566928"/>
+          </a:xfrm>
+          <a:prstGeom prst="rect">
+            <a:avLst/>
+          </a:prstGeom>
+          <a:solidFill>
+            <a:srgbClr val="2E7D32"/>
+          </a:solidFill>
+          <a:ln/>
+        </p:spPr>
+      </p:sp>
+      <p:sp>
+        <p:nvSpPr>
+          <p:cNvPr id="6" name="Text 4"/>
+          <p:cNvSpPr/>
+          <p:nvPr/>
+        </p:nvSpPr>
+        <p:spPr>
+          <a:xfrm>
+            <a:off x="685800" y="914400"/>
+            <a:ext cx="7818120" cy="566928"/>
           </a:xfrm>
           <a:prstGeom prst="rect">
             <a:avLst/>
@@ -4197,30 +9435,30 @@
               <a:buNone/>
             </a:pPr>
             <a:r>
-              <a:rPr lang="en-US" sz="1000" b="1" dirty="0">
+              <a:rPr lang="en-US" sz="1200" dirty="0">
                 <a:solidFill>
-                  <a:srgbClr val="E65100"/>
+                  <a:srgbClr val="1A1A2E"/>
                 </a:solidFill>
                 <a:latin typeface="Calibri" pitchFamily="34" charset="0"/>
                 <a:ea typeface="Calibri" pitchFamily="34" charset="-122"/>
                 <a:cs typeface="Calibri" pitchFamily="34" charset="-120"/>
               </a:rPr>
-              <a:t>🔒 Ce mémo se débloque quand toutes les phases du module sont terminées !</a:t>
+              <a:t>Source id_artiste (→ nom, prenom, email, tel, date) = entité ARTISTE</a:t>
             </a:r>
-            <a:endParaRPr lang="en-US" sz="1000" dirty="0"/>
+            <a:endParaRPr lang="en-US" sz="1200" dirty="0"/>
           </a:p>
         </p:txBody>
       </p:sp>
       <p:sp>
         <p:nvSpPr>
-          <p:cNvPr id="5" name="Shape 3"/>
-          <p:cNvSpPr/>
-          <p:nvPr/>
-        </p:nvSpPr>
-        <p:spPr>
-          <a:xfrm>
-            <a:off x="457200" y="1188720"/>
-            <a:ext cx="8229600" cy="713232"/>
+          <p:cNvPr id="7" name="Shape 5"/>
+          <p:cNvSpPr/>
+          <p:nvPr/>
+        </p:nvSpPr>
+        <p:spPr>
+          <a:xfrm>
+            <a:off x="457200" y="1508760"/>
+            <a:ext cx="8229600" cy="566928"/>
           </a:xfrm>
           <a:prstGeom prst="rect">
             <a:avLst/>
@@ -4229,18 +9467,45 @@
             <a:srgbClr val="E8F5E9"/>
           </a:solidFill>
           <a:ln/>
-        </p:spPr>
-      </p:sp>
-      <p:sp>
-        <p:nvSpPr>
-          <p:cNvPr id="6" name="Text 4"/>
-          <p:cNvSpPr/>
-          <p:nvPr/>
-        </p:nvSpPr>
-        <p:spPr>
-          <a:xfrm>
-            <a:off x="640080" y="1188720"/>
-            <a:ext cx="2560320" cy="713232"/>
+          <a:effectLst>
+            <a:outerShdw sx="100000" sy="100000" kx="0" ky="0" algn="bl" rotWithShape="0" blurRad="50800" dist="25400" dir="8100000">
+              <a:srgbClr val="000000">
+                <a:alpha val="12000"/>
+              </a:srgbClr>
+            </a:outerShdw>
+          </a:effectLst>
+        </p:spPr>
+      </p:sp>
+      <p:sp>
+        <p:nvSpPr>
+          <p:cNvPr id="8" name="Shape 6"/>
+          <p:cNvSpPr/>
+          <p:nvPr/>
+        </p:nvSpPr>
+        <p:spPr>
+          <a:xfrm>
+            <a:off x="457200" y="1508760"/>
+            <a:ext cx="45720" cy="566928"/>
+          </a:xfrm>
+          <a:prstGeom prst="rect">
+            <a:avLst/>
+          </a:prstGeom>
+          <a:solidFill>
+            <a:srgbClr val="2E7D32"/>
+          </a:solidFill>
+          <a:ln/>
+        </p:spPr>
+      </p:sp>
+      <p:sp>
+        <p:nvSpPr>
+          <p:cNvPr id="9" name="Text 7"/>
+          <p:cNvSpPr/>
+          <p:nvPr/>
+        </p:nvSpPr>
+        <p:spPr>
+          <a:xfrm>
+            <a:off x="685800" y="1508760"/>
+            <a:ext cx="7818120" cy="566928"/>
           </a:xfrm>
           <a:prstGeom prst="rect">
             <a:avLst/>
@@ -4256,30 +9521,77 @@
               <a:buNone/>
             </a:pPr>
             <a:r>
-              <a:rPr lang="en-US" sz="1000" b="1" dirty="0">
+              <a:rPr lang="en-US" sz="1200" dirty="0">
                 <a:solidFill>
-                  <a:srgbClr val="1B5E20"/>
+                  <a:srgbClr val="1A1A2E"/>
                 </a:solidFill>
-                <a:latin typeface="Trebuchet MS" pitchFamily="34" charset="0"/>
-                <a:ea typeface="Trebuchet MS" pitchFamily="34" charset="-122"/>
-                <a:cs typeface="Trebuchet MS" pitchFamily="34" charset="-120"/>
+                <a:latin typeface="Calibri" pitchFamily="34" charset="0"/>
+                <a:ea typeface="Calibri" pitchFamily="34" charset="-122"/>
+                <a:cs typeface="Calibri" pitchFamily="34" charset="-120"/>
               </a:rPr>
-              <a:t>Dépendance fonctionnelle (DF)</a:t>
+              <a:t>Source id_album (→ titre, date_sortie, prix, nb_pistes) = entité ALBUM</a:t>
             </a:r>
-            <a:endParaRPr lang="en-US" sz="1000" dirty="0"/>
+            <a:endParaRPr lang="en-US" sz="1200" dirty="0"/>
           </a:p>
         </p:txBody>
       </p:sp>
       <p:sp>
         <p:nvSpPr>
-          <p:cNvPr id="7" name="Text 5"/>
-          <p:cNvSpPr/>
-          <p:nvPr/>
-        </p:nvSpPr>
-        <p:spPr>
-          <a:xfrm>
-            <a:off x="3291840" y="1188720"/>
-            <a:ext cx="5212080" cy="713232"/>
+          <p:cNvPr id="10" name="Shape 8"/>
+          <p:cNvSpPr/>
+          <p:nvPr/>
+        </p:nvSpPr>
+        <p:spPr>
+          <a:xfrm>
+            <a:off x="457200" y="2103120"/>
+            <a:ext cx="8229600" cy="566928"/>
+          </a:xfrm>
+          <a:prstGeom prst="rect">
+            <a:avLst/>
+          </a:prstGeom>
+          <a:solidFill>
+            <a:srgbClr val="FFFFFF"/>
+          </a:solidFill>
+          <a:ln/>
+          <a:effectLst>
+            <a:outerShdw sx="100000" sy="100000" kx="0" ky="0" algn="bl" rotWithShape="0" blurRad="50800" dist="25400" dir="8100000">
+              <a:srgbClr val="000000">
+                <a:alpha val="12000"/>
+              </a:srgbClr>
+            </a:outerShdw>
+          </a:effectLst>
+        </p:spPr>
+      </p:sp>
+      <p:sp>
+        <p:nvSpPr>
+          <p:cNvPr id="11" name="Shape 9"/>
+          <p:cNvSpPr/>
+          <p:nvPr/>
+        </p:nvSpPr>
+        <p:spPr>
+          <a:xfrm>
+            <a:off x="457200" y="2103120"/>
+            <a:ext cx="45720" cy="566928"/>
+          </a:xfrm>
+          <a:prstGeom prst="rect">
+            <a:avLst/>
+          </a:prstGeom>
+          <a:solidFill>
+            <a:srgbClr val="2E7D32"/>
+          </a:solidFill>
+          <a:ln/>
+        </p:spPr>
+      </p:sp>
+      <p:sp>
+        <p:nvSpPr>
+          <p:cNvPr id="12" name="Text 10"/>
+          <p:cNvSpPr/>
+          <p:nvPr/>
+        </p:nvSpPr>
+        <p:spPr>
+          <a:xfrm>
+            <a:off x="685800" y="2103120"/>
+            <a:ext cx="7818120" cy="566928"/>
           </a:xfrm>
           <a:prstGeom prst="rect">
             <a:avLst/>
@@ -4295,50 +9607,77 @@
               <a:buNone/>
             </a:pPr>
             <a:r>
-              <a:rPr lang="en-US" sz="900" dirty="0">
+              <a:rPr lang="en-US" sz="1200" dirty="0">
                 <a:solidFill>
-                  <a:srgbClr val="333333"/>
+                  <a:srgbClr val="1A1A2E"/>
                 </a:solidFill>
                 <a:latin typeface="Calibri" pitchFamily="34" charset="0"/>
                 <a:ea typeface="Calibri" pitchFamily="34" charset="-122"/>
                 <a:cs typeface="Calibri" pitchFamily="34" charset="-120"/>
               </a:rPr>
-              <a:t>A → B signifie : connaître A permet de déterminer B de façon unique | id_artiste → nom_artiste ✅ (un id = un seul nom) |...</a:t>
+              <a:t>Source id_salle (→ nom_salle, capacite, tarif) = entité SALLE</a:t>
             </a:r>
-            <a:endParaRPr lang="en-US" sz="900" dirty="0"/>
+            <a:endParaRPr lang="en-US" sz="1200" dirty="0"/>
           </a:p>
         </p:txBody>
       </p:sp>
       <p:sp>
         <p:nvSpPr>
-          <p:cNvPr id="8" name="Shape 6"/>
-          <p:cNvSpPr/>
-          <p:nvPr/>
-        </p:nvSpPr>
-        <p:spPr>
-          <a:xfrm>
-            <a:off x="457200" y="1965960"/>
-            <a:ext cx="8229600" cy="713232"/>
-          </a:xfrm>
-          <a:prstGeom prst="rect">
-            <a:avLst/>
-          </a:prstGeom>
-          <a:solidFill>
-            <a:srgbClr val="FFFFFF"/>
-          </a:solidFill>
-          <a:ln/>
-        </p:spPr>
-      </p:sp>
-      <p:sp>
-        <p:nvSpPr>
-          <p:cNvPr id="9" name="Text 7"/>
-          <p:cNvSpPr/>
-          <p:nvPr/>
-        </p:nvSpPr>
-        <p:spPr>
-          <a:xfrm>
-            <a:off x="640080" y="1965960"/>
-            <a:ext cx="2560320" cy="713232"/>
+          <p:cNvPr id="13" name="Shape 11"/>
+          <p:cNvSpPr/>
+          <p:nvPr/>
+        </p:nvSpPr>
+        <p:spPr>
+          <a:xfrm>
+            <a:off x="457200" y="2697480"/>
+            <a:ext cx="8229600" cy="566928"/>
+          </a:xfrm>
+          <a:prstGeom prst="rect">
+            <a:avLst/>
+          </a:prstGeom>
+          <a:solidFill>
+            <a:srgbClr val="E8F5E9"/>
+          </a:solidFill>
+          <a:ln/>
+          <a:effectLst>
+            <a:outerShdw sx="100000" sy="100000" kx="0" ky="0" algn="bl" rotWithShape="0" blurRad="50800" dist="25400" dir="8100000">
+              <a:srgbClr val="000000">
+                <a:alpha val="12000"/>
+              </a:srgbClr>
+            </a:outerShdw>
+          </a:effectLst>
+        </p:spPr>
+      </p:sp>
+      <p:sp>
+        <p:nvSpPr>
+          <p:cNvPr id="14" name="Shape 12"/>
+          <p:cNvSpPr/>
+          <p:nvPr/>
+        </p:nvSpPr>
+        <p:spPr>
+          <a:xfrm>
+            <a:off x="457200" y="2697480"/>
+            <a:ext cx="45720" cy="566928"/>
+          </a:xfrm>
+          <a:prstGeom prst="rect">
+            <a:avLst/>
+          </a:prstGeom>
+          <a:solidFill>
+            <a:srgbClr val="2E7D32"/>
+          </a:solidFill>
+          <a:ln/>
+        </p:spPr>
+      </p:sp>
+      <p:sp>
+        <p:nvSpPr>
+          <p:cNvPr id="15" name="Text 13"/>
+          <p:cNvSpPr/>
+          <p:nvPr/>
+        </p:nvSpPr>
+        <p:spPr>
+          <a:xfrm>
+            <a:off x="685800" y="2697480"/>
+            <a:ext cx="7818120" cy="566928"/>
           </a:xfrm>
           <a:prstGeom prst="rect">
             <a:avLst/>
@@ -4354,30 +9693,77 @@
               <a:buNone/>
             </a:pPr>
             <a:r>
-              <a:rPr lang="en-US" sz="1000" b="1" dirty="0">
+              <a:rPr lang="en-US" sz="1200" dirty="0">
                 <a:solidFill>
-                  <a:srgbClr val="1B5E20"/>
+                  <a:srgbClr val="1A1A2E"/>
                 </a:solidFill>
-                <a:latin typeface="Trebuchet MS" pitchFamily="34" charset="0"/>
-                <a:ea typeface="Trebuchet MS" pitchFamily="34" charset="-122"/>
-                <a:cs typeface="Trebuchet MS" pitchFamily="34" charset="-120"/>
+                <a:latin typeface="Calibri" pitchFamily="34" charset="0"/>
+                <a:ea typeface="Calibri" pitchFamily="34" charset="-122"/>
+                <a:cs typeface="Calibri" pitchFamily="34" charset="-120"/>
               </a:rPr>
-              <a:t>DF transitive</a:t>
+              <a:t>id_album dépend aussi de id_artiste → relation Album-Artiste</a:t>
             </a:r>
-            <a:endParaRPr lang="en-US" sz="1000" dirty="0"/>
+            <a:endParaRPr lang="en-US" sz="1200" dirty="0"/>
           </a:p>
         </p:txBody>
       </p:sp>
       <p:sp>
         <p:nvSpPr>
-          <p:cNvPr id="10" name="Text 8"/>
-          <p:cNvSpPr/>
-          <p:nvPr/>
-        </p:nvSpPr>
-        <p:spPr>
-          <a:xfrm>
-            <a:off x="3291840" y="1965960"/>
-            <a:ext cx="5212080" cy="713232"/>
+          <p:cNvPr id="16" name="Shape 14"/>
+          <p:cNvSpPr/>
+          <p:nvPr/>
+        </p:nvSpPr>
+        <p:spPr>
+          <a:xfrm>
+            <a:off x="457200" y="3291840"/>
+            <a:ext cx="8229600" cy="566928"/>
+          </a:xfrm>
+          <a:prstGeom prst="rect">
+            <a:avLst/>
+          </a:prstGeom>
+          <a:solidFill>
+            <a:srgbClr val="FFFFFF"/>
+          </a:solidFill>
+          <a:ln/>
+          <a:effectLst>
+            <a:outerShdw sx="100000" sy="100000" kx="0" ky="0" algn="bl" rotWithShape="0" blurRad="50800" dist="25400" dir="8100000">
+              <a:srgbClr val="000000">
+                <a:alpha val="12000"/>
+              </a:srgbClr>
+            </a:outerShdw>
+          </a:effectLst>
+        </p:spPr>
+      </p:sp>
+      <p:sp>
+        <p:nvSpPr>
+          <p:cNvPr id="17" name="Shape 15"/>
+          <p:cNvSpPr/>
+          <p:nvPr/>
+        </p:nvSpPr>
+        <p:spPr>
+          <a:xfrm>
+            <a:off x="457200" y="3291840"/>
+            <a:ext cx="45720" cy="566928"/>
+          </a:xfrm>
+          <a:prstGeom prst="rect">
+            <a:avLst/>
+          </a:prstGeom>
+          <a:solidFill>
+            <a:srgbClr val="2E7D32"/>
+          </a:solidFill>
+          <a:ln/>
+        </p:spPr>
+      </p:sp>
+      <p:sp>
+        <p:nvSpPr>
+          <p:cNvPr id="18" name="Text 16"/>
+          <p:cNvSpPr/>
+          <p:nvPr/>
+        </p:nvSpPr>
+        <p:spPr>
+          <a:xfrm>
+            <a:off x="685800" y="3291840"/>
+            <a:ext cx="7818120" cy="566928"/>
           </a:xfrm>
           <a:prstGeom prst="rect">
             <a:avLst/>
@@ -4393,30 +9779,30 @@
               <a:buNone/>
             </a:pPr>
             <a:r>
-              <a:rPr lang="en-US" sz="900" dirty="0">
+              <a:rPr lang="en-US" sz="1200" dirty="0">
                 <a:solidFill>
-                  <a:srgbClr val="333333"/>
+                  <a:srgbClr val="1A1A2E"/>
                 </a:solidFill>
                 <a:latin typeface="Calibri" pitchFamily="34" charset="0"/>
                 <a:ea typeface="Calibri" pitchFamily="34" charset="-122"/>
                 <a:cs typeface="Calibri" pitchFamily="34" charset="-120"/>
               </a:rPr>
-              <a:t>Si A → B et B → C, alors A → C (DF transitive) | Exemple : id_session → id_salle → nom_salle | id_session détermine nom_...</a:t>
+              <a:t>Les DF transitives indiquent des relations entre entités</a:t>
             </a:r>
-            <a:endParaRPr lang="en-US" sz="900" dirty="0"/>
+            <a:endParaRPr lang="en-US" sz="1200" dirty="0"/>
           </a:p>
         </p:txBody>
       </p:sp>
       <p:sp>
         <p:nvSpPr>
-          <p:cNvPr id="11" name="Shape 9"/>
-          <p:cNvSpPr/>
-          <p:nvPr/>
-        </p:nvSpPr>
-        <p:spPr>
-          <a:xfrm>
-            <a:off x="457200" y="2743200"/>
-            <a:ext cx="8229600" cy="713232"/>
+          <p:cNvPr id="19" name="Shape 17"/>
+          <p:cNvSpPr/>
+          <p:nvPr/>
+        </p:nvSpPr>
+        <p:spPr>
+          <a:xfrm>
+            <a:off x="457200" y="3886200"/>
+            <a:ext cx="8229600" cy="566928"/>
           </a:xfrm>
           <a:prstGeom prst="rect">
             <a:avLst/>
@@ -4425,18 +9811,45 @@
             <a:srgbClr val="E8F5E9"/>
           </a:solidFill>
           <a:ln/>
-        </p:spPr>
-      </p:sp>
-      <p:sp>
-        <p:nvSpPr>
-          <p:cNvPr id="12" name="Text 10"/>
-          <p:cNvSpPr/>
-          <p:nvPr/>
-        </p:nvSpPr>
-        <p:spPr>
-          <a:xfrm>
-            <a:off x="640080" y="2743200"/>
-            <a:ext cx="2560320" cy="713232"/>
+          <a:effectLst>
+            <a:outerShdw sx="100000" sy="100000" kx="0" ky="0" algn="bl" rotWithShape="0" blurRad="50800" dist="25400" dir="8100000">
+              <a:srgbClr val="000000">
+                <a:alpha val="12000"/>
+              </a:srgbClr>
+            </a:outerShdw>
+          </a:effectLst>
+        </p:spPr>
+      </p:sp>
+      <p:sp>
+        <p:nvSpPr>
+          <p:cNvPr id="20" name="Shape 18"/>
+          <p:cNvSpPr/>
+          <p:nvPr/>
+        </p:nvSpPr>
+        <p:spPr>
+          <a:xfrm>
+            <a:off x="457200" y="3886200"/>
+            <a:ext cx="45720" cy="566928"/>
+          </a:xfrm>
+          <a:prstGeom prst="rect">
+            <a:avLst/>
+          </a:prstGeom>
+          <a:solidFill>
+            <a:srgbClr val="2E7D32"/>
+          </a:solidFill>
+          <a:ln/>
+        </p:spPr>
+      </p:sp>
+      <p:sp>
+        <p:nvSpPr>
+          <p:cNvPr id="21" name="Text 19"/>
+          <p:cNvSpPr/>
+          <p:nvPr/>
+        </p:nvSpPr>
+        <p:spPr>
+          <a:xfrm>
+            <a:off x="685800" y="3886200"/>
+            <a:ext cx="7818120" cy="566928"/>
           </a:xfrm>
           <a:prstGeom prst="rect">
             <a:avLst/>
@@ -4452,30 +9865,82 @@
               <a:buNone/>
             </a:pPr>
             <a:r>
-              <a:rPr lang="en-US" sz="1000" b="1" dirty="0">
+              <a:rPr lang="en-US" sz="1200" dirty="0">
                 <a:solidFill>
-                  <a:srgbClr val="1B5E20"/>
+                  <a:srgbClr val="1A1A2E"/>
                 </a:solidFill>
-                <a:latin typeface="Trebuchet MS" pitchFamily="34" charset="0"/>
-                <a:ea typeface="Trebuchet MS" pitchFamily="34" charset="-122"/>
-                <a:cs typeface="Trebuchet MS" pitchFamily="34" charset="-120"/>
+                <a:latin typeface="Calibri" pitchFamily="34" charset="0"/>
+                <a:ea typeface="Calibri" pitchFamily="34" charset="-122"/>
+                <a:cs typeface="Calibri" pitchFamily="34" charset="-120"/>
               </a:rPr>
-              <a:t>Matrice des dépendances fonctionnelles</a:t>
+              <a:t>Le graphe des DF prépare DIRECTEMENT le MCD du module suivant</a:t>
             </a:r>
-            <a:endParaRPr lang="en-US" sz="1000" dirty="0"/>
+            <a:endParaRPr lang="en-US" sz="1200" dirty="0"/>
           </a:p>
         </p:txBody>
       </p:sp>
-      <p:sp>
-        <p:nvSpPr>
-          <p:cNvPr id="13" name="Text 11"/>
-          <p:cNvSpPr/>
-          <p:nvPr/>
-        </p:nvSpPr>
-        <p:spPr>
-          <a:xfrm>
-            <a:off x="3291840" y="2743200"/>
-            <a:ext cx="5212080" cy="713232"/>
+    </p:spTree>
+  </p:cSld>
+  <p:clrMapOvr>
+    <a:masterClrMapping/>
+  </p:clrMapOvr>
+</p:sld>
+</file>
+
+<file path=ppt/slides/slide8.xml><?xml version="1.0" encoding="utf-8"?>
+<p:sld xmlns:a="http://schemas.openxmlformats.org/drawingml/2006/main" xmlns:r="http://schemas.openxmlformats.org/officeDocument/2006/relationships" xmlns:p="http://schemas.openxmlformats.org/presentationml/2006/main">
+  <p:cSld name="Slide 8">
+    <p:bg>
+      <p:bgPr>
+        <a:solidFill>
+          <a:srgbClr val="E8F5E9"/>
+        </a:solidFill>
+      </p:bgPr>
+    </p:bg>
+    <p:spTree>
+      <p:nvGrpSpPr>
+        <p:cNvPr id="1" name=""/>
+        <p:cNvGrpSpPr/>
+        <p:nvPr/>
+      </p:nvGrpSpPr>
+      <p:grpSpPr>
+        <a:xfrm>
+          <a:off x="0" y="0"/>
+          <a:ext cx="0" cy="0"/>
+          <a:chOff x="0" y="0"/>
+          <a:chExt cx="0" cy="0"/>
+        </a:xfrm>
+      </p:grpSpPr>
+      <p:sp>
+        <p:nvSpPr>
+          <p:cNvPr id="2" name="Shape 0"/>
+          <p:cNvSpPr/>
+          <p:nvPr/>
+        </p:nvSpPr>
+        <p:spPr>
+          <a:xfrm>
+            <a:off x="0" y="0"/>
+            <a:ext cx="9144000" cy="54864"/>
+          </a:xfrm>
+          <a:prstGeom prst="rect">
+            <a:avLst/>
+          </a:prstGeom>
+          <a:solidFill>
+            <a:srgbClr val="FF6F00"/>
+          </a:solidFill>
+          <a:ln/>
+        </p:spPr>
+      </p:sp>
+      <p:sp>
+        <p:nvSpPr>
+          <p:cNvPr id="3" name="Text 1"/>
+          <p:cNvSpPr/>
+          <p:nvPr/>
+        </p:nvSpPr>
+        <p:spPr>
+          <a:xfrm>
+            <a:off x="457200" y="182880"/>
+            <a:ext cx="8229600" cy="548640"/>
           </a:xfrm>
           <a:prstGeom prst="rect">
             <a:avLst/>
@@ -4491,30 +9956,30 @@
               <a:buNone/>
             </a:pPr>
             <a:r>
-              <a:rPr lang="en-US" sz="900" dirty="0">
+              <a:rPr lang="en-US" sz="2400" b="1" dirty="0">
                 <a:solidFill>
-                  <a:srgbClr val="333333"/>
+                  <a:srgbClr val="1B5E20"/>
                 </a:solidFill>
-                <a:latin typeface="Calibri" pitchFamily="34" charset="0"/>
-                <a:ea typeface="Calibri" pitchFamily="34" charset="-122"/>
-                <a:cs typeface="Calibri" pitchFamily="34" charset="-120"/>
+                <a:latin typeface="Trebuchet MS" pitchFamily="34" charset="0"/>
+                <a:ea typeface="Trebuchet MS" pitchFamily="34" charset="-122"/>
+                <a:cs typeface="Trebuchet MS" pitchFamily="34" charset="-120"/>
               </a:rPr>
-              <a:t>Tableau croisé : données en lignes ET en colonnes | Case (A,B) = 1 si A → B, sinon 0 | Les SOURCES = lignes qui ne sont ...</a:t>
+              <a:t>✏️ Exercice Module 4</a:t>
             </a:r>
-            <a:endParaRPr lang="en-US" sz="900" dirty="0"/>
+            <a:endParaRPr lang="en-US" sz="2400" dirty="0"/>
           </a:p>
         </p:txBody>
       </p:sp>
       <p:sp>
         <p:nvSpPr>
-          <p:cNvPr id="14" name="Shape 12"/>
-          <p:cNvSpPr/>
-          <p:nvPr/>
-        </p:nvSpPr>
-        <p:spPr>
-          <a:xfrm>
-            <a:off x="457200" y="3520440"/>
-            <a:ext cx="8229600" cy="713232"/>
+          <p:cNvPr id="4" name="Shape 2"/>
+          <p:cNvSpPr/>
+          <p:nvPr/>
+        </p:nvSpPr>
+        <p:spPr>
+          <a:xfrm>
+            <a:off x="457200" y="914400"/>
+            <a:ext cx="8229600" cy="566928"/>
           </a:xfrm>
           <a:prstGeom prst="rect">
             <a:avLst/>
@@ -4523,18 +9988,84 @@
             <a:srgbClr val="FFFFFF"/>
           </a:solidFill>
           <a:ln/>
-        </p:spPr>
-      </p:sp>
-      <p:sp>
-        <p:nvSpPr>
-          <p:cNvPr id="15" name="Text 13"/>
-          <p:cNvSpPr/>
-          <p:nvPr/>
-        </p:nvSpPr>
-        <p:spPr>
-          <a:xfrm>
-            <a:off x="640080" y="3520440"/>
-            <a:ext cx="2560320" cy="713232"/>
+          <a:effectLst>
+            <a:outerShdw sx="100000" sy="100000" kx="0" ky="0" algn="bl" rotWithShape="0" blurRad="50800" dist="25400" dir="8100000">
+              <a:srgbClr val="000000">
+                <a:alpha val="12000"/>
+              </a:srgbClr>
+            </a:outerShdw>
+          </a:effectLst>
+        </p:spPr>
+      </p:sp>
+      <p:sp>
+        <p:nvSpPr>
+          <p:cNvPr id="5" name="Shape 3"/>
+          <p:cNvSpPr/>
+          <p:nvPr/>
+        </p:nvSpPr>
+        <p:spPr>
+          <a:xfrm>
+            <a:off x="457200" y="914400"/>
+            <a:ext cx="457200" cy="566928"/>
+          </a:xfrm>
+          <a:prstGeom prst="rect">
+            <a:avLst/>
+          </a:prstGeom>
+          <a:solidFill>
+            <a:srgbClr val="FF6F00"/>
+          </a:solidFill>
+          <a:ln/>
+        </p:spPr>
+      </p:sp>
+      <p:sp>
+        <p:nvSpPr>
+          <p:cNvPr id="6" name="Text 4"/>
+          <p:cNvSpPr/>
+          <p:nvPr/>
+        </p:nvSpPr>
+        <p:spPr>
+          <a:xfrm>
+            <a:off x="457200" y="914400"/>
+            <a:ext cx="457200" cy="566928"/>
+          </a:xfrm>
+          <a:prstGeom prst="rect">
+            <a:avLst/>
+          </a:prstGeom>
+          <a:noFill/>
+          <a:ln/>
+        </p:spPr>
+        <p:txBody>
+          <a:bodyPr wrap="square" lIns="0" tIns="0" rIns="0" bIns="0" rtlCol="0" anchor="ctr"/>
+          <a:lstStyle/>
+          <a:p>
+            <a:pPr algn="ctr" indent="0" marL="0">
+              <a:buNone/>
+            </a:pPr>
+            <a:r>
+              <a:rPr lang="en-US" sz="1600" b="1" dirty="0">
+                <a:solidFill>
+                  <a:srgbClr val="FFFFFF"/>
+                </a:solidFill>
+                <a:latin typeface="Trebuchet MS" pitchFamily="34" charset="0"/>
+                <a:ea typeface="Trebuchet MS" pitchFamily="34" charset="-122"/>
+                <a:cs typeface="Trebuchet MS" pitchFamily="34" charset="-120"/>
+              </a:rPr>
+              <a:t>1</a:t>
+            </a:r>
+            <a:endParaRPr lang="en-US" sz="1600" dirty="0"/>
+          </a:p>
+        </p:txBody>
+      </p:sp>
+      <p:sp>
+        <p:nvSpPr>
+          <p:cNvPr id="7" name="Text 5"/>
+          <p:cNvSpPr/>
+          <p:nvPr/>
+        </p:nvSpPr>
+        <p:spPr>
+          <a:xfrm>
+            <a:off x="1051560" y="914400"/>
+            <a:ext cx="7498080" cy="566928"/>
           </a:xfrm>
           <a:prstGeom prst="rect">
             <a:avLst/>
@@ -4550,30 +10081,116 @@
               <a:buNone/>
             </a:pPr>
             <a:r>
-              <a:rPr lang="en-US" sz="1000" b="1" dirty="0">
+              <a:rPr lang="en-US" sz="1100" dirty="0">
                 <a:solidFill>
-                  <a:srgbClr val="1B5E20"/>
+                  <a:srgbClr val="1A1A2E"/>
+                </a:solidFill>
+                <a:latin typeface="Calibri" pitchFamily="34" charset="0"/>
+                <a:ea typeface="Calibri" pitchFamily="34" charset="-122"/>
+                <a:cs typeface="Calibri" pitchFamily="34" charset="-120"/>
+              </a:rPr>
+              <a:t>Compléter la matrice des DF pour les 8 entités principales de SwissSound</a:t>
+            </a:r>
+            <a:endParaRPr lang="en-US" sz="1100" dirty="0"/>
+          </a:p>
+        </p:txBody>
+      </p:sp>
+      <p:sp>
+        <p:nvSpPr>
+          <p:cNvPr id="8" name="Shape 6"/>
+          <p:cNvSpPr/>
+          <p:nvPr/>
+        </p:nvSpPr>
+        <p:spPr>
+          <a:xfrm>
+            <a:off x="457200" y="1554480"/>
+            <a:ext cx="8229600" cy="566928"/>
+          </a:xfrm>
+          <a:prstGeom prst="rect">
+            <a:avLst/>
+          </a:prstGeom>
+          <a:solidFill>
+            <a:srgbClr val="FFFFFF"/>
+          </a:solidFill>
+          <a:ln/>
+          <a:effectLst>
+            <a:outerShdw sx="100000" sy="100000" kx="0" ky="0" algn="bl" rotWithShape="0" blurRad="50800" dist="25400" dir="8100000">
+              <a:srgbClr val="000000">
+                <a:alpha val="12000"/>
+              </a:srgbClr>
+            </a:outerShdw>
+          </a:effectLst>
+        </p:spPr>
+      </p:sp>
+      <p:sp>
+        <p:nvSpPr>
+          <p:cNvPr id="9" name="Shape 7"/>
+          <p:cNvSpPr/>
+          <p:nvPr/>
+        </p:nvSpPr>
+        <p:spPr>
+          <a:xfrm>
+            <a:off x="457200" y="1554480"/>
+            <a:ext cx="457200" cy="566928"/>
+          </a:xfrm>
+          <a:prstGeom prst="rect">
+            <a:avLst/>
+          </a:prstGeom>
+          <a:solidFill>
+            <a:srgbClr val="FF6F00"/>
+          </a:solidFill>
+          <a:ln/>
+        </p:spPr>
+      </p:sp>
+      <p:sp>
+        <p:nvSpPr>
+          <p:cNvPr id="10" name="Text 8"/>
+          <p:cNvSpPr/>
+          <p:nvPr/>
+        </p:nvSpPr>
+        <p:spPr>
+          <a:xfrm>
+            <a:off x="457200" y="1554480"/>
+            <a:ext cx="457200" cy="566928"/>
+          </a:xfrm>
+          <a:prstGeom prst="rect">
+            <a:avLst/>
+          </a:prstGeom>
+          <a:noFill/>
+          <a:ln/>
+        </p:spPr>
+        <p:txBody>
+          <a:bodyPr wrap="square" lIns="0" tIns="0" rIns="0" bIns="0" rtlCol="0" anchor="ctr"/>
+          <a:lstStyle/>
+          <a:p>
+            <a:pPr algn="ctr" indent="0" marL="0">
+              <a:buNone/>
+            </a:pPr>
+            <a:r>
+              <a:rPr lang="en-US" sz="1600" b="1" dirty="0">
+                <a:solidFill>
+                  <a:srgbClr val="FFFFFF"/>
                 </a:solidFill>
                 <a:latin typeface="Trebuchet MS" pitchFamily="34" charset="0"/>
                 <a:ea typeface="Trebuchet MS" pitchFamily="34" charset="-122"/>
                 <a:cs typeface="Trebuchet MS" pitchFamily="34" charset="-120"/>
               </a:rPr>
-              <a:t>Graphe des DF (SAT/SRE)</a:t>
+              <a:t>2</a:t>
             </a:r>
-            <a:endParaRPr lang="en-US" sz="1000" dirty="0"/>
+            <a:endParaRPr lang="en-US" sz="1600" dirty="0"/>
           </a:p>
         </p:txBody>
       </p:sp>
       <p:sp>
         <p:nvSpPr>
-          <p:cNvPr id="16" name="Text 14"/>
-          <p:cNvSpPr/>
-          <p:nvPr/>
-        </p:nvSpPr>
-        <p:spPr>
-          <a:xfrm>
-            <a:off x="3291840" y="3520440"/>
-            <a:ext cx="5212080" cy="713232"/>
+          <p:cNvPr id="11" name="Text 9"/>
+          <p:cNvSpPr/>
+          <p:nvPr/>
+        </p:nvSpPr>
+        <p:spPr>
+          <a:xfrm>
+            <a:off x="1051560" y="1554480"/>
+            <a:ext cx="7498080" cy="566928"/>
           </a:xfrm>
           <a:prstGeom prst="rect">
             <a:avLst/>
@@ -4589,17 +10206,761 @@
               <a:buNone/>
             </a:pPr>
             <a:r>
-              <a:rPr lang="en-US" sz="900" dirty="0">
+              <a:rPr lang="en-US" sz="1100" dirty="0">
                 <a:solidFill>
-                  <a:srgbClr val="333333"/>
+                  <a:srgbClr val="1A1A2E"/>
                 </a:solidFill>
                 <a:latin typeface="Calibri" pitchFamily="34" charset="0"/>
                 <a:ea typeface="Calibri" pitchFamily="34" charset="-122"/>
                 <a:cs typeface="Calibri" pitchFamily="34" charset="-120"/>
               </a:rPr>
-              <a:t>Représentation visuelle des dépendances | Nœuds = données, flèches = DF | Sources = nœuds sans flèche entrante (futures ...</a:t>
+              <a:t>Identifier toutes les SOURCES de la matrice</a:t>
             </a:r>
-            <a:endParaRPr lang="en-US" sz="900" dirty="0"/>
+            <a:endParaRPr lang="en-US" sz="1100" dirty="0"/>
+          </a:p>
+        </p:txBody>
+      </p:sp>
+      <p:sp>
+        <p:nvSpPr>
+          <p:cNvPr id="12" name="Shape 10"/>
+          <p:cNvSpPr/>
+          <p:nvPr/>
+        </p:nvSpPr>
+        <p:spPr>
+          <a:xfrm>
+            <a:off x="457200" y="2194560"/>
+            <a:ext cx="8229600" cy="566928"/>
+          </a:xfrm>
+          <a:prstGeom prst="rect">
+            <a:avLst/>
+          </a:prstGeom>
+          <a:solidFill>
+            <a:srgbClr val="FFFFFF"/>
+          </a:solidFill>
+          <a:ln/>
+          <a:effectLst>
+            <a:outerShdw sx="100000" sy="100000" kx="0" ky="0" algn="bl" rotWithShape="0" blurRad="50800" dist="25400" dir="8100000">
+              <a:srgbClr val="000000">
+                <a:alpha val="12000"/>
+              </a:srgbClr>
+            </a:outerShdw>
+          </a:effectLst>
+        </p:spPr>
+      </p:sp>
+      <p:sp>
+        <p:nvSpPr>
+          <p:cNvPr id="13" name="Shape 11"/>
+          <p:cNvSpPr/>
+          <p:nvPr/>
+        </p:nvSpPr>
+        <p:spPr>
+          <a:xfrm>
+            <a:off x="457200" y="2194560"/>
+            <a:ext cx="457200" cy="566928"/>
+          </a:xfrm>
+          <a:prstGeom prst="rect">
+            <a:avLst/>
+          </a:prstGeom>
+          <a:solidFill>
+            <a:srgbClr val="FF6F00"/>
+          </a:solidFill>
+          <a:ln/>
+        </p:spPr>
+      </p:sp>
+      <p:sp>
+        <p:nvSpPr>
+          <p:cNvPr id="14" name="Text 12"/>
+          <p:cNvSpPr/>
+          <p:nvPr/>
+        </p:nvSpPr>
+        <p:spPr>
+          <a:xfrm>
+            <a:off x="457200" y="2194560"/>
+            <a:ext cx="457200" cy="566928"/>
+          </a:xfrm>
+          <a:prstGeom prst="rect">
+            <a:avLst/>
+          </a:prstGeom>
+          <a:noFill/>
+          <a:ln/>
+        </p:spPr>
+        <p:txBody>
+          <a:bodyPr wrap="square" lIns="0" tIns="0" rIns="0" bIns="0" rtlCol="0" anchor="ctr"/>
+          <a:lstStyle/>
+          <a:p>
+            <a:pPr algn="ctr" indent="0" marL="0">
+              <a:buNone/>
+            </a:pPr>
+            <a:r>
+              <a:rPr lang="en-US" sz="1600" b="1" dirty="0">
+                <a:solidFill>
+                  <a:srgbClr val="FFFFFF"/>
+                </a:solidFill>
+                <a:latin typeface="Trebuchet MS" pitchFamily="34" charset="0"/>
+                <a:ea typeface="Trebuchet MS" pitchFamily="34" charset="-122"/>
+                <a:cs typeface="Trebuchet MS" pitchFamily="34" charset="-120"/>
+              </a:rPr>
+              <a:t>3</a:t>
+            </a:r>
+            <a:endParaRPr lang="en-US" sz="1600" dirty="0"/>
+          </a:p>
+        </p:txBody>
+      </p:sp>
+      <p:sp>
+        <p:nvSpPr>
+          <p:cNvPr id="15" name="Text 13"/>
+          <p:cNvSpPr/>
+          <p:nvPr/>
+        </p:nvSpPr>
+        <p:spPr>
+          <a:xfrm>
+            <a:off x="1051560" y="2194560"/>
+            <a:ext cx="7498080" cy="566928"/>
+          </a:xfrm>
+          <a:prstGeom prst="rect">
+            <a:avLst/>
+          </a:prstGeom>
+          <a:noFill/>
+          <a:ln/>
+        </p:spPr>
+        <p:txBody>
+          <a:bodyPr wrap="square" lIns="0" tIns="0" rIns="0" bIns="0" rtlCol="0" anchor="ctr"/>
+          <a:lstStyle/>
+          <a:p>
+            <a:pPr indent="0" marL="0">
+              <a:buNone/>
+            </a:pPr>
+            <a:r>
+              <a:rPr lang="en-US" sz="1100" dirty="0">
+                <a:solidFill>
+                  <a:srgbClr val="1A1A2E"/>
+                </a:solidFill>
+                <a:latin typeface="Calibri" pitchFamily="34" charset="0"/>
+                <a:ea typeface="Calibri" pitchFamily="34" charset="-122"/>
+                <a:cs typeface="Calibri" pitchFamily="34" charset="-120"/>
+              </a:rPr>
+              <a:t>Dessiner le graphe des DF complet (Draw.io ou papier)</a:t>
+            </a:r>
+            <a:endParaRPr lang="en-US" sz="1100" dirty="0"/>
+          </a:p>
+        </p:txBody>
+      </p:sp>
+      <p:sp>
+        <p:nvSpPr>
+          <p:cNvPr id="16" name="Shape 14"/>
+          <p:cNvSpPr/>
+          <p:nvPr/>
+        </p:nvSpPr>
+        <p:spPr>
+          <a:xfrm>
+            <a:off x="457200" y="2834640"/>
+            <a:ext cx="8229600" cy="566928"/>
+          </a:xfrm>
+          <a:prstGeom prst="rect">
+            <a:avLst/>
+          </a:prstGeom>
+          <a:solidFill>
+            <a:srgbClr val="FFFFFF"/>
+          </a:solidFill>
+          <a:ln/>
+          <a:effectLst>
+            <a:outerShdw sx="100000" sy="100000" kx="0" ky="0" algn="bl" rotWithShape="0" blurRad="50800" dist="25400" dir="8100000">
+              <a:srgbClr val="000000">
+                <a:alpha val="12000"/>
+              </a:srgbClr>
+            </a:outerShdw>
+          </a:effectLst>
+        </p:spPr>
+      </p:sp>
+      <p:sp>
+        <p:nvSpPr>
+          <p:cNvPr id="17" name="Shape 15"/>
+          <p:cNvSpPr/>
+          <p:nvPr/>
+        </p:nvSpPr>
+        <p:spPr>
+          <a:xfrm>
+            <a:off x="457200" y="2834640"/>
+            <a:ext cx="457200" cy="566928"/>
+          </a:xfrm>
+          <a:prstGeom prst="rect">
+            <a:avLst/>
+          </a:prstGeom>
+          <a:solidFill>
+            <a:srgbClr val="FF6F00"/>
+          </a:solidFill>
+          <a:ln/>
+        </p:spPr>
+      </p:sp>
+      <p:sp>
+        <p:nvSpPr>
+          <p:cNvPr id="18" name="Text 16"/>
+          <p:cNvSpPr/>
+          <p:nvPr/>
+        </p:nvSpPr>
+        <p:spPr>
+          <a:xfrm>
+            <a:off x="457200" y="2834640"/>
+            <a:ext cx="457200" cy="566928"/>
+          </a:xfrm>
+          <a:prstGeom prst="rect">
+            <a:avLst/>
+          </a:prstGeom>
+          <a:noFill/>
+          <a:ln/>
+        </p:spPr>
+        <p:txBody>
+          <a:bodyPr wrap="square" lIns="0" tIns="0" rIns="0" bIns="0" rtlCol="0" anchor="ctr"/>
+          <a:lstStyle/>
+          <a:p>
+            <a:pPr algn="ctr" indent="0" marL="0">
+              <a:buNone/>
+            </a:pPr>
+            <a:r>
+              <a:rPr lang="en-US" sz="1600" b="1" dirty="0">
+                <a:solidFill>
+                  <a:srgbClr val="FFFFFF"/>
+                </a:solidFill>
+                <a:latin typeface="Trebuchet MS" pitchFamily="34" charset="0"/>
+                <a:ea typeface="Trebuchet MS" pitchFamily="34" charset="-122"/>
+                <a:cs typeface="Trebuchet MS" pitchFamily="34" charset="-120"/>
+              </a:rPr>
+              <a:t>4</a:t>
+            </a:r>
+            <a:endParaRPr lang="en-US" sz="1600" dirty="0"/>
+          </a:p>
+        </p:txBody>
+      </p:sp>
+      <p:sp>
+        <p:nvSpPr>
+          <p:cNvPr id="19" name="Text 17"/>
+          <p:cNvSpPr/>
+          <p:nvPr/>
+        </p:nvSpPr>
+        <p:spPr>
+          <a:xfrm>
+            <a:off x="1051560" y="2834640"/>
+            <a:ext cx="7498080" cy="566928"/>
+          </a:xfrm>
+          <a:prstGeom prst="rect">
+            <a:avLst/>
+          </a:prstGeom>
+          <a:noFill/>
+          <a:ln/>
+        </p:spPr>
+        <p:txBody>
+          <a:bodyPr wrap="square" lIns="0" tIns="0" rIns="0" bIns="0" rtlCol="0" anchor="ctr"/>
+          <a:lstStyle/>
+          <a:p>
+            <a:pPr indent="0" marL="0">
+              <a:buNone/>
+            </a:pPr>
+            <a:r>
+              <a:rPr lang="en-US" sz="1100" dirty="0">
+                <a:solidFill>
+                  <a:srgbClr val="1A1A2E"/>
+                </a:solidFill>
+                <a:latin typeface="Calibri" pitchFamily="34" charset="0"/>
+                <a:ea typeface="Calibri" pitchFamily="34" charset="-122"/>
+                <a:cs typeface="Calibri" pitchFamily="34" charset="-120"/>
+              </a:rPr>
+              <a:t>Identifier les DF TRANSITIVES et expliquer pourquoi elles posent problème</a:t>
+            </a:r>
+            <a:endParaRPr lang="en-US" sz="1100" dirty="0"/>
+          </a:p>
+        </p:txBody>
+      </p:sp>
+      <p:sp>
+        <p:nvSpPr>
+          <p:cNvPr id="20" name="Shape 18"/>
+          <p:cNvSpPr/>
+          <p:nvPr/>
+        </p:nvSpPr>
+        <p:spPr>
+          <a:xfrm>
+            <a:off x="457200" y="3474720"/>
+            <a:ext cx="8229600" cy="566928"/>
+          </a:xfrm>
+          <a:prstGeom prst="rect">
+            <a:avLst/>
+          </a:prstGeom>
+          <a:solidFill>
+            <a:srgbClr val="FFFFFF"/>
+          </a:solidFill>
+          <a:ln/>
+          <a:effectLst>
+            <a:outerShdw sx="100000" sy="100000" kx="0" ky="0" algn="bl" rotWithShape="0" blurRad="50800" dist="25400" dir="8100000">
+              <a:srgbClr val="000000">
+                <a:alpha val="12000"/>
+              </a:srgbClr>
+            </a:outerShdw>
+          </a:effectLst>
+        </p:spPr>
+      </p:sp>
+      <p:sp>
+        <p:nvSpPr>
+          <p:cNvPr id="21" name="Shape 19"/>
+          <p:cNvSpPr/>
+          <p:nvPr/>
+        </p:nvSpPr>
+        <p:spPr>
+          <a:xfrm>
+            <a:off x="457200" y="3474720"/>
+            <a:ext cx="457200" cy="566928"/>
+          </a:xfrm>
+          <a:prstGeom prst="rect">
+            <a:avLst/>
+          </a:prstGeom>
+          <a:solidFill>
+            <a:srgbClr val="FF6F00"/>
+          </a:solidFill>
+          <a:ln/>
+        </p:spPr>
+      </p:sp>
+      <p:sp>
+        <p:nvSpPr>
+          <p:cNvPr id="22" name="Text 20"/>
+          <p:cNvSpPr/>
+          <p:nvPr/>
+        </p:nvSpPr>
+        <p:spPr>
+          <a:xfrm>
+            <a:off x="457200" y="3474720"/>
+            <a:ext cx="457200" cy="566928"/>
+          </a:xfrm>
+          <a:prstGeom prst="rect">
+            <a:avLst/>
+          </a:prstGeom>
+          <a:noFill/>
+          <a:ln/>
+        </p:spPr>
+        <p:txBody>
+          <a:bodyPr wrap="square" lIns="0" tIns="0" rIns="0" bIns="0" rtlCol="0" anchor="ctr"/>
+          <a:lstStyle/>
+          <a:p>
+            <a:pPr algn="ctr" indent="0" marL="0">
+              <a:buNone/>
+            </a:pPr>
+            <a:r>
+              <a:rPr lang="en-US" sz="1600" b="1" dirty="0">
+                <a:solidFill>
+                  <a:srgbClr val="FFFFFF"/>
+                </a:solidFill>
+                <a:latin typeface="Trebuchet MS" pitchFamily="34" charset="0"/>
+                <a:ea typeface="Trebuchet MS" pitchFamily="34" charset="-122"/>
+                <a:cs typeface="Trebuchet MS" pitchFamily="34" charset="-120"/>
+              </a:rPr>
+              <a:t>5</a:t>
+            </a:r>
+            <a:endParaRPr lang="en-US" sz="1600" dirty="0"/>
+          </a:p>
+        </p:txBody>
+      </p:sp>
+      <p:sp>
+        <p:nvSpPr>
+          <p:cNvPr id="23" name="Text 21"/>
+          <p:cNvSpPr/>
+          <p:nvPr/>
+        </p:nvSpPr>
+        <p:spPr>
+          <a:xfrm>
+            <a:off x="1051560" y="3474720"/>
+            <a:ext cx="7498080" cy="566928"/>
+          </a:xfrm>
+          <a:prstGeom prst="rect">
+            <a:avLst/>
+          </a:prstGeom>
+          <a:noFill/>
+          <a:ln/>
+        </p:spPr>
+        <p:txBody>
+          <a:bodyPr wrap="square" lIns="0" tIns="0" rIns="0" bIns="0" rtlCol="0" anchor="ctr"/>
+          <a:lstStyle/>
+          <a:p>
+            <a:pPr indent="0" marL="0">
+              <a:buNone/>
+            </a:pPr>
+            <a:r>
+              <a:rPr lang="en-US" sz="1100" dirty="0">
+                <a:solidFill>
+                  <a:srgbClr val="1A1A2E"/>
+                </a:solidFill>
+                <a:latin typeface="Calibri" pitchFamily="34" charset="0"/>
+                <a:ea typeface="Calibri" pitchFamily="34" charset="-122"/>
+                <a:cs typeface="Calibri" pitchFamily="34" charset="-120"/>
+              </a:rPr>
+              <a:t>Entourer les sources → ce seront les entités du MCD</a:t>
+            </a:r>
+            <a:endParaRPr lang="en-US" sz="1100" dirty="0"/>
+          </a:p>
+        </p:txBody>
+      </p:sp>
+      <p:sp>
+        <p:nvSpPr>
+          <p:cNvPr id="24" name="Shape 22"/>
+          <p:cNvSpPr/>
+          <p:nvPr/>
+        </p:nvSpPr>
+        <p:spPr>
+          <a:xfrm>
+            <a:off x="457200" y="4114800"/>
+            <a:ext cx="8229600" cy="566928"/>
+          </a:xfrm>
+          <a:prstGeom prst="rect">
+            <a:avLst/>
+          </a:prstGeom>
+          <a:solidFill>
+            <a:srgbClr val="FFFFFF"/>
+          </a:solidFill>
+          <a:ln/>
+          <a:effectLst>
+            <a:outerShdw sx="100000" sy="100000" kx="0" ky="0" algn="bl" rotWithShape="0" blurRad="50800" dist="25400" dir="8100000">
+              <a:srgbClr val="000000">
+                <a:alpha val="12000"/>
+              </a:srgbClr>
+            </a:outerShdw>
+          </a:effectLst>
+        </p:spPr>
+      </p:sp>
+      <p:sp>
+        <p:nvSpPr>
+          <p:cNvPr id="25" name="Shape 23"/>
+          <p:cNvSpPr/>
+          <p:nvPr/>
+        </p:nvSpPr>
+        <p:spPr>
+          <a:xfrm>
+            <a:off x="457200" y="4114800"/>
+            <a:ext cx="457200" cy="566928"/>
+          </a:xfrm>
+          <a:prstGeom prst="rect">
+            <a:avLst/>
+          </a:prstGeom>
+          <a:solidFill>
+            <a:srgbClr val="FF6F00"/>
+          </a:solidFill>
+          <a:ln/>
+        </p:spPr>
+      </p:sp>
+      <p:sp>
+        <p:nvSpPr>
+          <p:cNvPr id="26" name="Text 24"/>
+          <p:cNvSpPr/>
+          <p:nvPr/>
+        </p:nvSpPr>
+        <p:spPr>
+          <a:xfrm>
+            <a:off x="457200" y="4114800"/>
+            <a:ext cx="457200" cy="566928"/>
+          </a:xfrm>
+          <a:prstGeom prst="rect">
+            <a:avLst/>
+          </a:prstGeom>
+          <a:noFill/>
+          <a:ln/>
+        </p:spPr>
+        <p:txBody>
+          <a:bodyPr wrap="square" lIns="0" tIns="0" rIns="0" bIns="0" rtlCol="0" anchor="ctr"/>
+          <a:lstStyle/>
+          <a:p>
+            <a:pPr algn="ctr" indent="0" marL="0">
+              <a:buNone/>
+            </a:pPr>
+            <a:r>
+              <a:rPr lang="en-US" sz="1600" b="1" dirty="0">
+                <a:solidFill>
+                  <a:srgbClr val="FFFFFF"/>
+                </a:solidFill>
+                <a:latin typeface="Trebuchet MS" pitchFamily="34" charset="0"/>
+                <a:ea typeface="Trebuchet MS" pitchFamily="34" charset="-122"/>
+                <a:cs typeface="Trebuchet MS" pitchFamily="34" charset="-120"/>
+              </a:rPr>
+              <a:t>6</a:t>
+            </a:r>
+            <a:endParaRPr lang="en-US" sz="1600" dirty="0"/>
+          </a:p>
+        </p:txBody>
+      </p:sp>
+      <p:sp>
+        <p:nvSpPr>
+          <p:cNvPr id="27" name="Text 25"/>
+          <p:cNvSpPr/>
+          <p:nvPr/>
+        </p:nvSpPr>
+        <p:spPr>
+          <a:xfrm>
+            <a:off x="1051560" y="4114800"/>
+            <a:ext cx="7498080" cy="566928"/>
+          </a:xfrm>
+          <a:prstGeom prst="rect">
+            <a:avLst/>
+          </a:prstGeom>
+          <a:noFill/>
+          <a:ln/>
+        </p:spPr>
+        <p:txBody>
+          <a:bodyPr wrap="square" lIns="0" tIns="0" rIns="0" bIns="0" rtlCol="0" anchor="ctr"/>
+          <a:lstStyle/>
+          <a:p>
+            <a:pPr indent="0" marL="0">
+              <a:buNone/>
+            </a:pPr>
+            <a:r>
+              <a:rPr lang="en-US" sz="1100" dirty="0">
+                <a:solidFill>
+                  <a:srgbClr val="1A1A2E"/>
+                </a:solidFill>
+                <a:latin typeface="Calibri" pitchFamily="34" charset="0"/>
+                <a:ea typeface="Calibri" pitchFamily="34" charset="-122"/>
+                <a:cs typeface="Calibri" pitchFamily="34" charset="-120"/>
+              </a:rPr>
+              <a:t>DÉFI : trouver un cas de DF transitive et montrer l'anomalie qu'elle causerait</a:t>
+            </a:r>
+            <a:endParaRPr lang="en-US" sz="1100" dirty="0"/>
+          </a:p>
+        </p:txBody>
+      </p:sp>
+    </p:spTree>
+  </p:cSld>
+  <p:clrMapOvr>
+    <a:masterClrMapping/>
+  </p:clrMapOvr>
+</p:sld>
+</file>
+
+<file path=ppt/slides/slide9.xml><?xml version="1.0" encoding="utf-8"?>
+<p:sld xmlns:a="http://schemas.openxmlformats.org/drawingml/2006/main" xmlns:r="http://schemas.openxmlformats.org/officeDocument/2006/relationships" xmlns:p="http://schemas.openxmlformats.org/presentationml/2006/main">
+  <p:cSld name="Slide 9">
+    <p:bg>
+      <p:bgPr>
+        <a:solidFill>
+          <a:srgbClr val="1B5E20"/>
+        </a:solidFill>
+      </p:bgPr>
+    </p:bg>
+    <p:spTree>
+      <p:nvGrpSpPr>
+        <p:cNvPr id="1" name=""/>
+        <p:cNvGrpSpPr/>
+        <p:nvPr/>
+      </p:nvGrpSpPr>
+      <p:grpSpPr>
+        <a:xfrm>
+          <a:off x="0" y="0"/>
+          <a:ext cx="0" cy="0"/>
+          <a:chOff x="0" y="0"/>
+          <a:chExt cx="0" cy="0"/>
+        </a:xfrm>
+      </p:grpSpPr>
+      <p:sp>
+        <p:nvSpPr>
+          <p:cNvPr id="2" name="Text 0"/>
+          <p:cNvSpPr/>
+          <p:nvPr/>
+        </p:nvSpPr>
+        <p:spPr>
+          <a:xfrm>
+            <a:off x="3840480" y="457200"/>
+            <a:ext cx="1463040" cy="1097280"/>
+          </a:xfrm>
+          <a:prstGeom prst="rect">
+            <a:avLst/>
+          </a:prstGeom>
+          <a:noFill/>
+          <a:ln/>
+        </p:spPr>
+        <p:txBody>
+          <a:bodyPr wrap="square" lIns="0" tIns="0" rIns="0" bIns="0" rtlCol="0" anchor="ctr"/>
+          <a:lstStyle/>
+          <a:p>
+            <a:pPr algn="ctr" indent="0" marL="0">
+              <a:buNone/>
+            </a:pPr>
+            <a:r>
+              <a:rPr lang="en-US" sz="6000" dirty="0">
+                <a:solidFill>
+                  <a:srgbClr val="000000"/>
+                </a:solidFill>
+              </a:rPr>
+              <a:t>🎮</a:t>
+            </a:r>
+            <a:endParaRPr lang="en-US" sz="6000" dirty="0"/>
+          </a:p>
+        </p:txBody>
+      </p:sp>
+      <p:sp>
+        <p:nvSpPr>
+          <p:cNvPr id="3" name="Text 1"/>
+          <p:cNvSpPr/>
+          <p:nvPr/>
+        </p:nvSpPr>
+        <p:spPr>
+          <a:xfrm>
+            <a:off x="457200" y="1645920"/>
+            <a:ext cx="8229600" cy="548640"/>
+          </a:xfrm>
+          <a:prstGeom prst="rect">
+            <a:avLst/>
+          </a:prstGeom>
+          <a:noFill/>
+          <a:ln/>
+        </p:spPr>
+        <p:txBody>
+          <a:bodyPr wrap="square" lIns="0" tIns="0" rIns="0" bIns="0" rtlCol="0" anchor="ctr"/>
+          <a:lstStyle/>
+          <a:p>
+            <a:pPr algn="ctr" indent="0" marL="0">
+              <a:buNone/>
+            </a:pPr>
+            <a:r>
+              <a:rPr lang="en-US" sz="2600" b="1" dirty="0">
+                <a:solidFill>
+                  <a:srgbClr val="FFFFFF"/>
+                </a:solidFill>
+                <a:latin typeface="Trebuchet MS" pitchFamily="34" charset="0"/>
+                <a:ea typeface="Trebuchet MS" pitchFamily="34" charset="-122"/>
+                <a:cs typeface="Trebuchet MS" pitchFamily="34" charset="-120"/>
+              </a:rPr>
+              <a:t>Mini-jeu : Le Détective des Dépendances</a:t>
+            </a:r>
+            <a:endParaRPr lang="en-US" sz="2600" dirty="0"/>
+          </a:p>
+        </p:txBody>
+      </p:sp>
+      <p:sp>
+        <p:nvSpPr>
+          <p:cNvPr id="4" name="Text 2"/>
+          <p:cNvSpPr/>
+          <p:nvPr/>
+        </p:nvSpPr>
+        <p:spPr>
+          <a:xfrm>
+            <a:off x="1371600" y="2286000"/>
+            <a:ext cx="6400800" cy="731520"/>
+          </a:xfrm>
+          <a:prstGeom prst="rect">
+            <a:avLst/>
+          </a:prstGeom>
+          <a:noFill/>
+          <a:ln/>
+        </p:spPr>
+        <p:txBody>
+          <a:bodyPr wrap="square" lIns="0" tIns="0" rIns="0" bIns="0" rtlCol="0" anchor="ctr"/>
+          <a:lstStyle/>
+          <a:p>
+            <a:pPr algn="ctr" indent="0" marL="0">
+              <a:buNone/>
+            </a:pPr>
+            <a:r>
+              <a:rPr lang="en-US" sz="1400" dirty="0">
+                <a:solidFill>
+                  <a:srgbClr val="CCCCCC"/>
+                </a:solidFill>
+                <a:latin typeface="Calibri" pitchFamily="34" charset="0"/>
+                <a:ea typeface="Calibri" pitchFamily="34" charset="-122"/>
+                <a:cs typeface="Calibri" pitchFamily="34" charset="-120"/>
+              </a:rPr>
+              <a:t>Identifiez les dépendances fonctionnelles entre données !</a:t>
+            </a:r>
+            <a:endParaRPr lang="en-US" sz="1400" dirty="0"/>
+          </a:p>
+        </p:txBody>
+      </p:sp>
+      <p:sp>
+        <p:nvSpPr>
+          <p:cNvPr id="5" name="Shape 3"/>
+          <p:cNvSpPr/>
+          <p:nvPr/>
+        </p:nvSpPr>
+        <p:spPr>
+          <a:xfrm>
+            <a:off x="2286000" y="3291840"/>
+            <a:ext cx="4572000" cy="548640"/>
+          </a:xfrm>
+          <a:prstGeom prst="rect">
+            <a:avLst/>
+          </a:prstGeom>
+          <a:solidFill>
+            <a:srgbClr val="FF6F00"/>
+          </a:solidFill>
+          <a:ln/>
+        </p:spPr>
+      </p:sp>
+      <p:sp>
+        <p:nvSpPr>
+          <p:cNvPr id="6" name="Text 4"/>
+          <p:cNvSpPr/>
+          <p:nvPr/>
+        </p:nvSpPr>
+        <p:spPr>
+          <a:xfrm>
+            <a:off x="2286000" y="3291840"/>
+            <a:ext cx="4572000" cy="548640"/>
+          </a:xfrm>
+          <a:prstGeom prst="rect">
+            <a:avLst/>
+          </a:prstGeom>
+          <a:noFill/>
+          <a:ln/>
+        </p:spPr>
+        <p:txBody>
+          <a:bodyPr wrap="square" lIns="0" tIns="0" rIns="0" bIns="0" rtlCol="0" anchor="ctr"/>
+          <a:lstStyle/>
+          <a:p>
+            <a:pPr algn="ctr" indent="0" marL="0">
+              <a:buNone/>
+            </a:pPr>
+            <a:r>
+              <a:rPr lang="en-US" sz="1800" b="1" dirty="0">
+                <a:solidFill>
+                  <a:srgbClr val="FFFFFF"/>
+                </a:solidFill>
+                <a:latin typeface="Trebuchet MS" pitchFamily="34" charset="0"/>
+                <a:ea typeface="Trebuchet MS" pitchFamily="34" charset="-122"/>
+                <a:cs typeface="Trebuchet MS" pitchFamily="34" charset="-120"/>
+              </a:rPr>
+              <a:t>▶  Lancer le jeu</a:t>
+            </a:r>
+            <a:endParaRPr lang="en-US" sz="1800" dirty="0"/>
+          </a:p>
+        </p:txBody>
+      </p:sp>
+      <p:sp>
+        <p:nvSpPr>
+          <p:cNvPr id="7" name="Text 5"/>
+          <p:cNvSpPr/>
+          <p:nvPr/>
+        </p:nvSpPr>
+        <p:spPr>
+          <a:xfrm>
+            <a:off x="914400" y="4114800"/>
+            <a:ext cx="7315200" cy="365760"/>
+          </a:xfrm>
+          <a:prstGeom prst="rect">
+            <a:avLst/>
+          </a:prstGeom>
+          <a:noFill/>
+          <a:ln/>
+        </p:spPr>
+        <p:txBody>
+          <a:bodyPr wrap="square" lIns="0" tIns="0" rIns="0" bIns="0" rtlCol="0" anchor="ctr"/>
+          <a:lstStyle/>
+          <a:p>
+            <a:pPr algn="ctr" indent="0" marL="0">
+              <a:buNone/>
+            </a:pPr>
+            <a:r>
+              <a:rPr lang="en-US" sz="1100" dirty="0">
+                <a:solidFill>
+                  <a:srgbClr val="8888AA"/>
+                </a:solidFill>
+                <a:latin typeface="Calibri" pitchFamily="34" charset="0"/>
+                <a:ea typeface="Calibri" pitchFamily="34" charset="-122"/>
+                <a:cs typeface="Calibri" pitchFamily="34" charset="-120"/>
+              </a:rPr>
+              <a:t>Score + Correction automatique + Historique</a:t>
+            </a:r>
+            <a:endParaRPr lang="en-US" sz="1100" dirty="0"/>
           </a:p>
         </p:txBody>
       </p:sp>
